--- a/Лекции/ООП 2 лек 8.pptx
+++ b/Лекции/ООП 2 лек 8.pptx
@@ -5,7 +5,7 @@
     <p:sldMasterId id="2147483674" r:id="rId1"/>
   </p:sldMasterIdLst>
   <p:notesMasterIdLst>
-    <p:notesMasterId r:id="rId11"/>
+    <p:notesMasterId r:id="rId36"/>
   </p:notesMasterIdLst>
   <p:sldIdLst>
     <p:sldId id="273" r:id="rId2"/>
@@ -16,7 +16,32 @@
     <p:sldId id="1241" r:id="rId7"/>
     <p:sldId id="1242" r:id="rId8"/>
     <p:sldId id="1243" r:id="rId9"/>
-    <p:sldId id="1225" r:id="rId10"/>
+    <p:sldId id="1247" r:id="rId10"/>
+    <p:sldId id="1248" r:id="rId11"/>
+    <p:sldId id="1249" r:id="rId12"/>
+    <p:sldId id="1250" r:id="rId13"/>
+    <p:sldId id="1251" r:id="rId14"/>
+    <p:sldId id="1256" r:id="rId15"/>
+    <p:sldId id="1257" r:id="rId16"/>
+    <p:sldId id="1258" r:id="rId17"/>
+    <p:sldId id="1259" r:id="rId18"/>
+    <p:sldId id="1260" r:id="rId19"/>
+    <p:sldId id="1261" r:id="rId20"/>
+    <p:sldId id="1262" r:id="rId21"/>
+    <p:sldId id="1263" r:id="rId22"/>
+    <p:sldId id="1264" r:id="rId23"/>
+    <p:sldId id="1265" r:id="rId24"/>
+    <p:sldId id="1266" r:id="rId25"/>
+    <p:sldId id="1267" r:id="rId26"/>
+    <p:sldId id="1268" r:id="rId27"/>
+    <p:sldId id="1269" r:id="rId28"/>
+    <p:sldId id="1270" r:id="rId29"/>
+    <p:sldId id="1271" r:id="rId30"/>
+    <p:sldId id="1272" r:id="rId31"/>
+    <p:sldId id="1273" r:id="rId32"/>
+    <p:sldId id="1274" r:id="rId33"/>
+    <p:sldId id="1275" r:id="rId34"/>
+    <p:sldId id="1225" r:id="rId35"/>
   </p:sldIdLst>
   <p:sldSz cx="12192000" cy="6858000"/>
   <p:notesSz cx="6858000" cy="9144000"/>
@@ -220,7 +245,7 @@
             <a:fld id="{AA2F9473-F066-431E-A6E8-1D478C995A6B}" type="datetimeFigureOut">
               <a:rPr lang="en-US" smtClean="0"/>
               <a:pPr/>
-              <a:t>2/17/2026</a:t>
+              <a:t>2/18/2026</a:t>
             </a:fld>
             <a:endParaRPr lang="en-US"/>
           </a:p>
@@ -579,6 +604,906 @@
 </p:notes>
 </file>
 
+<file path=ppt/notesSlides/notesSlide10.xml><?xml version="1.0" encoding="utf-8"?>
+<p:notes xmlns:a="http://schemas.openxmlformats.org/drawingml/2006/main" xmlns:r="http://schemas.openxmlformats.org/officeDocument/2006/relationships" xmlns:p="http://schemas.openxmlformats.org/presentationml/2006/main">
+  <p:cSld>
+    <p:spTree>
+      <p:nvGrpSpPr>
+        <p:cNvPr id="1" name=""/>
+        <p:cNvGrpSpPr/>
+        <p:nvPr/>
+      </p:nvGrpSpPr>
+      <p:grpSpPr>
+        <a:xfrm>
+          <a:off x="0" y="0"/>
+          <a:ext cx="0" cy="0"/>
+          <a:chOff x="0" y="0"/>
+          <a:chExt cx="0" cy="0"/>
+        </a:xfrm>
+      </p:grpSpPr>
+      <p:sp>
+        <p:nvSpPr>
+          <p:cNvPr id="2" name="Образ слайда 1"/>
+          <p:cNvSpPr>
+            <a:spLocks noGrp="1" noRot="1" noChangeAspect="1"/>
+          </p:cNvSpPr>
+          <p:nvPr>
+            <p:ph type="sldImg"/>
+          </p:nvPr>
+        </p:nvSpPr>
+        <p:spPr>
+          <a:xfrm>
+            <a:off x="685800" y="1143000"/>
+            <a:ext cx="5486400" cy="3086100"/>
+          </a:xfrm>
+        </p:spPr>
+      </p:sp>
+      <p:sp>
+        <p:nvSpPr>
+          <p:cNvPr id="3" name="Заметки 2"/>
+          <p:cNvSpPr>
+            <a:spLocks noGrp="1"/>
+          </p:cNvSpPr>
+          <p:nvPr>
+            <p:ph type="body" idx="1"/>
+          </p:nvPr>
+        </p:nvSpPr>
+        <p:spPr/>
+        <p:txBody>
+          <a:bodyPr/>
+          <a:lstStyle/>
+          <a:p>
+            <a:endParaRPr lang="ru-RU"/>
+          </a:p>
+        </p:txBody>
+      </p:sp>
+      <p:sp>
+        <p:nvSpPr>
+          <p:cNvPr id="4" name="Номер слайда 3"/>
+          <p:cNvSpPr>
+            <a:spLocks noGrp="1"/>
+          </p:cNvSpPr>
+          <p:nvPr>
+            <p:ph type="sldNum" sz="quarter" idx="10"/>
+          </p:nvPr>
+        </p:nvSpPr>
+        <p:spPr/>
+        <p:txBody>
+          <a:bodyPr/>
+          <a:lstStyle/>
+          <a:p>
+            <a:fld id="{F0F4E2F1-1521-4C3A-A563-2F7D19AB6E0B}" type="slidenum">
+              <a:rPr lang="en-US" smtClean="0"/>
+              <a:pPr/>
+              <a:t>10</a:t>
+            </a:fld>
+            <a:endParaRPr lang="en-US"/>
+          </a:p>
+        </p:txBody>
+      </p:sp>
+    </p:spTree>
+    <p:extLst>
+      <p:ext uri="{BB962C8B-B14F-4D97-AF65-F5344CB8AC3E}">
+        <p14:creationId xmlns:p14="http://schemas.microsoft.com/office/powerpoint/2010/main" val="4129533201"/>
+      </p:ext>
+    </p:extLst>
+  </p:cSld>
+  <p:clrMapOvr>
+    <a:masterClrMapping/>
+  </p:clrMapOvr>
+</p:notes>
+</file>
+
+<file path=ppt/notesSlides/notesSlide11.xml><?xml version="1.0" encoding="utf-8"?>
+<p:notes xmlns:a="http://schemas.openxmlformats.org/drawingml/2006/main" xmlns:r="http://schemas.openxmlformats.org/officeDocument/2006/relationships" xmlns:p="http://schemas.openxmlformats.org/presentationml/2006/main">
+  <p:cSld>
+    <p:spTree>
+      <p:nvGrpSpPr>
+        <p:cNvPr id="1" name=""/>
+        <p:cNvGrpSpPr/>
+        <p:nvPr/>
+      </p:nvGrpSpPr>
+      <p:grpSpPr>
+        <a:xfrm>
+          <a:off x="0" y="0"/>
+          <a:ext cx="0" cy="0"/>
+          <a:chOff x="0" y="0"/>
+          <a:chExt cx="0" cy="0"/>
+        </a:xfrm>
+      </p:grpSpPr>
+      <p:sp>
+        <p:nvSpPr>
+          <p:cNvPr id="2" name="Образ слайда 1"/>
+          <p:cNvSpPr>
+            <a:spLocks noGrp="1" noRot="1" noChangeAspect="1"/>
+          </p:cNvSpPr>
+          <p:nvPr>
+            <p:ph type="sldImg"/>
+          </p:nvPr>
+        </p:nvSpPr>
+        <p:spPr>
+          <a:xfrm>
+            <a:off x="685800" y="1143000"/>
+            <a:ext cx="5486400" cy="3086100"/>
+          </a:xfrm>
+        </p:spPr>
+      </p:sp>
+      <p:sp>
+        <p:nvSpPr>
+          <p:cNvPr id="3" name="Заметки 2"/>
+          <p:cNvSpPr>
+            <a:spLocks noGrp="1"/>
+          </p:cNvSpPr>
+          <p:nvPr>
+            <p:ph type="body" idx="1"/>
+          </p:nvPr>
+        </p:nvSpPr>
+        <p:spPr/>
+        <p:txBody>
+          <a:bodyPr/>
+          <a:lstStyle/>
+          <a:p>
+            <a:endParaRPr lang="ru-RU"/>
+          </a:p>
+        </p:txBody>
+      </p:sp>
+      <p:sp>
+        <p:nvSpPr>
+          <p:cNvPr id="4" name="Номер слайда 3"/>
+          <p:cNvSpPr>
+            <a:spLocks noGrp="1"/>
+          </p:cNvSpPr>
+          <p:nvPr>
+            <p:ph type="sldNum" sz="quarter" idx="10"/>
+          </p:nvPr>
+        </p:nvSpPr>
+        <p:spPr/>
+        <p:txBody>
+          <a:bodyPr/>
+          <a:lstStyle/>
+          <a:p>
+            <a:fld id="{F0F4E2F1-1521-4C3A-A563-2F7D19AB6E0B}" type="slidenum">
+              <a:rPr lang="en-US" smtClean="0"/>
+              <a:pPr/>
+              <a:t>11</a:t>
+            </a:fld>
+            <a:endParaRPr lang="en-US"/>
+          </a:p>
+        </p:txBody>
+      </p:sp>
+    </p:spTree>
+    <p:extLst>
+      <p:ext uri="{BB962C8B-B14F-4D97-AF65-F5344CB8AC3E}">
+        <p14:creationId xmlns:p14="http://schemas.microsoft.com/office/powerpoint/2010/main" val="1212881244"/>
+      </p:ext>
+    </p:extLst>
+  </p:cSld>
+  <p:clrMapOvr>
+    <a:masterClrMapping/>
+  </p:clrMapOvr>
+</p:notes>
+</file>
+
+<file path=ppt/notesSlides/notesSlide12.xml><?xml version="1.0" encoding="utf-8"?>
+<p:notes xmlns:a="http://schemas.openxmlformats.org/drawingml/2006/main" xmlns:r="http://schemas.openxmlformats.org/officeDocument/2006/relationships" xmlns:p="http://schemas.openxmlformats.org/presentationml/2006/main">
+  <p:cSld>
+    <p:spTree>
+      <p:nvGrpSpPr>
+        <p:cNvPr id="1" name=""/>
+        <p:cNvGrpSpPr/>
+        <p:nvPr/>
+      </p:nvGrpSpPr>
+      <p:grpSpPr>
+        <a:xfrm>
+          <a:off x="0" y="0"/>
+          <a:ext cx="0" cy="0"/>
+          <a:chOff x="0" y="0"/>
+          <a:chExt cx="0" cy="0"/>
+        </a:xfrm>
+      </p:grpSpPr>
+      <p:sp>
+        <p:nvSpPr>
+          <p:cNvPr id="2" name="Образ слайда 1"/>
+          <p:cNvSpPr>
+            <a:spLocks noGrp="1" noRot="1" noChangeAspect="1"/>
+          </p:cNvSpPr>
+          <p:nvPr>
+            <p:ph type="sldImg"/>
+          </p:nvPr>
+        </p:nvSpPr>
+        <p:spPr>
+          <a:xfrm>
+            <a:off x="685800" y="1143000"/>
+            <a:ext cx="5486400" cy="3086100"/>
+          </a:xfrm>
+        </p:spPr>
+      </p:sp>
+      <p:sp>
+        <p:nvSpPr>
+          <p:cNvPr id="3" name="Заметки 2"/>
+          <p:cNvSpPr>
+            <a:spLocks noGrp="1"/>
+          </p:cNvSpPr>
+          <p:nvPr>
+            <p:ph type="body" idx="1"/>
+          </p:nvPr>
+        </p:nvSpPr>
+        <p:spPr/>
+        <p:txBody>
+          <a:bodyPr/>
+          <a:lstStyle/>
+          <a:p>
+            <a:endParaRPr lang="ru-RU"/>
+          </a:p>
+        </p:txBody>
+      </p:sp>
+      <p:sp>
+        <p:nvSpPr>
+          <p:cNvPr id="4" name="Номер слайда 3"/>
+          <p:cNvSpPr>
+            <a:spLocks noGrp="1"/>
+          </p:cNvSpPr>
+          <p:nvPr>
+            <p:ph type="sldNum" sz="quarter" idx="10"/>
+          </p:nvPr>
+        </p:nvSpPr>
+        <p:spPr/>
+        <p:txBody>
+          <a:bodyPr/>
+          <a:lstStyle/>
+          <a:p>
+            <a:fld id="{F0F4E2F1-1521-4C3A-A563-2F7D19AB6E0B}" type="slidenum">
+              <a:rPr lang="en-US" smtClean="0"/>
+              <a:pPr/>
+              <a:t>12</a:t>
+            </a:fld>
+            <a:endParaRPr lang="en-US"/>
+          </a:p>
+        </p:txBody>
+      </p:sp>
+    </p:spTree>
+    <p:extLst>
+      <p:ext uri="{BB962C8B-B14F-4D97-AF65-F5344CB8AC3E}">
+        <p14:creationId xmlns:p14="http://schemas.microsoft.com/office/powerpoint/2010/main" val="958961291"/>
+      </p:ext>
+    </p:extLst>
+  </p:cSld>
+  <p:clrMapOvr>
+    <a:masterClrMapping/>
+  </p:clrMapOvr>
+</p:notes>
+</file>
+
+<file path=ppt/notesSlides/notesSlide13.xml><?xml version="1.0" encoding="utf-8"?>
+<p:notes xmlns:a="http://schemas.openxmlformats.org/drawingml/2006/main" xmlns:r="http://schemas.openxmlformats.org/officeDocument/2006/relationships" xmlns:p="http://schemas.openxmlformats.org/presentationml/2006/main">
+  <p:cSld>
+    <p:spTree>
+      <p:nvGrpSpPr>
+        <p:cNvPr id="1" name=""/>
+        <p:cNvGrpSpPr/>
+        <p:nvPr/>
+      </p:nvGrpSpPr>
+      <p:grpSpPr>
+        <a:xfrm>
+          <a:off x="0" y="0"/>
+          <a:ext cx="0" cy="0"/>
+          <a:chOff x="0" y="0"/>
+          <a:chExt cx="0" cy="0"/>
+        </a:xfrm>
+      </p:grpSpPr>
+      <p:sp>
+        <p:nvSpPr>
+          <p:cNvPr id="2" name="Образ слайда 1"/>
+          <p:cNvSpPr>
+            <a:spLocks noGrp="1" noRot="1" noChangeAspect="1"/>
+          </p:cNvSpPr>
+          <p:nvPr>
+            <p:ph type="sldImg"/>
+          </p:nvPr>
+        </p:nvSpPr>
+        <p:spPr>
+          <a:xfrm>
+            <a:off x="685800" y="1143000"/>
+            <a:ext cx="5486400" cy="3086100"/>
+          </a:xfrm>
+        </p:spPr>
+      </p:sp>
+      <p:sp>
+        <p:nvSpPr>
+          <p:cNvPr id="3" name="Заметки 2"/>
+          <p:cNvSpPr>
+            <a:spLocks noGrp="1"/>
+          </p:cNvSpPr>
+          <p:nvPr>
+            <p:ph type="body" idx="1"/>
+          </p:nvPr>
+        </p:nvSpPr>
+        <p:spPr/>
+        <p:txBody>
+          <a:bodyPr/>
+          <a:lstStyle/>
+          <a:p>
+            <a:endParaRPr lang="ru-RU"/>
+          </a:p>
+        </p:txBody>
+      </p:sp>
+      <p:sp>
+        <p:nvSpPr>
+          <p:cNvPr id="4" name="Номер слайда 3"/>
+          <p:cNvSpPr>
+            <a:spLocks noGrp="1"/>
+          </p:cNvSpPr>
+          <p:nvPr>
+            <p:ph type="sldNum" sz="quarter" idx="10"/>
+          </p:nvPr>
+        </p:nvSpPr>
+        <p:spPr/>
+        <p:txBody>
+          <a:bodyPr/>
+          <a:lstStyle/>
+          <a:p>
+            <a:fld id="{F0F4E2F1-1521-4C3A-A563-2F7D19AB6E0B}" type="slidenum">
+              <a:rPr lang="en-US" smtClean="0"/>
+              <a:pPr/>
+              <a:t>13</a:t>
+            </a:fld>
+            <a:endParaRPr lang="en-US"/>
+          </a:p>
+        </p:txBody>
+      </p:sp>
+    </p:spTree>
+    <p:extLst>
+      <p:ext uri="{BB962C8B-B14F-4D97-AF65-F5344CB8AC3E}">
+        <p14:creationId xmlns:p14="http://schemas.microsoft.com/office/powerpoint/2010/main" val="856603852"/>
+      </p:ext>
+    </p:extLst>
+  </p:cSld>
+  <p:clrMapOvr>
+    <a:masterClrMapping/>
+  </p:clrMapOvr>
+</p:notes>
+</file>
+
+<file path=ppt/notesSlides/notesSlide14.xml><?xml version="1.0" encoding="utf-8"?>
+<p:notes xmlns:a="http://schemas.openxmlformats.org/drawingml/2006/main" xmlns:r="http://schemas.openxmlformats.org/officeDocument/2006/relationships" xmlns:p="http://schemas.openxmlformats.org/presentationml/2006/main">
+  <p:cSld>
+    <p:spTree>
+      <p:nvGrpSpPr>
+        <p:cNvPr id="1" name=""/>
+        <p:cNvGrpSpPr/>
+        <p:nvPr/>
+      </p:nvGrpSpPr>
+      <p:grpSpPr>
+        <a:xfrm>
+          <a:off x="0" y="0"/>
+          <a:ext cx="0" cy="0"/>
+          <a:chOff x="0" y="0"/>
+          <a:chExt cx="0" cy="0"/>
+        </a:xfrm>
+      </p:grpSpPr>
+      <p:sp>
+        <p:nvSpPr>
+          <p:cNvPr id="2" name="Образ слайда 1"/>
+          <p:cNvSpPr>
+            <a:spLocks noGrp="1" noRot="1" noChangeAspect="1"/>
+          </p:cNvSpPr>
+          <p:nvPr>
+            <p:ph type="sldImg"/>
+          </p:nvPr>
+        </p:nvSpPr>
+        <p:spPr>
+          <a:xfrm>
+            <a:off x="685800" y="1143000"/>
+            <a:ext cx="5486400" cy="3086100"/>
+          </a:xfrm>
+        </p:spPr>
+      </p:sp>
+      <p:sp>
+        <p:nvSpPr>
+          <p:cNvPr id="3" name="Заметки 2"/>
+          <p:cNvSpPr>
+            <a:spLocks noGrp="1"/>
+          </p:cNvSpPr>
+          <p:nvPr>
+            <p:ph type="body" idx="1"/>
+          </p:nvPr>
+        </p:nvSpPr>
+        <p:spPr/>
+        <p:txBody>
+          <a:bodyPr/>
+          <a:lstStyle/>
+          <a:p>
+            <a:endParaRPr lang="ru-RU"/>
+          </a:p>
+        </p:txBody>
+      </p:sp>
+      <p:sp>
+        <p:nvSpPr>
+          <p:cNvPr id="4" name="Номер слайда 3"/>
+          <p:cNvSpPr>
+            <a:spLocks noGrp="1"/>
+          </p:cNvSpPr>
+          <p:nvPr>
+            <p:ph type="sldNum" sz="quarter" idx="10"/>
+          </p:nvPr>
+        </p:nvSpPr>
+        <p:spPr/>
+        <p:txBody>
+          <a:bodyPr/>
+          <a:lstStyle/>
+          <a:p>
+            <a:fld id="{F0F4E2F1-1521-4C3A-A563-2F7D19AB6E0B}" type="slidenum">
+              <a:rPr lang="en-US" smtClean="0"/>
+              <a:pPr/>
+              <a:t>14</a:t>
+            </a:fld>
+            <a:endParaRPr lang="en-US"/>
+          </a:p>
+        </p:txBody>
+      </p:sp>
+    </p:spTree>
+    <p:extLst>
+      <p:ext uri="{BB962C8B-B14F-4D97-AF65-F5344CB8AC3E}">
+        <p14:creationId xmlns:p14="http://schemas.microsoft.com/office/powerpoint/2010/main" val="998194950"/>
+      </p:ext>
+    </p:extLst>
+  </p:cSld>
+  <p:clrMapOvr>
+    <a:masterClrMapping/>
+  </p:clrMapOvr>
+</p:notes>
+</file>
+
+<file path=ppt/notesSlides/notesSlide15.xml><?xml version="1.0" encoding="utf-8"?>
+<p:notes xmlns:a="http://schemas.openxmlformats.org/drawingml/2006/main" xmlns:r="http://schemas.openxmlformats.org/officeDocument/2006/relationships" xmlns:p="http://schemas.openxmlformats.org/presentationml/2006/main">
+  <p:cSld>
+    <p:spTree>
+      <p:nvGrpSpPr>
+        <p:cNvPr id="1" name=""/>
+        <p:cNvGrpSpPr/>
+        <p:nvPr/>
+      </p:nvGrpSpPr>
+      <p:grpSpPr>
+        <a:xfrm>
+          <a:off x="0" y="0"/>
+          <a:ext cx="0" cy="0"/>
+          <a:chOff x="0" y="0"/>
+          <a:chExt cx="0" cy="0"/>
+        </a:xfrm>
+      </p:grpSpPr>
+      <p:sp>
+        <p:nvSpPr>
+          <p:cNvPr id="2" name="Образ слайда 1"/>
+          <p:cNvSpPr>
+            <a:spLocks noGrp="1" noRot="1" noChangeAspect="1"/>
+          </p:cNvSpPr>
+          <p:nvPr>
+            <p:ph type="sldImg"/>
+          </p:nvPr>
+        </p:nvSpPr>
+        <p:spPr>
+          <a:xfrm>
+            <a:off x="685800" y="1143000"/>
+            <a:ext cx="5486400" cy="3086100"/>
+          </a:xfrm>
+        </p:spPr>
+      </p:sp>
+      <p:sp>
+        <p:nvSpPr>
+          <p:cNvPr id="3" name="Заметки 2"/>
+          <p:cNvSpPr>
+            <a:spLocks noGrp="1"/>
+          </p:cNvSpPr>
+          <p:nvPr>
+            <p:ph type="body" idx="1"/>
+          </p:nvPr>
+        </p:nvSpPr>
+        <p:spPr/>
+        <p:txBody>
+          <a:bodyPr/>
+          <a:lstStyle/>
+          <a:p>
+            <a:endParaRPr lang="ru-RU"/>
+          </a:p>
+        </p:txBody>
+      </p:sp>
+      <p:sp>
+        <p:nvSpPr>
+          <p:cNvPr id="4" name="Номер слайда 3"/>
+          <p:cNvSpPr>
+            <a:spLocks noGrp="1"/>
+          </p:cNvSpPr>
+          <p:nvPr>
+            <p:ph type="sldNum" sz="quarter" idx="10"/>
+          </p:nvPr>
+        </p:nvSpPr>
+        <p:spPr/>
+        <p:txBody>
+          <a:bodyPr/>
+          <a:lstStyle/>
+          <a:p>
+            <a:fld id="{F0F4E2F1-1521-4C3A-A563-2F7D19AB6E0B}" type="slidenum">
+              <a:rPr lang="en-US" smtClean="0"/>
+              <a:pPr/>
+              <a:t>15</a:t>
+            </a:fld>
+            <a:endParaRPr lang="en-US"/>
+          </a:p>
+        </p:txBody>
+      </p:sp>
+    </p:spTree>
+    <p:extLst>
+      <p:ext uri="{BB962C8B-B14F-4D97-AF65-F5344CB8AC3E}">
+        <p14:creationId xmlns:p14="http://schemas.microsoft.com/office/powerpoint/2010/main" val="920907508"/>
+      </p:ext>
+    </p:extLst>
+  </p:cSld>
+  <p:clrMapOvr>
+    <a:masterClrMapping/>
+  </p:clrMapOvr>
+</p:notes>
+</file>
+
+<file path=ppt/notesSlides/notesSlide16.xml><?xml version="1.0" encoding="utf-8"?>
+<p:notes xmlns:a="http://schemas.openxmlformats.org/drawingml/2006/main" xmlns:r="http://schemas.openxmlformats.org/officeDocument/2006/relationships" xmlns:p="http://schemas.openxmlformats.org/presentationml/2006/main">
+  <p:cSld>
+    <p:spTree>
+      <p:nvGrpSpPr>
+        <p:cNvPr id="1" name=""/>
+        <p:cNvGrpSpPr/>
+        <p:nvPr/>
+      </p:nvGrpSpPr>
+      <p:grpSpPr>
+        <a:xfrm>
+          <a:off x="0" y="0"/>
+          <a:ext cx="0" cy="0"/>
+          <a:chOff x="0" y="0"/>
+          <a:chExt cx="0" cy="0"/>
+        </a:xfrm>
+      </p:grpSpPr>
+      <p:sp>
+        <p:nvSpPr>
+          <p:cNvPr id="2" name="Образ слайда 1"/>
+          <p:cNvSpPr>
+            <a:spLocks noGrp="1" noRot="1" noChangeAspect="1"/>
+          </p:cNvSpPr>
+          <p:nvPr>
+            <p:ph type="sldImg"/>
+          </p:nvPr>
+        </p:nvSpPr>
+        <p:spPr>
+          <a:xfrm>
+            <a:off x="685800" y="1143000"/>
+            <a:ext cx="5486400" cy="3086100"/>
+          </a:xfrm>
+        </p:spPr>
+      </p:sp>
+      <p:sp>
+        <p:nvSpPr>
+          <p:cNvPr id="3" name="Заметки 2"/>
+          <p:cNvSpPr>
+            <a:spLocks noGrp="1"/>
+          </p:cNvSpPr>
+          <p:nvPr>
+            <p:ph type="body" idx="1"/>
+          </p:nvPr>
+        </p:nvSpPr>
+        <p:spPr/>
+        <p:txBody>
+          <a:bodyPr/>
+          <a:lstStyle/>
+          <a:p>
+            <a:endParaRPr lang="ru-RU"/>
+          </a:p>
+        </p:txBody>
+      </p:sp>
+      <p:sp>
+        <p:nvSpPr>
+          <p:cNvPr id="4" name="Номер слайда 3"/>
+          <p:cNvSpPr>
+            <a:spLocks noGrp="1"/>
+          </p:cNvSpPr>
+          <p:nvPr>
+            <p:ph type="sldNum" sz="quarter" idx="10"/>
+          </p:nvPr>
+        </p:nvSpPr>
+        <p:spPr/>
+        <p:txBody>
+          <a:bodyPr/>
+          <a:lstStyle/>
+          <a:p>
+            <a:fld id="{F0F4E2F1-1521-4C3A-A563-2F7D19AB6E0B}" type="slidenum">
+              <a:rPr lang="en-US" smtClean="0"/>
+              <a:pPr/>
+              <a:t>16</a:t>
+            </a:fld>
+            <a:endParaRPr lang="en-US"/>
+          </a:p>
+        </p:txBody>
+      </p:sp>
+    </p:spTree>
+    <p:extLst>
+      <p:ext uri="{BB962C8B-B14F-4D97-AF65-F5344CB8AC3E}">
+        <p14:creationId xmlns:p14="http://schemas.microsoft.com/office/powerpoint/2010/main" val="386654879"/>
+      </p:ext>
+    </p:extLst>
+  </p:cSld>
+  <p:clrMapOvr>
+    <a:masterClrMapping/>
+  </p:clrMapOvr>
+</p:notes>
+</file>
+
+<file path=ppt/notesSlides/notesSlide17.xml><?xml version="1.0" encoding="utf-8"?>
+<p:notes xmlns:a="http://schemas.openxmlformats.org/drawingml/2006/main" xmlns:r="http://schemas.openxmlformats.org/officeDocument/2006/relationships" xmlns:p="http://schemas.openxmlformats.org/presentationml/2006/main">
+  <p:cSld>
+    <p:spTree>
+      <p:nvGrpSpPr>
+        <p:cNvPr id="1" name=""/>
+        <p:cNvGrpSpPr/>
+        <p:nvPr/>
+      </p:nvGrpSpPr>
+      <p:grpSpPr>
+        <a:xfrm>
+          <a:off x="0" y="0"/>
+          <a:ext cx="0" cy="0"/>
+          <a:chOff x="0" y="0"/>
+          <a:chExt cx="0" cy="0"/>
+        </a:xfrm>
+      </p:grpSpPr>
+      <p:sp>
+        <p:nvSpPr>
+          <p:cNvPr id="2" name="Образ слайда 1"/>
+          <p:cNvSpPr>
+            <a:spLocks noGrp="1" noRot="1" noChangeAspect="1"/>
+          </p:cNvSpPr>
+          <p:nvPr>
+            <p:ph type="sldImg"/>
+          </p:nvPr>
+        </p:nvSpPr>
+        <p:spPr>
+          <a:xfrm>
+            <a:off x="685800" y="1143000"/>
+            <a:ext cx="5486400" cy="3086100"/>
+          </a:xfrm>
+        </p:spPr>
+      </p:sp>
+      <p:sp>
+        <p:nvSpPr>
+          <p:cNvPr id="3" name="Заметки 2"/>
+          <p:cNvSpPr>
+            <a:spLocks noGrp="1"/>
+          </p:cNvSpPr>
+          <p:nvPr>
+            <p:ph type="body" idx="1"/>
+          </p:nvPr>
+        </p:nvSpPr>
+        <p:spPr/>
+        <p:txBody>
+          <a:bodyPr/>
+          <a:lstStyle/>
+          <a:p>
+            <a:endParaRPr lang="ru-RU"/>
+          </a:p>
+        </p:txBody>
+      </p:sp>
+      <p:sp>
+        <p:nvSpPr>
+          <p:cNvPr id="4" name="Номер слайда 3"/>
+          <p:cNvSpPr>
+            <a:spLocks noGrp="1"/>
+          </p:cNvSpPr>
+          <p:nvPr>
+            <p:ph type="sldNum" sz="quarter" idx="10"/>
+          </p:nvPr>
+        </p:nvSpPr>
+        <p:spPr/>
+        <p:txBody>
+          <a:bodyPr/>
+          <a:lstStyle/>
+          <a:p>
+            <a:fld id="{F0F4E2F1-1521-4C3A-A563-2F7D19AB6E0B}" type="slidenum">
+              <a:rPr lang="en-US" smtClean="0"/>
+              <a:pPr/>
+              <a:t>17</a:t>
+            </a:fld>
+            <a:endParaRPr lang="en-US"/>
+          </a:p>
+        </p:txBody>
+      </p:sp>
+    </p:spTree>
+    <p:extLst>
+      <p:ext uri="{BB962C8B-B14F-4D97-AF65-F5344CB8AC3E}">
+        <p14:creationId xmlns:p14="http://schemas.microsoft.com/office/powerpoint/2010/main" val="2743645116"/>
+      </p:ext>
+    </p:extLst>
+  </p:cSld>
+  <p:clrMapOvr>
+    <a:masterClrMapping/>
+  </p:clrMapOvr>
+</p:notes>
+</file>
+
+<file path=ppt/notesSlides/notesSlide18.xml><?xml version="1.0" encoding="utf-8"?>
+<p:notes xmlns:a="http://schemas.openxmlformats.org/drawingml/2006/main" xmlns:r="http://schemas.openxmlformats.org/officeDocument/2006/relationships" xmlns:p="http://schemas.openxmlformats.org/presentationml/2006/main">
+  <p:cSld>
+    <p:spTree>
+      <p:nvGrpSpPr>
+        <p:cNvPr id="1" name=""/>
+        <p:cNvGrpSpPr/>
+        <p:nvPr/>
+      </p:nvGrpSpPr>
+      <p:grpSpPr>
+        <a:xfrm>
+          <a:off x="0" y="0"/>
+          <a:ext cx="0" cy="0"/>
+          <a:chOff x="0" y="0"/>
+          <a:chExt cx="0" cy="0"/>
+        </a:xfrm>
+      </p:grpSpPr>
+      <p:sp>
+        <p:nvSpPr>
+          <p:cNvPr id="2" name="Образ слайда 1"/>
+          <p:cNvSpPr>
+            <a:spLocks noGrp="1" noRot="1" noChangeAspect="1"/>
+          </p:cNvSpPr>
+          <p:nvPr>
+            <p:ph type="sldImg"/>
+          </p:nvPr>
+        </p:nvSpPr>
+        <p:spPr>
+          <a:xfrm>
+            <a:off x="685800" y="1143000"/>
+            <a:ext cx="5486400" cy="3086100"/>
+          </a:xfrm>
+        </p:spPr>
+      </p:sp>
+      <p:sp>
+        <p:nvSpPr>
+          <p:cNvPr id="3" name="Заметки 2"/>
+          <p:cNvSpPr>
+            <a:spLocks noGrp="1"/>
+          </p:cNvSpPr>
+          <p:nvPr>
+            <p:ph type="body" idx="1"/>
+          </p:nvPr>
+        </p:nvSpPr>
+        <p:spPr/>
+        <p:txBody>
+          <a:bodyPr/>
+          <a:lstStyle/>
+          <a:p>
+            <a:endParaRPr lang="ru-RU"/>
+          </a:p>
+        </p:txBody>
+      </p:sp>
+      <p:sp>
+        <p:nvSpPr>
+          <p:cNvPr id="4" name="Номер слайда 3"/>
+          <p:cNvSpPr>
+            <a:spLocks noGrp="1"/>
+          </p:cNvSpPr>
+          <p:nvPr>
+            <p:ph type="sldNum" sz="quarter" idx="10"/>
+          </p:nvPr>
+        </p:nvSpPr>
+        <p:spPr/>
+        <p:txBody>
+          <a:bodyPr/>
+          <a:lstStyle/>
+          <a:p>
+            <a:fld id="{F0F4E2F1-1521-4C3A-A563-2F7D19AB6E0B}" type="slidenum">
+              <a:rPr lang="en-US" smtClean="0"/>
+              <a:pPr/>
+              <a:t>18</a:t>
+            </a:fld>
+            <a:endParaRPr lang="en-US"/>
+          </a:p>
+        </p:txBody>
+      </p:sp>
+    </p:spTree>
+    <p:extLst>
+      <p:ext uri="{BB962C8B-B14F-4D97-AF65-F5344CB8AC3E}">
+        <p14:creationId xmlns:p14="http://schemas.microsoft.com/office/powerpoint/2010/main" val="1039643302"/>
+      </p:ext>
+    </p:extLst>
+  </p:cSld>
+  <p:clrMapOvr>
+    <a:masterClrMapping/>
+  </p:clrMapOvr>
+</p:notes>
+</file>
+
+<file path=ppt/notesSlides/notesSlide19.xml><?xml version="1.0" encoding="utf-8"?>
+<p:notes xmlns:a="http://schemas.openxmlformats.org/drawingml/2006/main" xmlns:r="http://schemas.openxmlformats.org/officeDocument/2006/relationships" xmlns:p="http://schemas.openxmlformats.org/presentationml/2006/main">
+  <p:cSld>
+    <p:spTree>
+      <p:nvGrpSpPr>
+        <p:cNvPr id="1" name=""/>
+        <p:cNvGrpSpPr/>
+        <p:nvPr/>
+      </p:nvGrpSpPr>
+      <p:grpSpPr>
+        <a:xfrm>
+          <a:off x="0" y="0"/>
+          <a:ext cx="0" cy="0"/>
+          <a:chOff x="0" y="0"/>
+          <a:chExt cx="0" cy="0"/>
+        </a:xfrm>
+      </p:grpSpPr>
+      <p:sp>
+        <p:nvSpPr>
+          <p:cNvPr id="2" name="Образ слайда 1"/>
+          <p:cNvSpPr>
+            <a:spLocks noGrp="1" noRot="1" noChangeAspect="1"/>
+          </p:cNvSpPr>
+          <p:nvPr>
+            <p:ph type="sldImg"/>
+          </p:nvPr>
+        </p:nvSpPr>
+        <p:spPr>
+          <a:xfrm>
+            <a:off x="685800" y="1143000"/>
+            <a:ext cx="5486400" cy="3086100"/>
+          </a:xfrm>
+        </p:spPr>
+      </p:sp>
+      <p:sp>
+        <p:nvSpPr>
+          <p:cNvPr id="3" name="Заметки 2"/>
+          <p:cNvSpPr>
+            <a:spLocks noGrp="1"/>
+          </p:cNvSpPr>
+          <p:nvPr>
+            <p:ph type="body" idx="1"/>
+          </p:nvPr>
+        </p:nvSpPr>
+        <p:spPr/>
+        <p:txBody>
+          <a:bodyPr/>
+          <a:lstStyle/>
+          <a:p>
+            <a:endParaRPr lang="ru-RU"/>
+          </a:p>
+        </p:txBody>
+      </p:sp>
+      <p:sp>
+        <p:nvSpPr>
+          <p:cNvPr id="4" name="Номер слайда 3"/>
+          <p:cNvSpPr>
+            <a:spLocks noGrp="1"/>
+          </p:cNvSpPr>
+          <p:nvPr>
+            <p:ph type="sldNum" sz="quarter" idx="10"/>
+          </p:nvPr>
+        </p:nvSpPr>
+        <p:spPr/>
+        <p:txBody>
+          <a:bodyPr/>
+          <a:lstStyle/>
+          <a:p>
+            <a:fld id="{F0F4E2F1-1521-4C3A-A563-2F7D19AB6E0B}" type="slidenum">
+              <a:rPr lang="en-US" smtClean="0"/>
+              <a:pPr/>
+              <a:t>19</a:t>
+            </a:fld>
+            <a:endParaRPr lang="en-US"/>
+          </a:p>
+        </p:txBody>
+      </p:sp>
+    </p:spTree>
+    <p:extLst>
+      <p:ext uri="{BB962C8B-B14F-4D97-AF65-F5344CB8AC3E}">
+        <p14:creationId xmlns:p14="http://schemas.microsoft.com/office/powerpoint/2010/main" val="165211946"/>
+      </p:ext>
+    </p:extLst>
+  </p:cSld>
+  <p:clrMapOvr>
+    <a:masterClrMapping/>
+  </p:clrMapOvr>
+</p:notes>
+</file>
+
 <file path=ppt/notesSlides/notesSlide2.xml><?xml version="1.0" encoding="utf-8"?>
 <p:notes xmlns:a="http://schemas.openxmlformats.org/drawingml/2006/main" xmlns:r="http://schemas.openxmlformats.org/officeDocument/2006/relationships" xmlns:p="http://schemas.openxmlformats.org/presentationml/2006/main">
   <p:cSld>
@@ -660,6 +1585,906 @@
     <p:extLst>
       <p:ext uri="{BB962C8B-B14F-4D97-AF65-F5344CB8AC3E}">
         <p14:creationId xmlns:p14="http://schemas.microsoft.com/office/powerpoint/2010/main" val="1801506385"/>
+      </p:ext>
+    </p:extLst>
+  </p:cSld>
+  <p:clrMapOvr>
+    <a:masterClrMapping/>
+  </p:clrMapOvr>
+</p:notes>
+</file>
+
+<file path=ppt/notesSlides/notesSlide20.xml><?xml version="1.0" encoding="utf-8"?>
+<p:notes xmlns:a="http://schemas.openxmlformats.org/drawingml/2006/main" xmlns:r="http://schemas.openxmlformats.org/officeDocument/2006/relationships" xmlns:p="http://schemas.openxmlformats.org/presentationml/2006/main">
+  <p:cSld>
+    <p:spTree>
+      <p:nvGrpSpPr>
+        <p:cNvPr id="1" name=""/>
+        <p:cNvGrpSpPr/>
+        <p:nvPr/>
+      </p:nvGrpSpPr>
+      <p:grpSpPr>
+        <a:xfrm>
+          <a:off x="0" y="0"/>
+          <a:ext cx="0" cy="0"/>
+          <a:chOff x="0" y="0"/>
+          <a:chExt cx="0" cy="0"/>
+        </a:xfrm>
+      </p:grpSpPr>
+      <p:sp>
+        <p:nvSpPr>
+          <p:cNvPr id="2" name="Образ слайда 1"/>
+          <p:cNvSpPr>
+            <a:spLocks noGrp="1" noRot="1" noChangeAspect="1"/>
+          </p:cNvSpPr>
+          <p:nvPr>
+            <p:ph type="sldImg"/>
+          </p:nvPr>
+        </p:nvSpPr>
+        <p:spPr>
+          <a:xfrm>
+            <a:off x="685800" y="1143000"/>
+            <a:ext cx="5486400" cy="3086100"/>
+          </a:xfrm>
+        </p:spPr>
+      </p:sp>
+      <p:sp>
+        <p:nvSpPr>
+          <p:cNvPr id="3" name="Заметки 2"/>
+          <p:cNvSpPr>
+            <a:spLocks noGrp="1"/>
+          </p:cNvSpPr>
+          <p:nvPr>
+            <p:ph type="body" idx="1"/>
+          </p:nvPr>
+        </p:nvSpPr>
+        <p:spPr/>
+        <p:txBody>
+          <a:bodyPr/>
+          <a:lstStyle/>
+          <a:p>
+            <a:endParaRPr lang="ru-RU"/>
+          </a:p>
+        </p:txBody>
+      </p:sp>
+      <p:sp>
+        <p:nvSpPr>
+          <p:cNvPr id="4" name="Номер слайда 3"/>
+          <p:cNvSpPr>
+            <a:spLocks noGrp="1"/>
+          </p:cNvSpPr>
+          <p:nvPr>
+            <p:ph type="sldNum" sz="quarter" idx="10"/>
+          </p:nvPr>
+        </p:nvSpPr>
+        <p:spPr/>
+        <p:txBody>
+          <a:bodyPr/>
+          <a:lstStyle/>
+          <a:p>
+            <a:fld id="{F0F4E2F1-1521-4C3A-A563-2F7D19AB6E0B}" type="slidenum">
+              <a:rPr lang="en-US" smtClean="0"/>
+              <a:pPr/>
+              <a:t>20</a:t>
+            </a:fld>
+            <a:endParaRPr lang="en-US"/>
+          </a:p>
+        </p:txBody>
+      </p:sp>
+    </p:spTree>
+    <p:extLst>
+      <p:ext uri="{BB962C8B-B14F-4D97-AF65-F5344CB8AC3E}">
+        <p14:creationId xmlns:p14="http://schemas.microsoft.com/office/powerpoint/2010/main" val="28972989"/>
+      </p:ext>
+    </p:extLst>
+  </p:cSld>
+  <p:clrMapOvr>
+    <a:masterClrMapping/>
+  </p:clrMapOvr>
+</p:notes>
+</file>
+
+<file path=ppt/notesSlides/notesSlide21.xml><?xml version="1.0" encoding="utf-8"?>
+<p:notes xmlns:a="http://schemas.openxmlformats.org/drawingml/2006/main" xmlns:r="http://schemas.openxmlformats.org/officeDocument/2006/relationships" xmlns:p="http://schemas.openxmlformats.org/presentationml/2006/main">
+  <p:cSld>
+    <p:spTree>
+      <p:nvGrpSpPr>
+        <p:cNvPr id="1" name=""/>
+        <p:cNvGrpSpPr/>
+        <p:nvPr/>
+      </p:nvGrpSpPr>
+      <p:grpSpPr>
+        <a:xfrm>
+          <a:off x="0" y="0"/>
+          <a:ext cx="0" cy="0"/>
+          <a:chOff x="0" y="0"/>
+          <a:chExt cx="0" cy="0"/>
+        </a:xfrm>
+      </p:grpSpPr>
+      <p:sp>
+        <p:nvSpPr>
+          <p:cNvPr id="2" name="Образ слайда 1"/>
+          <p:cNvSpPr>
+            <a:spLocks noGrp="1" noRot="1" noChangeAspect="1"/>
+          </p:cNvSpPr>
+          <p:nvPr>
+            <p:ph type="sldImg"/>
+          </p:nvPr>
+        </p:nvSpPr>
+        <p:spPr>
+          <a:xfrm>
+            <a:off x="685800" y="1143000"/>
+            <a:ext cx="5486400" cy="3086100"/>
+          </a:xfrm>
+        </p:spPr>
+      </p:sp>
+      <p:sp>
+        <p:nvSpPr>
+          <p:cNvPr id="3" name="Заметки 2"/>
+          <p:cNvSpPr>
+            <a:spLocks noGrp="1"/>
+          </p:cNvSpPr>
+          <p:nvPr>
+            <p:ph type="body" idx="1"/>
+          </p:nvPr>
+        </p:nvSpPr>
+        <p:spPr/>
+        <p:txBody>
+          <a:bodyPr/>
+          <a:lstStyle/>
+          <a:p>
+            <a:endParaRPr lang="ru-RU"/>
+          </a:p>
+        </p:txBody>
+      </p:sp>
+      <p:sp>
+        <p:nvSpPr>
+          <p:cNvPr id="4" name="Номер слайда 3"/>
+          <p:cNvSpPr>
+            <a:spLocks noGrp="1"/>
+          </p:cNvSpPr>
+          <p:nvPr>
+            <p:ph type="sldNum" sz="quarter" idx="10"/>
+          </p:nvPr>
+        </p:nvSpPr>
+        <p:spPr/>
+        <p:txBody>
+          <a:bodyPr/>
+          <a:lstStyle/>
+          <a:p>
+            <a:fld id="{F0F4E2F1-1521-4C3A-A563-2F7D19AB6E0B}" type="slidenum">
+              <a:rPr lang="en-US" smtClean="0"/>
+              <a:pPr/>
+              <a:t>21</a:t>
+            </a:fld>
+            <a:endParaRPr lang="en-US"/>
+          </a:p>
+        </p:txBody>
+      </p:sp>
+    </p:spTree>
+    <p:extLst>
+      <p:ext uri="{BB962C8B-B14F-4D97-AF65-F5344CB8AC3E}">
+        <p14:creationId xmlns:p14="http://schemas.microsoft.com/office/powerpoint/2010/main" val="3519454845"/>
+      </p:ext>
+    </p:extLst>
+  </p:cSld>
+  <p:clrMapOvr>
+    <a:masterClrMapping/>
+  </p:clrMapOvr>
+</p:notes>
+</file>
+
+<file path=ppt/notesSlides/notesSlide22.xml><?xml version="1.0" encoding="utf-8"?>
+<p:notes xmlns:a="http://schemas.openxmlformats.org/drawingml/2006/main" xmlns:r="http://schemas.openxmlformats.org/officeDocument/2006/relationships" xmlns:p="http://schemas.openxmlformats.org/presentationml/2006/main">
+  <p:cSld>
+    <p:spTree>
+      <p:nvGrpSpPr>
+        <p:cNvPr id="1" name=""/>
+        <p:cNvGrpSpPr/>
+        <p:nvPr/>
+      </p:nvGrpSpPr>
+      <p:grpSpPr>
+        <a:xfrm>
+          <a:off x="0" y="0"/>
+          <a:ext cx="0" cy="0"/>
+          <a:chOff x="0" y="0"/>
+          <a:chExt cx="0" cy="0"/>
+        </a:xfrm>
+      </p:grpSpPr>
+      <p:sp>
+        <p:nvSpPr>
+          <p:cNvPr id="2" name="Образ слайда 1"/>
+          <p:cNvSpPr>
+            <a:spLocks noGrp="1" noRot="1" noChangeAspect="1"/>
+          </p:cNvSpPr>
+          <p:nvPr>
+            <p:ph type="sldImg"/>
+          </p:nvPr>
+        </p:nvSpPr>
+        <p:spPr>
+          <a:xfrm>
+            <a:off x="685800" y="1143000"/>
+            <a:ext cx="5486400" cy="3086100"/>
+          </a:xfrm>
+        </p:spPr>
+      </p:sp>
+      <p:sp>
+        <p:nvSpPr>
+          <p:cNvPr id="3" name="Заметки 2"/>
+          <p:cNvSpPr>
+            <a:spLocks noGrp="1"/>
+          </p:cNvSpPr>
+          <p:nvPr>
+            <p:ph type="body" idx="1"/>
+          </p:nvPr>
+        </p:nvSpPr>
+        <p:spPr/>
+        <p:txBody>
+          <a:bodyPr/>
+          <a:lstStyle/>
+          <a:p>
+            <a:endParaRPr lang="ru-RU"/>
+          </a:p>
+        </p:txBody>
+      </p:sp>
+      <p:sp>
+        <p:nvSpPr>
+          <p:cNvPr id="4" name="Номер слайда 3"/>
+          <p:cNvSpPr>
+            <a:spLocks noGrp="1"/>
+          </p:cNvSpPr>
+          <p:nvPr>
+            <p:ph type="sldNum" sz="quarter" idx="10"/>
+          </p:nvPr>
+        </p:nvSpPr>
+        <p:spPr/>
+        <p:txBody>
+          <a:bodyPr/>
+          <a:lstStyle/>
+          <a:p>
+            <a:fld id="{F0F4E2F1-1521-4C3A-A563-2F7D19AB6E0B}" type="slidenum">
+              <a:rPr lang="en-US" smtClean="0"/>
+              <a:pPr/>
+              <a:t>22</a:t>
+            </a:fld>
+            <a:endParaRPr lang="en-US"/>
+          </a:p>
+        </p:txBody>
+      </p:sp>
+    </p:spTree>
+    <p:extLst>
+      <p:ext uri="{BB962C8B-B14F-4D97-AF65-F5344CB8AC3E}">
+        <p14:creationId xmlns:p14="http://schemas.microsoft.com/office/powerpoint/2010/main" val="3845158727"/>
+      </p:ext>
+    </p:extLst>
+  </p:cSld>
+  <p:clrMapOvr>
+    <a:masterClrMapping/>
+  </p:clrMapOvr>
+</p:notes>
+</file>
+
+<file path=ppt/notesSlides/notesSlide23.xml><?xml version="1.0" encoding="utf-8"?>
+<p:notes xmlns:a="http://schemas.openxmlformats.org/drawingml/2006/main" xmlns:r="http://schemas.openxmlformats.org/officeDocument/2006/relationships" xmlns:p="http://schemas.openxmlformats.org/presentationml/2006/main">
+  <p:cSld>
+    <p:spTree>
+      <p:nvGrpSpPr>
+        <p:cNvPr id="1" name=""/>
+        <p:cNvGrpSpPr/>
+        <p:nvPr/>
+      </p:nvGrpSpPr>
+      <p:grpSpPr>
+        <a:xfrm>
+          <a:off x="0" y="0"/>
+          <a:ext cx="0" cy="0"/>
+          <a:chOff x="0" y="0"/>
+          <a:chExt cx="0" cy="0"/>
+        </a:xfrm>
+      </p:grpSpPr>
+      <p:sp>
+        <p:nvSpPr>
+          <p:cNvPr id="2" name="Образ слайда 1"/>
+          <p:cNvSpPr>
+            <a:spLocks noGrp="1" noRot="1" noChangeAspect="1"/>
+          </p:cNvSpPr>
+          <p:nvPr>
+            <p:ph type="sldImg"/>
+          </p:nvPr>
+        </p:nvSpPr>
+        <p:spPr>
+          <a:xfrm>
+            <a:off x="685800" y="1143000"/>
+            <a:ext cx="5486400" cy="3086100"/>
+          </a:xfrm>
+        </p:spPr>
+      </p:sp>
+      <p:sp>
+        <p:nvSpPr>
+          <p:cNvPr id="3" name="Заметки 2"/>
+          <p:cNvSpPr>
+            <a:spLocks noGrp="1"/>
+          </p:cNvSpPr>
+          <p:nvPr>
+            <p:ph type="body" idx="1"/>
+          </p:nvPr>
+        </p:nvSpPr>
+        <p:spPr/>
+        <p:txBody>
+          <a:bodyPr/>
+          <a:lstStyle/>
+          <a:p>
+            <a:endParaRPr lang="ru-RU"/>
+          </a:p>
+        </p:txBody>
+      </p:sp>
+      <p:sp>
+        <p:nvSpPr>
+          <p:cNvPr id="4" name="Номер слайда 3"/>
+          <p:cNvSpPr>
+            <a:spLocks noGrp="1"/>
+          </p:cNvSpPr>
+          <p:nvPr>
+            <p:ph type="sldNum" sz="quarter" idx="10"/>
+          </p:nvPr>
+        </p:nvSpPr>
+        <p:spPr/>
+        <p:txBody>
+          <a:bodyPr/>
+          <a:lstStyle/>
+          <a:p>
+            <a:fld id="{F0F4E2F1-1521-4C3A-A563-2F7D19AB6E0B}" type="slidenum">
+              <a:rPr lang="en-US" smtClean="0"/>
+              <a:pPr/>
+              <a:t>23</a:t>
+            </a:fld>
+            <a:endParaRPr lang="en-US"/>
+          </a:p>
+        </p:txBody>
+      </p:sp>
+    </p:spTree>
+    <p:extLst>
+      <p:ext uri="{BB962C8B-B14F-4D97-AF65-F5344CB8AC3E}">
+        <p14:creationId xmlns:p14="http://schemas.microsoft.com/office/powerpoint/2010/main" val="1499022261"/>
+      </p:ext>
+    </p:extLst>
+  </p:cSld>
+  <p:clrMapOvr>
+    <a:masterClrMapping/>
+  </p:clrMapOvr>
+</p:notes>
+</file>
+
+<file path=ppt/notesSlides/notesSlide24.xml><?xml version="1.0" encoding="utf-8"?>
+<p:notes xmlns:a="http://schemas.openxmlformats.org/drawingml/2006/main" xmlns:r="http://schemas.openxmlformats.org/officeDocument/2006/relationships" xmlns:p="http://schemas.openxmlformats.org/presentationml/2006/main">
+  <p:cSld>
+    <p:spTree>
+      <p:nvGrpSpPr>
+        <p:cNvPr id="1" name=""/>
+        <p:cNvGrpSpPr/>
+        <p:nvPr/>
+      </p:nvGrpSpPr>
+      <p:grpSpPr>
+        <a:xfrm>
+          <a:off x="0" y="0"/>
+          <a:ext cx="0" cy="0"/>
+          <a:chOff x="0" y="0"/>
+          <a:chExt cx="0" cy="0"/>
+        </a:xfrm>
+      </p:grpSpPr>
+      <p:sp>
+        <p:nvSpPr>
+          <p:cNvPr id="2" name="Образ слайда 1"/>
+          <p:cNvSpPr>
+            <a:spLocks noGrp="1" noRot="1" noChangeAspect="1"/>
+          </p:cNvSpPr>
+          <p:nvPr>
+            <p:ph type="sldImg"/>
+          </p:nvPr>
+        </p:nvSpPr>
+        <p:spPr>
+          <a:xfrm>
+            <a:off x="685800" y="1143000"/>
+            <a:ext cx="5486400" cy="3086100"/>
+          </a:xfrm>
+        </p:spPr>
+      </p:sp>
+      <p:sp>
+        <p:nvSpPr>
+          <p:cNvPr id="3" name="Заметки 2"/>
+          <p:cNvSpPr>
+            <a:spLocks noGrp="1"/>
+          </p:cNvSpPr>
+          <p:nvPr>
+            <p:ph type="body" idx="1"/>
+          </p:nvPr>
+        </p:nvSpPr>
+        <p:spPr/>
+        <p:txBody>
+          <a:bodyPr/>
+          <a:lstStyle/>
+          <a:p>
+            <a:endParaRPr lang="ru-RU"/>
+          </a:p>
+        </p:txBody>
+      </p:sp>
+      <p:sp>
+        <p:nvSpPr>
+          <p:cNvPr id="4" name="Номер слайда 3"/>
+          <p:cNvSpPr>
+            <a:spLocks noGrp="1"/>
+          </p:cNvSpPr>
+          <p:nvPr>
+            <p:ph type="sldNum" sz="quarter" idx="10"/>
+          </p:nvPr>
+        </p:nvSpPr>
+        <p:spPr/>
+        <p:txBody>
+          <a:bodyPr/>
+          <a:lstStyle/>
+          <a:p>
+            <a:fld id="{F0F4E2F1-1521-4C3A-A563-2F7D19AB6E0B}" type="slidenum">
+              <a:rPr lang="en-US" smtClean="0"/>
+              <a:pPr/>
+              <a:t>24</a:t>
+            </a:fld>
+            <a:endParaRPr lang="en-US"/>
+          </a:p>
+        </p:txBody>
+      </p:sp>
+    </p:spTree>
+    <p:extLst>
+      <p:ext uri="{BB962C8B-B14F-4D97-AF65-F5344CB8AC3E}">
+        <p14:creationId xmlns:p14="http://schemas.microsoft.com/office/powerpoint/2010/main" val="2391011410"/>
+      </p:ext>
+    </p:extLst>
+  </p:cSld>
+  <p:clrMapOvr>
+    <a:masterClrMapping/>
+  </p:clrMapOvr>
+</p:notes>
+</file>
+
+<file path=ppt/notesSlides/notesSlide25.xml><?xml version="1.0" encoding="utf-8"?>
+<p:notes xmlns:a="http://schemas.openxmlformats.org/drawingml/2006/main" xmlns:r="http://schemas.openxmlformats.org/officeDocument/2006/relationships" xmlns:p="http://schemas.openxmlformats.org/presentationml/2006/main">
+  <p:cSld>
+    <p:spTree>
+      <p:nvGrpSpPr>
+        <p:cNvPr id="1" name=""/>
+        <p:cNvGrpSpPr/>
+        <p:nvPr/>
+      </p:nvGrpSpPr>
+      <p:grpSpPr>
+        <a:xfrm>
+          <a:off x="0" y="0"/>
+          <a:ext cx="0" cy="0"/>
+          <a:chOff x="0" y="0"/>
+          <a:chExt cx="0" cy="0"/>
+        </a:xfrm>
+      </p:grpSpPr>
+      <p:sp>
+        <p:nvSpPr>
+          <p:cNvPr id="2" name="Образ слайда 1"/>
+          <p:cNvSpPr>
+            <a:spLocks noGrp="1" noRot="1" noChangeAspect="1"/>
+          </p:cNvSpPr>
+          <p:nvPr>
+            <p:ph type="sldImg"/>
+          </p:nvPr>
+        </p:nvSpPr>
+        <p:spPr>
+          <a:xfrm>
+            <a:off x="685800" y="1143000"/>
+            <a:ext cx="5486400" cy="3086100"/>
+          </a:xfrm>
+        </p:spPr>
+      </p:sp>
+      <p:sp>
+        <p:nvSpPr>
+          <p:cNvPr id="3" name="Заметки 2"/>
+          <p:cNvSpPr>
+            <a:spLocks noGrp="1"/>
+          </p:cNvSpPr>
+          <p:nvPr>
+            <p:ph type="body" idx="1"/>
+          </p:nvPr>
+        </p:nvSpPr>
+        <p:spPr/>
+        <p:txBody>
+          <a:bodyPr/>
+          <a:lstStyle/>
+          <a:p>
+            <a:endParaRPr lang="ru-RU"/>
+          </a:p>
+        </p:txBody>
+      </p:sp>
+      <p:sp>
+        <p:nvSpPr>
+          <p:cNvPr id="4" name="Номер слайда 3"/>
+          <p:cNvSpPr>
+            <a:spLocks noGrp="1"/>
+          </p:cNvSpPr>
+          <p:nvPr>
+            <p:ph type="sldNum" sz="quarter" idx="10"/>
+          </p:nvPr>
+        </p:nvSpPr>
+        <p:spPr/>
+        <p:txBody>
+          <a:bodyPr/>
+          <a:lstStyle/>
+          <a:p>
+            <a:fld id="{F0F4E2F1-1521-4C3A-A563-2F7D19AB6E0B}" type="slidenum">
+              <a:rPr lang="en-US" smtClean="0"/>
+              <a:pPr/>
+              <a:t>25</a:t>
+            </a:fld>
+            <a:endParaRPr lang="en-US"/>
+          </a:p>
+        </p:txBody>
+      </p:sp>
+    </p:spTree>
+    <p:extLst>
+      <p:ext uri="{BB962C8B-B14F-4D97-AF65-F5344CB8AC3E}">
+        <p14:creationId xmlns:p14="http://schemas.microsoft.com/office/powerpoint/2010/main" val="2461177977"/>
+      </p:ext>
+    </p:extLst>
+  </p:cSld>
+  <p:clrMapOvr>
+    <a:masterClrMapping/>
+  </p:clrMapOvr>
+</p:notes>
+</file>
+
+<file path=ppt/notesSlides/notesSlide26.xml><?xml version="1.0" encoding="utf-8"?>
+<p:notes xmlns:a="http://schemas.openxmlformats.org/drawingml/2006/main" xmlns:r="http://schemas.openxmlformats.org/officeDocument/2006/relationships" xmlns:p="http://schemas.openxmlformats.org/presentationml/2006/main">
+  <p:cSld>
+    <p:spTree>
+      <p:nvGrpSpPr>
+        <p:cNvPr id="1" name=""/>
+        <p:cNvGrpSpPr/>
+        <p:nvPr/>
+      </p:nvGrpSpPr>
+      <p:grpSpPr>
+        <a:xfrm>
+          <a:off x="0" y="0"/>
+          <a:ext cx="0" cy="0"/>
+          <a:chOff x="0" y="0"/>
+          <a:chExt cx="0" cy="0"/>
+        </a:xfrm>
+      </p:grpSpPr>
+      <p:sp>
+        <p:nvSpPr>
+          <p:cNvPr id="2" name="Образ слайда 1"/>
+          <p:cNvSpPr>
+            <a:spLocks noGrp="1" noRot="1" noChangeAspect="1"/>
+          </p:cNvSpPr>
+          <p:nvPr>
+            <p:ph type="sldImg"/>
+          </p:nvPr>
+        </p:nvSpPr>
+        <p:spPr>
+          <a:xfrm>
+            <a:off x="685800" y="1143000"/>
+            <a:ext cx="5486400" cy="3086100"/>
+          </a:xfrm>
+        </p:spPr>
+      </p:sp>
+      <p:sp>
+        <p:nvSpPr>
+          <p:cNvPr id="3" name="Заметки 2"/>
+          <p:cNvSpPr>
+            <a:spLocks noGrp="1"/>
+          </p:cNvSpPr>
+          <p:nvPr>
+            <p:ph type="body" idx="1"/>
+          </p:nvPr>
+        </p:nvSpPr>
+        <p:spPr/>
+        <p:txBody>
+          <a:bodyPr/>
+          <a:lstStyle/>
+          <a:p>
+            <a:endParaRPr lang="ru-RU"/>
+          </a:p>
+        </p:txBody>
+      </p:sp>
+      <p:sp>
+        <p:nvSpPr>
+          <p:cNvPr id="4" name="Номер слайда 3"/>
+          <p:cNvSpPr>
+            <a:spLocks noGrp="1"/>
+          </p:cNvSpPr>
+          <p:nvPr>
+            <p:ph type="sldNum" sz="quarter" idx="10"/>
+          </p:nvPr>
+        </p:nvSpPr>
+        <p:spPr/>
+        <p:txBody>
+          <a:bodyPr/>
+          <a:lstStyle/>
+          <a:p>
+            <a:fld id="{F0F4E2F1-1521-4C3A-A563-2F7D19AB6E0B}" type="slidenum">
+              <a:rPr lang="en-US" smtClean="0"/>
+              <a:pPr/>
+              <a:t>26</a:t>
+            </a:fld>
+            <a:endParaRPr lang="en-US"/>
+          </a:p>
+        </p:txBody>
+      </p:sp>
+    </p:spTree>
+    <p:extLst>
+      <p:ext uri="{BB962C8B-B14F-4D97-AF65-F5344CB8AC3E}">
+        <p14:creationId xmlns:p14="http://schemas.microsoft.com/office/powerpoint/2010/main" val="2073272237"/>
+      </p:ext>
+    </p:extLst>
+  </p:cSld>
+  <p:clrMapOvr>
+    <a:masterClrMapping/>
+  </p:clrMapOvr>
+</p:notes>
+</file>
+
+<file path=ppt/notesSlides/notesSlide27.xml><?xml version="1.0" encoding="utf-8"?>
+<p:notes xmlns:a="http://schemas.openxmlformats.org/drawingml/2006/main" xmlns:r="http://schemas.openxmlformats.org/officeDocument/2006/relationships" xmlns:p="http://schemas.openxmlformats.org/presentationml/2006/main">
+  <p:cSld>
+    <p:spTree>
+      <p:nvGrpSpPr>
+        <p:cNvPr id="1" name=""/>
+        <p:cNvGrpSpPr/>
+        <p:nvPr/>
+      </p:nvGrpSpPr>
+      <p:grpSpPr>
+        <a:xfrm>
+          <a:off x="0" y="0"/>
+          <a:ext cx="0" cy="0"/>
+          <a:chOff x="0" y="0"/>
+          <a:chExt cx="0" cy="0"/>
+        </a:xfrm>
+      </p:grpSpPr>
+      <p:sp>
+        <p:nvSpPr>
+          <p:cNvPr id="2" name="Образ слайда 1"/>
+          <p:cNvSpPr>
+            <a:spLocks noGrp="1" noRot="1" noChangeAspect="1"/>
+          </p:cNvSpPr>
+          <p:nvPr>
+            <p:ph type="sldImg"/>
+          </p:nvPr>
+        </p:nvSpPr>
+        <p:spPr>
+          <a:xfrm>
+            <a:off x="685800" y="1143000"/>
+            <a:ext cx="5486400" cy="3086100"/>
+          </a:xfrm>
+        </p:spPr>
+      </p:sp>
+      <p:sp>
+        <p:nvSpPr>
+          <p:cNvPr id="3" name="Заметки 2"/>
+          <p:cNvSpPr>
+            <a:spLocks noGrp="1"/>
+          </p:cNvSpPr>
+          <p:nvPr>
+            <p:ph type="body" idx="1"/>
+          </p:nvPr>
+        </p:nvSpPr>
+        <p:spPr/>
+        <p:txBody>
+          <a:bodyPr/>
+          <a:lstStyle/>
+          <a:p>
+            <a:endParaRPr lang="ru-RU"/>
+          </a:p>
+        </p:txBody>
+      </p:sp>
+      <p:sp>
+        <p:nvSpPr>
+          <p:cNvPr id="4" name="Номер слайда 3"/>
+          <p:cNvSpPr>
+            <a:spLocks noGrp="1"/>
+          </p:cNvSpPr>
+          <p:nvPr>
+            <p:ph type="sldNum" sz="quarter" idx="10"/>
+          </p:nvPr>
+        </p:nvSpPr>
+        <p:spPr/>
+        <p:txBody>
+          <a:bodyPr/>
+          <a:lstStyle/>
+          <a:p>
+            <a:fld id="{F0F4E2F1-1521-4C3A-A563-2F7D19AB6E0B}" type="slidenum">
+              <a:rPr lang="en-US" smtClean="0"/>
+              <a:pPr/>
+              <a:t>27</a:t>
+            </a:fld>
+            <a:endParaRPr lang="en-US"/>
+          </a:p>
+        </p:txBody>
+      </p:sp>
+    </p:spTree>
+    <p:extLst>
+      <p:ext uri="{BB962C8B-B14F-4D97-AF65-F5344CB8AC3E}">
+        <p14:creationId xmlns:p14="http://schemas.microsoft.com/office/powerpoint/2010/main" val="1124730532"/>
+      </p:ext>
+    </p:extLst>
+  </p:cSld>
+  <p:clrMapOvr>
+    <a:masterClrMapping/>
+  </p:clrMapOvr>
+</p:notes>
+</file>
+
+<file path=ppt/notesSlides/notesSlide28.xml><?xml version="1.0" encoding="utf-8"?>
+<p:notes xmlns:a="http://schemas.openxmlformats.org/drawingml/2006/main" xmlns:r="http://schemas.openxmlformats.org/officeDocument/2006/relationships" xmlns:p="http://schemas.openxmlformats.org/presentationml/2006/main">
+  <p:cSld>
+    <p:spTree>
+      <p:nvGrpSpPr>
+        <p:cNvPr id="1" name=""/>
+        <p:cNvGrpSpPr/>
+        <p:nvPr/>
+      </p:nvGrpSpPr>
+      <p:grpSpPr>
+        <a:xfrm>
+          <a:off x="0" y="0"/>
+          <a:ext cx="0" cy="0"/>
+          <a:chOff x="0" y="0"/>
+          <a:chExt cx="0" cy="0"/>
+        </a:xfrm>
+      </p:grpSpPr>
+      <p:sp>
+        <p:nvSpPr>
+          <p:cNvPr id="2" name="Образ слайда 1"/>
+          <p:cNvSpPr>
+            <a:spLocks noGrp="1" noRot="1" noChangeAspect="1"/>
+          </p:cNvSpPr>
+          <p:nvPr>
+            <p:ph type="sldImg"/>
+          </p:nvPr>
+        </p:nvSpPr>
+        <p:spPr>
+          <a:xfrm>
+            <a:off x="685800" y="1143000"/>
+            <a:ext cx="5486400" cy="3086100"/>
+          </a:xfrm>
+        </p:spPr>
+      </p:sp>
+      <p:sp>
+        <p:nvSpPr>
+          <p:cNvPr id="3" name="Заметки 2"/>
+          <p:cNvSpPr>
+            <a:spLocks noGrp="1"/>
+          </p:cNvSpPr>
+          <p:nvPr>
+            <p:ph type="body" idx="1"/>
+          </p:nvPr>
+        </p:nvSpPr>
+        <p:spPr/>
+        <p:txBody>
+          <a:bodyPr/>
+          <a:lstStyle/>
+          <a:p>
+            <a:endParaRPr lang="ru-RU"/>
+          </a:p>
+        </p:txBody>
+      </p:sp>
+      <p:sp>
+        <p:nvSpPr>
+          <p:cNvPr id="4" name="Номер слайда 3"/>
+          <p:cNvSpPr>
+            <a:spLocks noGrp="1"/>
+          </p:cNvSpPr>
+          <p:nvPr>
+            <p:ph type="sldNum" sz="quarter" idx="10"/>
+          </p:nvPr>
+        </p:nvSpPr>
+        <p:spPr/>
+        <p:txBody>
+          <a:bodyPr/>
+          <a:lstStyle/>
+          <a:p>
+            <a:fld id="{F0F4E2F1-1521-4C3A-A563-2F7D19AB6E0B}" type="slidenum">
+              <a:rPr lang="en-US" smtClean="0"/>
+              <a:pPr/>
+              <a:t>28</a:t>
+            </a:fld>
+            <a:endParaRPr lang="en-US"/>
+          </a:p>
+        </p:txBody>
+      </p:sp>
+    </p:spTree>
+    <p:extLst>
+      <p:ext uri="{BB962C8B-B14F-4D97-AF65-F5344CB8AC3E}">
+        <p14:creationId xmlns:p14="http://schemas.microsoft.com/office/powerpoint/2010/main" val="501823708"/>
+      </p:ext>
+    </p:extLst>
+  </p:cSld>
+  <p:clrMapOvr>
+    <a:masterClrMapping/>
+  </p:clrMapOvr>
+</p:notes>
+</file>
+
+<file path=ppt/notesSlides/notesSlide29.xml><?xml version="1.0" encoding="utf-8"?>
+<p:notes xmlns:a="http://schemas.openxmlformats.org/drawingml/2006/main" xmlns:r="http://schemas.openxmlformats.org/officeDocument/2006/relationships" xmlns:p="http://schemas.openxmlformats.org/presentationml/2006/main">
+  <p:cSld>
+    <p:spTree>
+      <p:nvGrpSpPr>
+        <p:cNvPr id="1" name=""/>
+        <p:cNvGrpSpPr/>
+        <p:nvPr/>
+      </p:nvGrpSpPr>
+      <p:grpSpPr>
+        <a:xfrm>
+          <a:off x="0" y="0"/>
+          <a:ext cx="0" cy="0"/>
+          <a:chOff x="0" y="0"/>
+          <a:chExt cx="0" cy="0"/>
+        </a:xfrm>
+      </p:grpSpPr>
+      <p:sp>
+        <p:nvSpPr>
+          <p:cNvPr id="2" name="Образ слайда 1"/>
+          <p:cNvSpPr>
+            <a:spLocks noGrp="1" noRot="1" noChangeAspect="1"/>
+          </p:cNvSpPr>
+          <p:nvPr>
+            <p:ph type="sldImg"/>
+          </p:nvPr>
+        </p:nvSpPr>
+        <p:spPr>
+          <a:xfrm>
+            <a:off x="685800" y="1143000"/>
+            <a:ext cx="5486400" cy="3086100"/>
+          </a:xfrm>
+        </p:spPr>
+      </p:sp>
+      <p:sp>
+        <p:nvSpPr>
+          <p:cNvPr id="3" name="Заметки 2"/>
+          <p:cNvSpPr>
+            <a:spLocks noGrp="1"/>
+          </p:cNvSpPr>
+          <p:nvPr>
+            <p:ph type="body" idx="1"/>
+          </p:nvPr>
+        </p:nvSpPr>
+        <p:spPr/>
+        <p:txBody>
+          <a:bodyPr/>
+          <a:lstStyle/>
+          <a:p>
+            <a:endParaRPr lang="ru-RU"/>
+          </a:p>
+        </p:txBody>
+      </p:sp>
+      <p:sp>
+        <p:nvSpPr>
+          <p:cNvPr id="4" name="Номер слайда 3"/>
+          <p:cNvSpPr>
+            <a:spLocks noGrp="1"/>
+          </p:cNvSpPr>
+          <p:nvPr>
+            <p:ph type="sldNum" sz="quarter" idx="10"/>
+          </p:nvPr>
+        </p:nvSpPr>
+        <p:spPr/>
+        <p:txBody>
+          <a:bodyPr/>
+          <a:lstStyle/>
+          <a:p>
+            <a:fld id="{F0F4E2F1-1521-4C3A-A563-2F7D19AB6E0B}" type="slidenum">
+              <a:rPr lang="en-US" smtClean="0"/>
+              <a:pPr/>
+              <a:t>29</a:t>
+            </a:fld>
+            <a:endParaRPr lang="en-US"/>
+          </a:p>
+        </p:txBody>
+      </p:sp>
+    </p:spTree>
+    <p:extLst>
+      <p:ext uri="{BB962C8B-B14F-4D97-AF65-F5344CB8AC3E}">
+        <p14:creationId xmlns:p14="http://schemas.microsoft.com/office/powerpoint/2010/main" val="2547277889"/>
       </p:ext>
     </p:extLst>
   </p:cSld>
@@ -750,6 +2575,456 @@
     <p:extLst>
       <p:ext uri="{BB962C8B-B14F-4D97-AF65-F5344CB8AC3E}">
         <p14:creationId xmlns:p14="http://schemas.microsoft.com/office/powerpoint/2010/main" val="1893640880"/>
+      </p:ext>
+    </p:extLst>
+  </p:cSld>
+  <p:clrMapOvr>
+    <a:masterClrMapping/>
+  </p:clrMapOvr>
+</p:notes>
+</file>
+
+<file path=ppt/notesSlides/notesSlide30.xml><?xml version="1.0" encoding="utf-8"?>
+<p:notes xmlns:a="http://schemas.openxmlformats.org/drawingml/2006/main" xmlns:r="http://schemas.openxmlformats.org/officeDocument/2006/relationships" xmlns:p="http://schemas.openxmlformats.org/presentationml/2006/main">
+  <p:cSld>
+    <p:spTree>
+      <p:nvGrpSpPr>
+        <p:cNvPr id="1" name=""/>
+        <p:cNvGrpSpPr/>
+        <p:nvPr/>
+      </p:nvGrpSpPr>
+      <p:grpSpPr>
+        <a:xfrm>
+          <a:off x="0" y="0"/>
+          <a:ext cx="0" cy="0"/>
+          <a:chOff x="0" y="0"/>
+          <a:chExt cx="0" cy="0"/>
+        </a:xfrm>
+      </p:grpSpPr>
+      <p:sp>
+        <p:nvSpPr>
+          <p:cNvPr id="2" name="Образ слайда 1"/>
+          <p:cNvSpPr>
+            <a:spLocks noGrp="1" noRot="1" noChangeAspect="1"/>
+          </p:cNvSpPr>
+          <p:nvPr>
+            <p:ph type="sldImg"/>
+          </p:nvPr>
+        </p:nvSpPr>
+        <p:spPr>
+          <a:xfrm>
+            <a:off x="685800" y="1143000"/>
+            <a:ext cx="5486400" cy="3086100"/>
+          </a:xfrm>
+        </p:spPr>
+      </p:sp>
+      <p:sp>
+        <p:nvSpPr>
+          <p:cNvPr id="3" name="Заметки 2"/>
+          <p:cNvSpPr>
+            <a:spLocks noGrp="1"/>
+          </p:cNvSpPr>
+          <p:nvPr>
+            <p:ph type="body" idx="1"/>
+          </p:nvPr>
+        </p:nvSpPr>
+        <p:spPr/>
+        <p:txBody>
+          <a:bodyPr/>
+          <a:lstStyle/>
+          <a:p>
+            <a:endParaRPr lang="ru-RU"/>
+          </a:p>
+        </p:txBody>
+      </p:sp>
+      <p:sp>
+        <p:nvSpPr>
+          <p:cNvPr id="4" name="Номер слайда 3"/>
+          <p:cNvSpPr>
+            <a:spLocks noGrp="1"/>
+          </p:cNvSpPr>
+          <p:nvPr>
+            <p:ph type="sldNum" sz="quarter" idx="10"/>
+          </p:nvPr>
+        </p:nvSpPr>
+        <p:spPr/>
+        <p:txBody>
+          <a:bodyPr/>
+          <a:lstStyle/>
+          <a:p>
+            <a:fld id="{F0F4E2F1-1521-4C3A-A563-2F7D19AB6E0B}" type="slidenum">
+              <a:rPr lang="en-US" smtClean="0"/>
+              <a:pPr/>
+              <a:t>30</a:t>
+            </a:fld>
+            <a:endParaRPr lang="en-US"/>
+          </a:p>
+        </p:txBody>
+      </p:sp>
+    </p:spTree>
+    <p:extLst>
+      <p:ext uri="{BB962C8B-B14F-4D97-AF65-F5344CB8AC3E}">
+        <p14:creationId xmlns:p14="http://schemas.microsoft.com/office/powerpoint/2010/main" val="831454074"/>
+      </p:ext>
+    </p:extLst>
+  </p:cSld>
+  <p:clrMapOvr>
+    <a:masterClrMapping/>
+  </p:clrMapOvr>
+</p:notes>
+</file>
+
+<file path=ppt/notesSlides/notesSlide31.xml><?xml version="1.0" encoding="utf-8"?>
+<p:notes xmlns:a="http://schemas.openxmlformats.org/drawingml/2006/main" xmlns:r="http://schemas.openxmlformats.org/officeDocument/2006/relationships" xmlns:p="http://schemas.openxmlformats.org/presentationml/2006/main">
+  <p:cSld>
+    <p:spTree>
+      <p:nvGrpSpPr>
+        <p:cNvPr id="1" name=""/>
+        <p:cNvGrpSpPr/>
+        <p:nvPr/>
+      </p:nvGrpSpPr>
+      <p:grpSpPr>
+        <a:xfrm>
+          <a:off x="0" y="0"/>
+          <a:ext cx="0" cy="0"/>
+          <a:chOff x="0" y="0"/>
+          <a:chExt cx="0" cy="0"/>
+        </a:xfrm>
+      </p:grpSpPr>
+      <p:sp>
+        <p:nvSpPr>
+          <p:cNvPr id="2" name="Образ слайда 1"/>
+          <p:cNvSpPr>
+            <a:spLocks noGrp="1" noRot="1" noChangeAspect="1"/>
+          </p:cNvSpPr>
+          <p:nvPr>
+            <p:ph type="sldImg"/>
+          </p:nvPr>
+        </p:nvSpPr>
+        <p:spPr>
+          <a:xfrm>
+            <a:off x="685800" y="1143000"/>
+            <a:ext cx="5486400" cy="3086100"/>
+          </a:xfrm>
+        </p:spPr>
+      </p:sp>
+      <p:sp>
+        <p:nvSpPr>
+          <p:cNvPr id="3" name="Заметки 2"/>
+          <p:cNvSpPr>
+            <a:spLocks noGrp="1"/>
+          </p:cNvSpPr>
+          <p:nvPr>
+            <p:ph type="body" idx="1"/>
+          </p:nvPr>
+        </p:nvSpPr>
+        <p:spPr/>
+        <p:txBody>
+          <a:bodyPr/>
+          <a:lstStyle/>
+          <a:p>
+            <a:endParaRPr lang="ru-RU"/>
+          </a:p>
+        </p:txBody>
+      </p:sp>
+      <p:sp>
+        <p:nvSpPr>
+          <p:cNvPr id="4" name="Номер слайда 3"/>
+          <p:cNvSpPr>
+            <a:spLocks noGrp="1"/>
+          </p:cNvSpPr>
+          <p:nvPr>
+            <p:ph type="sldNum" sz="quarter" idx="10"/>
+          </p:nvPr>
+        </p:nvSpPr>
+        <p:spPr/>
+        <p:txBody>
+          <a:bodyPr/>
+          <a:lstStyle/>
+          <a:p>
+            <a:fld id="{F0F4E2F1-1521-4C3A-A563-2F7D19AB6E0B}" type="slidenum">
+              <a:rPr lang="en-US" smtClean="0"/>
+              <a:pPr/>
+              <a:t>31</a:t>
+            </a:fld>
+            <a:endParaRPr lang="en-US"/>
+          </a:p>
+        </p:txBody>
+      </p:sp>
+    </p:spTree>
+    <p:extLst>
+      <p:ext uri="{BB962C8B-B14F-4D97-AF65-F5344CB8AC3E}">
+        <p14:creationId xmlns:p14="http://schemas.microsoft.com/office/powerpoint/2010/main" val="302678916"/>
+      </p:ext>
+    </p:extLst>
+  </p:cSld>
+  <p:clrMapOvr>
+    <a:masterClrMapping/>
+  </p:clrMapOvr>
+</p:notes>
+</file>
+
+<file path=ppt/notesSlides/notesSlide32.xml><?xml version="1.0" encoding="utf-8"?>
+<p:notes xmlns:a="http://schemas.openxmlformats.org/drawingml/2006/main" xmlns:r="http://schemas.openxmlformats.org/officeDocument/2006/relationships" xmlns:p="http://schemas.openxmlformats.org/presentationml/2006/main">
+  <p:cSld>
+    <p:spTree>
+      <p:nvGrpSpPr>
+        <p:cNvPr id="1" name=""/>
+        <p:cNvGrpSpPr/>
+        <p:nvPr/>
+      </p:nvGrpSpPr>
+      <p:grpSpPr>
+        <a:xfrm>
+          <a:off x="0" y="0"/>
+          <a:ext cx="0" cy="0"/>
+          <a:chOff x="0" y="0"/>
+          <a:chExt cx="0" cy="0"/>
+        </a:xfrm>
+      </p:grpSpPr>
+      <p:sp>
+        <p:nvSpPr>
+          <p:cNvPr id="2" name="Образ слайда 1"/>
+          <p:cNvSpPr>
+            <a:spLocks noGrp="1" noRot="1" noChangeAspect="1"/>
+          </p:cNvSpPr>
+          <p:nvPr>
+            <p:ph type="sldImg"/>
+          </p:nvPr>
+        </p:nvSpPr>
+        <p:spPr>
+          <a:xfrm>
+            <a:off x="685800" y="1143000"/>
+            <a:ext cx="5486400" cy="3086100"/>
+          </a:xfrm>
+        </p:spPr>
+      </p:sp>
+      <p:sp>
+        <p:nvSpPr>
+          <p:cNvPr id="3" name="Заметки 2"/>
+          <p:cNvSpPr>
+            <a:spLocks noGrp="1"/>
+          </p:cNvSpPr>
+          <p:nvPr>
+            <p:ph type="body" idx="1"/>
+          </p:nvPr>
+        </p:nvSpPr>
+        <p:spPr/>
+        <p:txBody>
+          <a:bodyPr/>
+          <a:lstStyle/>
+          <a:p>
+            <a:endParaRPr lang="ru-RU"/>
+          </a:p>
+        </p:txBody>
+      </p:sp>
+      <p:sp>
+        <p:nvSpPr>
+          <p:cNvPr id="4" name="Номер слайда 3"/>
+          <p:cNvSpPr>
+            <a:spLocks noGrp="1"/>
+          </p:cNvSpPr>
+          <p:nvPr>
+            <p:ph type="sldNum" sz="quarter" idx="10"/>
+          </p:nvPr>
+        </p:nvSpPr>
+        <p:spPr/>
+        <p:txBody>
+          <a:bodyPr/>
+          <a:lstStyle/>
+          <a:p>
+            <a:fld id="{F0F4E2F1-1521-4C3A-A563-2F7D19AB6E0B}" type="slidenum">
+              <a:rPr lang="en-US" smtClean="0"/>
+              <a:pPr/>
+              <a:t>32</a:t>
+            </a:fld>
+            <a:endParaRPr lang="en-US"/>
+          </a:p>
+        </p:txBody>
+      </p:sp>
+    </p:spTree>
+    <p:extLst>
+      <p:ext uri="{BB962C8B-B14F-4D97-AF65-F5344CB8AC3E}">
+        <p14:creationId xmlns:p14="http://schemas.microsoft.com/office/powerpoint/2010/main" val="1227668206"/>
+      </p:ext>
+    </p:extLst>
+  </p:cSld>
+  <p:clrMapOvr>
+    <a:masterClrMapping/>
+  </p:clrMapOvr>
+</p:notes>
+</file>
+
+<file path=ppt/notesSlides/notesSlide33.xml><?xml version="1.0" encoding="utf-8"?>
+<p:notes xmlns:a="http://schemas.openxmlformats.org/drawingml/2006/main" xmlns:r="http://schemas.openxmlformats.org/officeDocument/2006/relationships" xmlns:p="http://schemas.openxmlformats.org/presentationml/2006/main">
+  <p:cSld>
+    <p:spTree>
+      <p:nvGrpSpPr>
+        <p:cNvPr id="1" name=""/>
+        <p:cNvGrpSpPr/>
+        <p:nvPr/>
+      </p:nvGrpSpPr>
+      <p:grpSpPr>
+        <a:xfrm>
+          <a:off x="0" y="0"/>
+          <a:ext cx="0" cy="0"/>
+          <a:chOff x="0" y="0"/>
+          <a:chExt cx="0" cy="0"/>
+        </a:xfrm>
+      </p:grpSpPr>
+      <p:sp>
+        <p:nvSpPr>
+          <p:cNvPr id="2" name="Образ слайда 1"/>
+          <p:cNvSpPr>
+            <a:spLocks noGrp="1" noRot="1" noChangeAspect="1"/>
+          </p:cNvSpPr>
+          <p:nvPr>
+            <p:ph type="sldImg"/>
+          </p:nvPr>
+        </p:nvSpPr>
+        <p:spPr>
+          <a:xfrm>
+            <a:off x="685800" y="1143000"/>
+            <a:ext cx="5486400" cy="3086100"/>
+          </a:xfrm>
+        </p:spPr>
+      </p:sp>
+      <p:sp>
+        <p:nvSpPr>
+          <p:cNvPr id="3" name="Заметки 2"/>
+          <p:cNvSpPr>
+            <a:spLocks noGrp="1"/>
+          </p:cNvSpPr>
+          <p:nvPr>
+            <p:ph type="body" idx="1"/>
+          </p:nvPr>
+        </p:nvSpPr>
+        <p:spPr/>
+        <p:txBody>
+          <a:bodyPr/>
+          <a:lstStyle/>
+          <a:p>
+            <a:endParaRPr lang="ru-RU"/>
+          </a:p>
+        </p:txBody>
+      </p:sp>
+      <p:sp>
+        <p:nvSpPr>
+          <p:cNvPr id="4" name="Номер слайда 3"/>
+          <p:cNvSpPr>
+            <a:spLocks noGrp="1"/>
+          </p:cNvSpPr>
+          <p:nvPr>
+            <p:ph type="sldNum" sz="quarter" idx="10"/>
+          </p:nvPr>
+        </p:nvSpPr>
+        <p:spPr/>
+        <p:txBody>
+          <a:bodyPr/>
+          <a:lstStyle/>
+          <a:p>
+            <a:fld id="{F0F4E2F1-1521-4C3A-A563-2F7D19AB6E0B}" type="slidenum">
+              <a:rPr lang="en-US" smtClean="0"/>
+              <a:pPr/>
+              <a:t>33</a:t>
+            </a:fld>
+            <a:endParaRPr lang="en-US"/>
+          </a:p>
+        </p:txBody>
+      </p:sp>
+    </p:spTree>
+    <p:extLst>
+      <p:ext uri="{BB962C8B-B14F-4D97-AF65-F5344CB8AC3E}">
+        <p14:creationId xmlns:p14="http://schemas.microsoft.com/office/powerpoint/2010/main" val="2305847252"/>
+      </p:ext>
+    </p:extLst>
+  </p:cSld>
+  <p:clrMapOvr>
+    <a:masterClrMapping/>
+  </p:clrMapOvr>
+</p:notes>
+</file>
+
+<file path=ppt/notesSlides/notesSlide34.xml><?xml version="1.0" encoding="utf-8"?>
+<p:notes xmlns:a="http://schemas.openxmlformats.org/drawingml/2006/main" xmlns:r="http://schemas.openxmlformats.org/officeDocument/2006/relationships" xmlns:p="http://schemas.openxmlformats.org/presentationml/2006/main">
+  <p:cSld>
+    <p:spTree>
+      <p:nvGrpSpPr>
+        <p:cNvPr id="1" name=""/>
+        <p:cNvGrpSpPr/>
+        <p:nvPr/>
+      </p:nvGrpSpPr>
+      <p:grpSpPr>
+        <a:xfrm>
+          <a:off x="0" y="0"/>
+          <a:ext cx="0" cy="0"/>
+          <a:chOff x="0" y="0"/>
+          <a:chExt cx="0" cy="0"/>
+        </a:xfrm>
+      </p:grpSpPr>
+      <p:sp>
+        <p:nvSpPr>
+          <p:cNvPr id="2" name="Образ слайда 1"/>
+          <p:cNvSpPr>
+            <a:spLocks noGrp="1" noRot="1" noChangeAspect="1"/>
+          </p:cNvSpPr>
+          <p:nvPr>
+            <p:ph type="sldImg"/>
+          </p:nvPr>
+        </p:nvSpPr>
+        <p:spPr>
+          <a:xfrm>
+            <a:off x="685800" y="1143000"/>
+            <a:ext cx="5486400" cy="3086100"/>
+          </a:xfrm>
+        </p:spPr>
+      </p:sp>
+      <p:sp>
+        <p:nvSpPr>
+          <p:cNvPr id="3" name="Заметки 2"/>
+          <p:cNvSpPr>
+            <a:spLocks noGrp="1"/>
+          </p:cNvSpPr>
+          <p:nvPr>
+            <p:ph type="body" idx="1"/>
+          </p:nvPr>
+        </p:nvSpPr>
+        <p:spPr/>
+        <p:txBody>
+          <a:bodyPr/>
+          <a:lstStyle/>
+          <a:p>
+            <a:endParaRPr lang="ru-RU" dirty="0"/>
+          </a:p>
+        </p:txBody>
+      </p:sp>
+      <p:sp>
+        <p:nvSpPr>
+          <p:cNvPr id="4" name="Номер слайда 3"/>
+          <p:cNvSpPr>
+            <a:spLocks noGrp="1"/>
+          </p:cNvSpPr>
+          <p:nvPr>
+            <p:ph type="sldNum" sz="quarter" idx="10"/>
+          </p:nvPr>
+        </p:nvSpPr>
+        <p:spPr/>
+        <p:txBody>
+          <a:bodyPr/>
+          <a:lstStyle/>
+          <a:p>
+            <a:fld id="{F0F4E2F1-1521-4C3A-A563-2F7D19AB6E0B}" type="slidenum">
+              <a:rPr lang="en-US" smtClean="0"/>
+              <a:pPr/>
+              <a:t>34</a:t>
+            </a:fld>
+            <a:endParaRPr lang="en-US"/>
+          </a:p>
+        </p:txBody>
+      </p:sp>
+    </p:spTree>
+    <p:extLst>
+      <p:ext uri="{BB962C8B-B14F-4D97-AF65-F5344CB8AC3E}">
+        <p14:creationId xmlns:p14="http://schemas.microsoft.com/office/powerpoint/2010/main" val="3181139981"/>
       </p:ext>
     </p:extLst>
   </p:cSld>
@@ -1258,7 +3533,7 @@
           <a:bodyPr/>
           <a:lstStyle/>
           <a:p>
-            <a:endParaRPr lang="ru-RU" dirty="0"/>
+            <a:endParaRPr lang="ru-RU"/>
           </a:p>
         </p:txBody>
       </p:sp>
@@ -1289,7 +3564,7 @@
     </p:spTree>
     <p:extLst>
       <p:ext uri="{BB962C8B-B14F-4D97-AF65-F5344CB8AC3E}">
-        <p14:creationId xmlns:p14="http://schemas.microsoft.com/office/powerpoint/2010/main" val="3181139981"/>
+        <p14:creationId xmlns:p14="http://schemas.microsoft.com/office/powerpoint/2010/main" val="1622891686"/>
       </p:ext>
     </p:extLst>
   </p:cSld>
@@ -1456,7 +3731,7 @@
           <p:cNvPr id="9" name="Номер слайда 3">
             <a:extLst>
               <a:ext uri="{FF2B5EF4-FFF2-40B4-BE49-F238E27FC236}">
-                <a16:creationId xmlns="" xmlns:a16="http://schemas.microsoft.com/office/drawing/2014/main" id="{3DF48714-7FE4-4364-BF9D-28B9C9E2979D}"/>
+                <a16:creationId xmlns:a16="http://schemas.microsoft.com/office/drawing/2014/main" id="{3DF48714-7FE4-4364-BF9D-28B9C9E2979D}"/>
               </a:ext>
             </a:extLst>
           </p:cNvPr>
@@ -1595,7 +3870,7 @@
           <p:cNvPr id="7" name="Номер слайда 3">
             <a:extLst>
               <a:ext uri="{FF2B5EF4-FFF2-40B4-BE49-F238E27FC236}">
-                <a16:creationId xmlns="" xmlns:a16="http://schemas.microsoft.com/office/drawing/2014/main" id="{3DF48714-7FE4-4364-BF9D-28B9C9E2979D}"/>
+                <a16:creationId xmlns:a16="http://schemas.microsoft.com/office/drawing/2014/main" id="{3DF48714-7FE4-4364-BF9D-28B9C9E2979D}"/>
               </a:ext>
             </a:extLst>
           </p:cNvPr>
@@ -1877,7 +4152,7 @@
           <p:cNvPr id="9" name="Номер слайда 3">
             <a:extLst>
               <a:ext uri="{FF2B5EF4-FFF2-40B4-BE49-F238E27FC236}">
-                <a16:creationId xmlns="" xmlns:a16="http://schemas.microsoft.com/office/drawing/2014/main" id="{3DF48714-7FE4-4364-BF9D-28B9C9E2979D}"/>
+                <a16:creationId xmlns:a16="http://schemas.microsoft.com/office/drawing/2014/main" id="{3DF48714-7FE4-4364-BF9D-28B9C9E2979D}"/>
               </a:ext>
             </a:extLst>
           </p:cNvPr>
@@ -2314,7 +4589,7 @@
           <p:cNvPr id="17" name="Заголовок 16">
             <a:extLst>
               <a:ext uri="{FF2B5EF4-FFF2-40B4-BE49-F238E27FC236}">
-                <a16:creationId xmlns="" xmlns:a16="http://schemas.microsoft.com/office/drawing/2014/main" id="{D630362D-1F09-46B4-9DE4-AEA483AC82FD}"/>
+                <a16:creationId xmlns:a16="http://schemas.microsoft.com/office/drawing/2014/main" id="{D630362D-1F09-46B4-9DE4-AEA483AC82FD}"/>
               </a:ext>
             </a:extLst>
           </p:cNvPr>
@@ -2547,7 +4822,7 @@
           <p:cNvPr id="12" name="TextBox 11">
             <a:extLst>
               <a:ext uri="{FF2B5EF4-FFF2-40B4-BE49-F238E27FC236}">
-                <a16:creationId xmlns="" xmlns:a16="http://schemas.microsoft.com/office/drawing/2014/main" id="{F7B00361-5492-4290-B470-295172C16526}"/>
+                <a16:creationId xmlns:a16="http://schemas.microsoft.com/office/drawing/2014/main" id="{F7B00361-5492-4290-B470-295172C16526}"/>
               </a:ext>
             </a:extLst>
           </p:cNvPr>
@@ -2907,7 +5182,592 @@
 </p:sld>
 </file>
 
-<file path=ppt/slides/slide2.xml><?xml version="1.0" encoding="utf-8"?>
+<file path=ppt/slides/slide10.xml><?xml version="1.0" encoding="utf-8"?>
+<p:sld xmlns:a="http://schemas.openxmlformats.org/drawingml/2006/main" xmlns:r="http://schemas.openxmlformats.org/officeDocument/2006/relationships" xmlns:p="http://schemas.openxmlformats.org/presentationml/2006/main">
+  <p:cSld>
+    <p:spTree>
+      <p:nvGrpSpPr>
+        <p:cNvPr id="1" name=""/>
+        <p:cNvGrpSpPr/>
+        <p:nvPr/>
+      </p:nvGrpSpPr>
+      <p:grpSpPr>
+        <a:xfrm>
+          <a:off x="0" y="0"/>
+          <a:ext cx="0" cy="0"/>
+          <a:chOff x="0" y="0"/>
+          <a:chExt cx="0" cy="0"/>
+        </a:xfrm>
+      </p:grpSpPr>
+      <p:sp>
+        <p:nvSpPr>
+          <p:cNvPr id="7" name="Прямоугольник 6"/>
+          <p:cNvSpPr/>
+          <p:nvPr/>
+        </p:nvSpPr>
+        <p:spPr>
+          <a:xfrm>
+            <a:off x="0" y="0"/>
+            <a:ext cx="12192000" cy="4461671"/>
+          </a:xfrm>
+          <a:prstGeom prst="rect">
+            <a:avLst/>
+          </a:prstGeom>
+        </p:spPr>
+        <p:txBody>
+          <a:bodyPr wrap="square" lIns="360000" rIns="360000">
+            <a:spAutoFit/>
+          </a:bodyPr>
+          <a:lstStyle/>
+          <a:p>
+            <a:pPr>
+              <a:lnSpc>
+                <a:spcPct val="150000"/>
+              </a:lnSpc>
+            </a:pPr>
+            <a:r>
+              <a:rPr lang="ru-RU" sz="2400" b="1" dirty="0"/>
+              <a:t>Слой </a:t>
+            </a:r>
+            <a:r>
+              <a:rPr lang="ru-RU" sz="2400" b="1" dirty="0" err="1"/>
+              <a:t>Application</a:t>
+            </a:r>
+            <a:r>
+              <a:rPr lang="ru-RU" sz="2400" b="1" dirty="0"/>
+              <a:t> — Сценарии (</a:t>
+            </a:r>
+            <a:r>
+              <a:rPr lang="ru-RU" sz="2400" b="1" dirty="0" err="1"/>
+              <a:t>Use</a:t>
+            </a:r>
+            <a:r>
+              <a:rPr lang="ru-RU" sz="2400" b="1" dirty="0"/>
+              <a:t> </a:t>
+            </a:r>
+            <a:r>
+              <a:rPr lang="ru-RU" sz="2400" b="1" dirty="0" err="1"/>
+              <a:t>Cases</a:t>
+            </a:r>
+            <a:r>
+              <a:rPr lang="ru-RU" sz="2400" b="1" dirty="0"/>
+              <a:t>)</a:t>
+            </a:r>
+          </a:p>
+          <a:p>
+            <a:pPr>
+              <a:lnSpc>
+                <a:spcPct val="150000"/>
+              </a:lnSpc>
+            </a:pPr>
+            <a:r>
+              <a:rPr lang="ru-RU" sz="2400" dirty="0"/>
+              <a:t>Этот слой координирует работу сущностей для выполнения конкретных задач пользователя.</a:t>
+            </a:r>
+          </a:p>
+          <a:p>
+            <a:pPr>
+              <a:lnSpc>
+                <a:spcPct val="150000"/>
+              </a:lnSpc>
+            </a:pPr>
+            <a:r>
+              <a:rPr lang="ru-RU" sz="2400" b="1" dirty="0"/>
+              <a:t>Что внутри:</a:t>
+            </a:r>
+            <a:r>
+              <a:rPr lang="ru-RU" sz="2400" dirty="0"/>
+              <a:t> Реализация сервисов (например, </a:t>
+            </a:r>
+            <a:r>
+              <a:rPr lang="ru-RU" sz="2400" dirty="0" err="1"/>
+              <a:t>NotesService</a:t>
+            </a:r>
+            <a:r>
+              <a:rPr lang="ru-RU" sz="2400" dirty="0"/>
+              <a:t>).</a:t>
+            </a:r>
+          </a:p>
+          <a:p>
+            <a:pPr>
+              <a:lnSpc>
+                <a:spcPct val="150000"/>
+              </a:lnSpc>
+            </a:pPr>
+            <a:r>
+              <a:rPr lang="ru-RU" sz="2400" b="1" dirty="0"/>
+              <a:t>Зависимости:</a:t>
+            </a:r>
+            <a:r>
+              <a:rPr lang="ru-RU" sz="2400" dirty="0"/>
+              <a:t> Зависит </a:t>
+            </a:r>
+            <a:r>
+              <a:rPr lang="ru-RU" sz="2400" b="1" dirty="0"/>
+              <a:t>только от </a:t>
+            </a:r>
+            <a:r>
+              <a:rPr lang="ru-RU" sz="2400" b="1" dirty="0" err="1"/>
+              <a:t>Domain</a:t>
+            </a:r>
+            <a:r>
+              <a:rPr lang="ru-RU" sz="2400" dirty="0"/>
+              <a:t>.</a:t>
+            </a:r>
+          </a:p>
+          <a:p>
+            <a:pPr>
+              <a:lnSpc>
+                <a:spcPct val="150000"/>
+              </a:lnSpc>
+            </a:pPr>
+            <a:r>
+              <a:rPr lang="ru-RU" sz="2400" b="1" dirty="0"/>
+              <a:t>Механика:</a:t>
+            </a:r>
+            <a:r>
+              <a:rPr lang="ru-RU" sz="2400" dirty="0"/>
+              <a:t> Здесь мы активно используем </a:t>
+            </a:r>
+            <a:r>
+              <a:rPr lang="ru-RU" sz="2400" b="1" dirty="0" err="1"/>
+              <a:t>Dependency</a:t>
+            </a:r>
+            <a:r>
+              <a:rPr lang="ru-RU" sz="2400" b="1" dirty="0"/>
+              <a:t> </a:t>
+            </a:r>
+            <a:r>
+              <a:rPr lang="ru-RU" sz="2400" b="1" dirty="0" err="1"/>
+              <a:t>Injection</a:t>
+            </a:r>
+            <a:r>
+              <a:rPr lang="ru-RU" sz="2400" dirty="0"/>
+              <a:t>. Например, сервис просит </a:t>
+            </a:r>
+            <a:r>
+              <a:rPr lang="ru-RU" sz="2400" dirty="0" err="1"/>
+              <a:t>INotesRepository</a:t>
+            </a:r>
+            <a:r>
+              <a:rPr lang="ru-RU" sz="2400" dirty="0"/>
+              <a:t> (интерфейс из </a:t>
+            </a:r>
+            <a:r>
+              <a:rPr lang="ru-RU" sz="2400" dirty="0" err="1"/>
+              <a:t>Domain</a:t>
+            </a:r>
+            <a:r>
+              <a:rPr lang="ru-RU" sz="2400" dirty="0"/>
+              <a:t>), но не знает, какая именно база данных под ним лежит.</a:t>
+            </a:r>
+          </a:p>
+        </p:txBody>
+      </p:sp>
+    </p:spTree>
+    <p:extLst>
+      <p:ext uri="{BB962C8B-B14F-4D97-AF65-F5344CB8AC3E}">
+        <p14:creationId xmlns:p14="http://schemas.microsoft.com/office/powerpoint/2010/main" val="3517687352"/>
+      </p:ext>
+    </p:extLst>
+  </p:cSld>
+  <p:clrMapOvr>
+    <a:masterClrMapping/>
+  </p:clrMapOvr>
+  <p:timing>
+    <p:tnLst>
+      <p:par>
+        <p:cTn id="1" dur="indefinite" restart="never" nodeType="tmRoot"/>
+      </p:par>
+    </p:tnLst>
+  </p:timing>
+</p:sld>
+</file>
+
+<file path=ppt/slides/slide11.xml><?xml version="1.0" encoding="utf-8"?>
+<p:sld xmlns:a="http://schemas.openxmlformats.org/drawingml/2006/main" xmlns:r="http://schemas.openxmlformats.org/officeDocument/2006/relationships" xmlns:p="http://schemas.openxmlformats.org/presentationml/2006/main">
+  <p:cSld>
+    <p:spTree>
+      <p:nvGrpSpPr>
+        <p:cNvPr id="1" name=""/>
+        <p:cNvGrpSpPr/>
+        <p:nvPr/>
+      </p:nvGrpSpPr>
+      <p:grpSpPr>
+        <a:xfrm>
+          <a:off x="0" y="0"/>
+          <a:ext cx="0" cy="0"/>
+          <a:chOff x="0" y="0"/>
+          <a:chExt cx="0" cy="0"/>
+        </a:xfrm>
+      </p:grpSpPr>
+      <p:sp>
+        <p:nvSpPr>
+          <p:cNvPr id="7" name="Прямоугольник 6"/>
+          <p:cNvSpPr/>
+          <p:nvPr/>
+        </p:nvSpPr>
+        <p:spPr>
+          <a:xfrm>
+            <a:off x="0" y="0"/>
+            <a:ext cx="12192000" cy="6123664"/>
+          </a:xfrm>
+          <a:prstGeom prst="rect">
+            <a:avLst/>
+          </a:prstGeom>
+        </p:spPr>
+        <p:txBody>
+          <a:bodyPr wrap="square" lIns="360000" rIns="360000">
+            <a:spAutoFit/>
+          </a:bodyPr>
+          <a:lstStyle/>
+          <a:p>
+            <a:pPr>
+              <a:lnSpc>
+                <a:spcPct val="150000"/>
+              </a:lnSpc>
+            </a:pPr>
+            <a:r>
+              <a:rPr lang="ru-RU" sz="2400" b="1" dirty="0"/>
+              <a:t>Слой </a:t>
+            </a:r>
+            <a:r>
+              <a:rPr lang="ru-RU" sz="2400" b="1" dirty="0" err="1"/>
+              <a:t>Infrastructure</a:t>
+            </a:r>
+            <a:r>
+              <a:rPr lang="ru-RU" sz="2400" b="1" dirty="0"/>
+              <a:t> — Технические детали</a:t>
+            </a:r>
+          </a:p>
+          <a:p>
+            <a:pPr>
+              <a:lnSpc>
+                <a:spcPct val="150000"/>
+              </a:lnSpc>
+            </a:pPr>
+            <a:r>
+              <a:rPr lang="ru-RU" sz="2400" dirty="0"/>
+              <a:t>Слой, где «чистая» логика встречается с «грязной» реальностью (дисками, сетями, базами).</a:t>
+            </a:r>
+          </a:p>
+          <a:p>
+            <a:pPr>
+              <a:lnSpc>
+                <a:spcPct val="150000"/>
+              </a:lnSpc>
+            </a:pPr>
+            <a:r>
+              <a:rPr lang="ru-RU" sz="2400" b="1" dirty="0" err="1"/>
+              <a:t>Persistence</a:t>
+            </a:r>
+            <a:r>
+              <a:rPr lang="ru-RU" sz="2400" b="1" dirty="0"/>
+              <a:t> (Постоянство):</a:t>
+            </a:r>
+            <a:r>
+              <a:rPr lang="ru-RU" sz="2400" dirty="0"/>
+              <a:t> Подслой для работы с БД через EF </a:t>
+            </a:r>
+            <a:r>
+              <a:rPr lang="ru-RU" sz="2400" dirty="0" err="1"/>
+              <a:t>Core</a:t>
+            </a:r>
+            <a:r>
+              <a:rPr lang="ru-RU" sz="2400" dirty="0"/>
+              <a:t>. Здесь лежат миграции, контекст данных и реализация </a:t>
+            </a:r>
+            <a:r>
+              <a:rPr lang="ru-RU" sz="2400" dirty="0" err="1"/>
+              <a:t>репозиториев</a:t>
+            </a:r>
+            <a:r>
+              <a:rPr lang="ru-RU" sz="2400" dirty="0"/>
+              <a:t>.</a:t>
+            </a:r>
+          </a:p>
+          <a:p>
+            <a:pPr>
+              <a:lnSpc>
+                <a:spcPct val="150000"/>
+              </a:lnSpc>
+            </a:pPr>
+            <a:r>
+              <a:rPr lang="ru-RU" sz="2400" b="1" dirty="0"/>
+              <a:t>Другие службы:</a:t>
+            </a:r>
+            <a:r>
+              <a:rPr lang="ru-RU" sz="2400" dirty="0"/>
+              <a:t> Интеграция с </a:t>
+            </a:r>
+            <a:r>
+              <a:rPr lang="ru-RU" sz="2400" dirty="0" err="1"/>
+              <a:t>Redis</a:t>
+            </a:r>
+            <a:r>
+              <a:rPr lang="ru-RU" sz="2400" dirty="0"/>
+              <a:t> (кэш), </a:t>
+            </a:r>
+            <a:r>
+              <a:rPr lang="ru-RU" sz="2400" dirty="0" err="1"/>
+              <a:t>RabbitMQ</a:t>
+            </a:r>
+            <a:r>
+              <a:rPr lang="ru-RU" sz="2400" dirty="0"/>
+              <a:t> (сообщения) или почтовыми сервисами.</a:t>
+            </a:r>
+          </a:p>
+          <a:p>
+            <a:pPr>
+              <a:lnSpc>
+                <a:spcPct val="150000"/>
+              </a:lnSpc>
+            </a:pPr>
+            <a:r>
+              <a:rPr lang="ru-RU" sz="2400" b="1" dirty="0"/>
+              <a:t>Зависимости:</a:t>
+            </a:r>
+            <a:r>
+              <a:rPr lang="ru-RU" sz="2400" dirty="0"/>
+              <a:t> Зависит от </a:t>
+            </a:r>
+            <a:r>
+              <a:rPr lang="ru-RU" sz="2400" b="1" dirty="0" err="1"/>
+              <a:t>Domain</a:t>
+            </a:r>
+            <a:r>
+              <a:rPr lang="ru-RU" sz="2400" dirty="0"/>
+              <a:t> и </a:t>
+            </a:r>
+            <a:r>
+              <a:rPr lang="ru-RU" sz="2400" b="1" dirty="0" err="1"/>
+              <a:t>Application</a:t>
+            </a:r>
+            <a:r>
+              <a:rPr lang="ru-RU" sz="2400" dirty="0" smtClean="0"/>
+              <a:t>.</a:t>
+            </a:r>
+          </a:p>
+          <a:p>
+            <a:pPr>
+              <a:lnSpc>
+                <a:spcPct val="150000"/>
+              </a:lnSpc>
+            </a:pPr>
+            <a:endParaRPr lang="ru-RU" sz="2400" dirty="0"/>
+          </a:p>
+          <a:p>
+            <a:pPr>
+              <a:lnSpc>
+                <a:spcPct val="150000"/>
+              </a:lnSpc>
+            </a:pPr>
+            <a:r>
+              <a:rPr lang="ru-RU" sz="2400" b="1" dirty="0"/>
+              <a:t>Понятие:</a:t>
+            </a:r>
+            <a:r>
+              <a:rPr lang="ru-RU" sz="2400" dirty="0"/>
+              <a:t> </a:t>
+            </a:r>
+            <a:r>
+              <a:rPr lang="ru-RU" sz="2400" dirty="0" err="1"/>
+              <a:t>Персистентность</a:t>
+            </a:r>
+            <a:r>
+              <a:rPr lang="ru-RU" sz="2400" dirty="0"/>
+              <a:t> — это способность данных сохраняться между запусками программы.</a:t>
+            </a:r>
+          </a:p>
+        </p:txBody>
+      </p:sp>
+    </p:spTree>
+    <p:extLst>
+      <p:ext uri="{BB962C8B-B14F-4D97-AF65-F5344CB8AC3E}">
+        <p14:creationId xmlns:p14="http://schemas.microsoft.com/office/powerpoint/2010/main" val="549352214"/>
+      </p:ext>
+    </p:extLst>
+  </p:cSld>
+  <p:clrMapOvr>
+    <a:masterClrMapping/>
+  </p:clrMapOvr>
+  <p:timing>
+    <p:tnLst>
+      <p:par>
+        <p:cTn id="1" dur="indefinite" restart="never" nodeType="tmRoot"/>
+      </p:par>
+    </p:tnLst>
+  </p:timing>
+</p:sld>
+</file>
+
+<file path=ppt/slides/slide12.xml><?xml version="1.0" encoding="utf-8"?>
+<p:sld xmlns:a="http://schemas.openxmlformats.org/drawingml/2006/main" xmlns:r="http://schemas.openxmlformats.org/officeDocument/2006/relationships" xmlns:p="http://schemas.openxmlformats.org/presentationml/2006/main">
+  <p:cSld>
+    <p:spTree>
+      <p:nvGrpSpPr>
+        <p:cNvPr id="1" name=""/>
+        <p:cNvGrpSpPr/>
+        <p:nvPr/>
+      </p:nvGrpSpPr>
+      <p:grpSpPr>
+        <a:xfrm>
+          <a:off x="0" y="0"/>
+          <a:ext cx="0" cy="0"/>
+          <a:chOff x="0" y="0"/>
+          <a:chExt cx="0" cy="0"/>
+        </a:xfrm>
+      </p:grpSpPr>
+      <p:sp>
+        <p:nvSpPr>
+          <p:cNvPr id="7" name="Прямоугольник 6"/>
+          <p:cNvSpPr/>
+          <p:nvPr/>
+        </p:nvSpPr>
+        <p:spPr>
+          <a:xfrm>
+            <a:off x="0" y="0"/>
+            <a:ext cx="12192000" cy="4461671"/>
+          </a:xfrm>
+          <a:prstGeom prst="rect">
+            <a:avLst/>
+          </a:prstGeom>
+        </p:spPr>
+        <p:txBody>
+          <a:bodyPr wrap="square" lIns="360000" rIns="360000">
+            <a:spAutoFit/>
+          </a:bodyPr>
+          <a:lstStyle/>
+          <a:p>
+            <a:pPr>
+              <a:lnSpc>
+                <a:spcPct val="150000"/>
+              </a:lnSpc>
+            </a:pPr>
+            <a:r>
+              <a:rPr lang="ru-RU" sz="2400" b="1" dirty="0"/>
+              <a:t>Слой </a:t>
+            </a:r>
+            <a:r>
+              <a:rPr lang="ru-RU" sz="2400" b="1" dirty="0" err="1"/>
+              <a:t>Web</a:t>
+            </a:r>
+            <a:r>
+              <a:rPr lang="ru-RU" sz="2400" b="1" dirty="0"/>
+              <a:t> API — Внешний интерфейс</a:t>
+            </a:r>
+          </a:p>
+          <a:p>
+            <a:pPr>
+              <a:lnSpc>
+                <a:spcPct val="150000"/>
+              </a:lnSpc>
+            </a:pPr>
+            <a:r>
+              <a:rPr lang="ru-RU" sz="2400" dirty="0"/>
+              <a:t>Верхний слой «луковицы», точка контакта с пользователем или </a:t>
+            </a:r>
+            <a:r>
+              <a:rPr lang="ru-RU" sz="2400" dirty="0" err="1"/>
+              <a:t>фронтендом</a:t>
+            </a:r>
+            <a:r>
+              <a:rPr lang="ru-RU" sz="2400" dirty="0"/>
+              <a:t>.</a:t>
+            </a:r>
+          </a:p>
+          <a:p>
+            <a:pPr>
+              <a:lnSpc>
+                <a:spcPct val="150000"/>
+              </a:lnSpc>
+            </a:pPr>
+            <a:r>
+              <a:rPr lang="ru-RU" sz="2400" b="1" dirty="0"/>
+              <a:t>Что внутри:</a:t>
+            </a:r>
+            <a:r>
+              <a:rPr lang="ru-RU" sz="2400" dirty="0"/>
+              <a:t> Контроллеры.</a:t>
+            </a:r>
+          </a:p>
+          <a:p>
+            <a:pPr>
+              <a:lnSpc>
+                <a:spcPct val="150000"/>
+              </a:lnSpc>
+            </a:pPr>
+            <a:r>
+              <a:rPr lang="ru-RU" sz="2400" b="1" dirty="0"/>
+              <a:t>Задача:</a:t>
+            </a:r>
+            <a:r>
+              <a:rPr lang="ru-RU" sz="2400" dirty="0"/>
+              <a:t> Максимально простая — принять HTTP-запрос, перевести его на язык объектов и отдать в слой </a:t>
+            </a:r>
+            <a:r>
+              <a:rPr lang="ru-RU" sz="2400" b="1" dirty="0" err="1"/>
+              <a:t>Application</a:t>
+            </a:r>
+            <a:r>
+              <a:rPr lang="ru-RU" sz="2400" dirty="0"/>
+              <a:t>.</a:t>
+            </a:r>
+          </a:p>
+          <a:p>
+            <a:pPr>
+              <a:lnSpc>
+                <a:spcPct val="150000"/>
+              </a:lnSpc>
+            </a:pPr>
+            <a:r>
+              <a:rPr lang="ru-RU" sz="2400" b="1" dirty="0"/>
+              <a:t>Тонкие контроллеры:</a:t>
+            </a:r>
+            <a:r>
+              <a:rPr lang="ru-RU" sz="2400" dirty="0"/>
+              <a:t> В API не должно быть никакой логики, кроме маршрутизации и возврата статус-кодов (200 OK, 404 </a:t>
+            </a:r>
+            <a:r>
+              <a:rPr lang="ru-RU" sz="2400" dirty="0" err="1"/>
+              <a:t>Not</a:t>
+            </a:r>
+            <a:r>
+              <a:rPr lang="ru-RU" sz="2400" dirty="0"/>
+              <a:t> </a:t>
+            </a:r>
+            <a:r>
+              <a:rPr lang="ru-RU" sz="2400" dirty="0" err="1"/>
+              <a:t>Found</a:t>
+            </a:r>
+            <a:r>
+              <a:rPr lang="ru-RU" sz="2400" dirty="0"/>
+              <a:t>).</a:t>
+            </a:r>
+          </a:p>
+        </p:txBody>
+      </p:sp>
+    </p:spTree>
+    <p:extLst>
+      <p:ext uri="{BB962C8B-B14F-4D97-AF65-F5344CB8AC3E}">
+        <p14:creationId xmlns:p14="http://schemas.microsoft.com/office/powerpoint/2010/main" val="1422973246"/>
+      </p:ext>
+    </p:extLst>
+  </p:cSld>
+  <p:clrMapOvr>
+    <a:masterClrMapping/>
+  </p:clrMapOvr>
+  <p:timing>
+    <p:tnLst>
+      <p:par>
+        <p:cTn id="1" dur="indefinite" restart="never" nodeType="tmRoot"/>
+      </p:par>
+    </p:tnLst>
+  </p:timing>
+</p:sld>
+</file>
+
+<file path=ppt/slides/slide13.xml><?xml version="1.0" encoding="utf-8"?>
 <p:sld xmlns:a="http://schemas.openxmlformats.org/drawingml/2006/main" xmlns:r="http://schemas.openxmlformats.org/officeDocument/2006/relationships" xmlns:p="http://schemas.openxmlformats.org/presentationml/2006/main">
   <p:cSld>
     <p:spTree>
@@ -2982,7 +5842,7 @@
                 <a:latin typeface="Bookman Old Style" panose="02050604050505020204" pitchFamily="18" charset="0"/>
                 <a:cs typeface="Times New Roman" panose="02020603050405020304" pitchFamily="18" charset="0"/>
               </a:rPr>
-              <a:t>Философия Чистой архитектуры</a:t>
+              <a:t>Разделение моделей</a:t>
             </a:r>
             <a:endParaRPr lang="ru-RU" sz="2800" b="1" dirty="0">
               <a:solidFill>
@@ -2993,6 +5853,2612 @@
               <a:latin typeface="Bookman Old Style" panose="02050604050505020204" pitchFamily="18" charset="0"/>
               <a:cs typeface="Times New Roman" panose="02020603050405020304" pitchFamily="18" charset="0"/>
             </a:endParaRPr>
+          </a:p>
+        </p:txBody>
+      </p:sp>
+      <p:sp>
+        <p:nvSpPr>
+          <p:cNvPr id="7" name="Прямоугольник 6"/>
+          <p:cNvSpPr/>
+          <p:nvPr/>
+        </p:nvSpPr>
+        <p:spPr>
+          <a:xfrm>
+            <a:off x="0" y="654357"/>
+            <a:ext cx="12192000" cy="5015668"/>
+          </a:xfrm>
+          <a:prstGeom prst="rect">
+            <a:avLst/>
+          </a:prstGeom>
+        </p:spPr>
+        <p:txBody>
+          <a:bodyPr wrap="square" lIns="360000" rIns="360000">
+            <a:spAutoFit/>
+          </a:bodyPr>
+          <a:lstStyle/>
+          <a:p>
+            <a:pPr>
+              <a:lnSpc>
+                <a:spcPct val="150000"/>
+              </a:lnSpc>
+            </a:pPr>
+            <a:r>
+              <a:rPr lang="ru-RU" sz="2400" dirty="0"/>
+              <a:t>В профессиональной разработке запрещено использовать один и тот же класс для базы данных, бизнес-логики и передачи данных по сети. Мы разделяем их на 3 вида:</a:t>
+            </a:r>
+          </a:p>
+          <a:p>
+            <a:pPr>
+              <a:lnSpc>
+                <a:spcPct val="150000"/>
+              </a:lnSpc>
+            </a:pPr>
+            <a:r>
+              <a:rPr lang="ru-RU" sz="2400" b="1" dirty="0" err="1"/>
+              <a:t>Domain</a:t>
+            </a:r>
+            <a:r>
+              <a:rPr lang="ru-RU" sz="2400" b="1" dirty="0"/>
+              <a:t> </a:t>
+            </a:r>
+            <a:r>
+              <a:rPr lang="ru-RU" sz="2400" b="1" dirty="0" err="1"/>
+              <a:t>Model</a:t>
+            </a:r>
+            <a:r>
+              <a:rPr lang="ru-RU" sz="2400" b="1" dirty="0"/>
+              <a:t> (Доменная модель):</a:t>
+            </a:r>
+            <a:r>
+              <a:rPr lang="ru-RU" sz="2400" dirty="0"/>
+              <a:t> Ядро бизнеса.</a:t>
+            </a:r>
+          </a:p>
+          <a:p>
+            <a:pPr>
+              <a:lnSpc>
+                <a:spcPct val="150000"/>
+              </a:lnSpc>
+            </a:pPr>
+            <a:r>
+              <a:rPr lang="ru-RU" sz="2400" b="1" dirty="0" err="1"/>
+              <a:t>Entity</a:t>
+            </a:r>
+            <a:r>
+              <a:rPr lang="ru-RU" sz="2400" b="1" dirty="0"/>
+              <a:t> (Сущность):</a:t>
+            </a:r>
+            <a:r>
+              <a:rPr lang="ru-RU" sz="2400" dirty="0"/>
+              <a:t> Отображение на базу данных.</a:t>
+            </a:r>
+          </a:p>
+          <a:p>
+            <a:pPr>
+              <a:lnSpc>
+                <a:spcPct val="150000"/>
+              </a:lnSpc>
+            </a:pPr>
+            <a:r>
+              <a:rPr lang="ru-RU" sz="2400" b="1" dirty="0"/>
+              <a:t>DTO (</a:t>
+            </a:r>
+            <a:r>
+              <a:rPr lang="ru-RU" sz="2400" b="1" dirty="0" err="1"/>
+              <a:t>Data</a:t>
+            </a:r>
+            <a:r>
+              <a:rPr lang="ru-RU" sz="2400" b="1" dirty="0"/>
+              <a:t> </a:t>
+            </a:r>
+            <a:r>
+              <a:rPr lang="ru-RU" sz="2400" b="1" dirty="0" err="1"/>
+              <a:t>Transfer</a:t>
+            </a:r>
+            <a:r>
+              <a:rPr lang="ru-RU" sz="2400" b="1" dirty="0"/>
+              <a:t> </a:t>
+            </a:r>
+            <a:r>
+              <a:rPr lang="ru-RU" sz="2400" b="1" dirty="0" err="1"/>
+              <a:t>Object</a:t>
+            </a:r>
+            <a:r>
+              <a:rPr lang="ru-RU" sz="2400" b="1" dirty="0"/>
+              <a:t>):</a:t>
+            </a:r>
+            <a:r>
+              <a:rPr lang="ru-RU" sz="2400" dirty="0"/>
+              <a:t> Объект для передачи данных</a:t>
+            </a:r>
+            <a:r>
+              <a:rPr lang="ru-RU" sz="2400" dirty="0" smtClean="0"/>
+              <a:t>.</a:t>
+            </a:r>
+            <a:endParaRPr lang="en-US" sz="2400" dirty="0" smtClean="0"/>
+          </a:p>
+          <a:p>
+            <a:pPr>
+              <a:lnSpc>
+                <a:spcPct val="150000"/>
+              </a:lnSpc>
+            </a:pPr>
+            <a:endParaRPr lang="en-US" sz="2400" dirty="0"/>
+          </a:p>
+          <a:p>
+            <a:pPr>
+              <a:lnSpc>
+                <a:spcPct val="150000"/>
+              </a:lnSpc>
+            </a:pPr>
+            <a:r>
+              <a:rPr lang="ru-RU" sz="2400" b="1" dirty="0"/>
+              <a:t>Замечание:</a:t>
+            </a:r>
+            <a:r>
+              <a:rPr lang="ru-RU" sz="2400" dirty="0"/>
+              <a:t> В очень маленьких учебных проектах </a:t>
+            </a:r>
+            <a:r>
+              <a:rPr lang="ru-RU" sz="2400" dirty="0" err="1"/>
+              <a:t>Domain</a:t>
+            </a:r>
+            <a:r>
+              <a:rPr lang="ru-RU" sz="2400" dirty="0"/>
+              <a:t> и </a:t>
+            </a:r>
+            <a:r>
+              <a:rPr lang="ru-RU" sz="2400" dirty="0" err="1"/>
+              <a:t>Entity</a:t>
+            </a:r>
+            <a:r>
+              <a:rPr lang="ru-RU" sz="2400" dirty="0"/>
+              <a:t> часто объединяют, но на уровне «</a:t>
+            </a:r>
+            <a:r>
+              <a:rPr lang="ru-RU" sz="2400" dirty="0" err="1"/>
+              <a:t>Мидла</a:t>
+            </a:r>
+            <a:r>
+              <a:rPr lang="ru-RU" sz="2400" dirty="0"/>
+              <a:t>» и выше — это разные сущности.</a:t>
+            </a:r>
+          </a:p>
+        </p:txBody>
+      </p:sp>
+      <p:pic>
+        <p:nvPicPr>
+          <p:cNvPr id="4" name="Рисунок 3"/>
+          <p:cNvPicPr>
+            <a:picLocks noChangeAspect="1"/>
+          </p:cNvPicPr>
+          <p:nvPr/>
+        </p:nvPicPr>
+        <p:blipFill>
+          <a:blip r:embed="rId3" cstate="print">
+            <a:extLst>
+              <a:ext uri="{28A0092B-C50C-407E-A947-70E740481C1C}">
+                <a14:useLocalDpi xmlns:a14="http://schemas.microsoft.com/office/drawing/2010/main" val="0"/>
+              </a:ext>
+            </a:extLst>
+          </a:blip>
+          <a:stretch>
+            <a:fillRect/>
+          </a:stretch>
+        </p:blipFill>
+        <p:spPr>
+          <a:xfrm>
+            <a:off x="9122383" y="1780777"/>
+            <a:ext cx="2869921" cy="1865449"/>
+          </a:xfrm>
+          <a:prstGeom prst="rect">
+            <a:avLst/>
+          </a:prstGeom>
+        </p:spPr>
+      </p:pic>
+    </p:spTree>
+    <p:extLst>
+      <p:ext uri="{BB962C8B-B14F-4D97-AF65-F5344CB8AC3E}">
+        <p14:creationId xmlns:p14="http://schemas.microsoft.com/office/powerpoint/2010/main" val="695974139"/>
+      </p:ext>
+    </p:extLst>
+  </p:cSld>
+  <p:clrMapOvr>
+    <a:masterClrMapping/>
+  </p:clrMapOvr>
+  <p:timing>
+    <p:tnLst>
+      <p:par>
+        <p:cTn id="1" dur="indefinite" restart="never" nodeType="tmRoot"/>
+      </p:par>
+    </p:tnLst>
+  </p:timing>
+</p:sld>
+</file>
+
+<file path=ppt/slides/slide14.xml><?xml version="1.0" encoding="utf-8"?>
+<p:sld xmlns:a="http://schemas.openxmlformats.org/drawingml/2006/main" xmlns:r="http://schemas.openxmlformats.org/officeDocument/2006/relationships" xmlns:p="http://schemas.openxmlformats.org/presentationml/2006/main">
+  <p:cSld>
+    <p:spTree>
+      <p:nvGrpSpPr>
+        <p:cNvPr id="1" name=""/>
+        <p:cNvGrpSpPr/>
+        <p:nvPr/>
+      </p:nvGrpSpPr>
+      <p:grpSpPr>
+        <a:xfrm>
+          <a:off x="0" y="0"/>
+          <a:ext cx="0" cy="0"/>
+          <a:chOff x="0" y="0"/>
+          <a:chExt cx="0" cy="0"/>
+        </a:xfrm>
+      </p:grpSpPr>
+      <p:sp>
+        <p:nvSpPr>
+          <p:cNvPr id="7" name="Прямоугольник 6"/>
+          <p:cNvSpPr/>
+          <p:nvPr/>
+        </p:nvSpPr>
+        <p:spPr>
+          <a:xfrm>
+            <a:off x="0" y="0"/>
+            <a:ext cx="12192000" cy="5569666"/>
+          </a:xfrm>
+          <a:prstGeom prst="rect">
+            <a:avLst/>
+          </a:prstGeom>
+        </p:spPr>
+        <p:txBody>
+          <a:bodyPr wrap="square" lIns="360000" rIns="360000">
+            <a:spAutoFit/>
+          </a:bodyPr>
+          <a:lstStyle/>
+          <a:p>
+            <a:pPr>
+              <a:lnSpc>
+                <a:spcPct val="150000"/>
+              </a:lnSpc>
+            </a:pPr>
+            <a:r>
+              <a:rPr lang="ru-RU" sz="2400" b="1" dirty="0" err="1"/>
+              <a:t>Domain</a:t>
+            </a:r>
+            <a:r>
+              <a:rPr lang="ru-RU" sz="2400" b="1" dirty="0"/>
+              <a:t> </a:t>
+            </a:r>
+            <a:r>
+              <a:rPr lang="ru-RU" sz="2400" b="1" dirty="0" err="1"/>
+              <a:t>Model</a:t>
+            </a:r>
+            <a:r>
+              <a:rPr lang="ru-RU" sz="2400" b="1" dirty="0"/>
+              <a:t> — Умное ядро</a:t>
+            </a:r>
+          </a:p>
+          <a:p>
+            <a:pPr>
+              <a:lnSpc>
+                <a:spcPct val="150000"/>
+              </a:lnSpc>
+            </a:pPr>
+            <a:r>
+              <a:rPr lang="ru-RU" sz="2400" dirty="0"/>
+              <a:t>Это «богатая» (</a:t>
+            </a:r>
+            <a:r>
+              <a:rPr lang="ru-RU" sz="2400" dirty="0" err="1"/>
+              <a:t>Rich</a:t>
+            </a:r>
+            <a:r>
+              <a:rPr lang="ru-RU" sz="2400" dirty="0"/>
+              <a:t>) модель. Она живет в слое </a:t>
+            </a:r>
+            <a:r>
+              <a:rPr lang="ru-RU" sz="2400" b="1" dirty="0" err="1"/>
+              <a:t>Domain</a:t>
+            </a:r>
+            <a:r>
+              <a:rPr lang="ru-RU" sz="2400" dirty="0"/>
+              <a:t> и содержит главную ценность программы.</a:t>
+            </a:r>
+          </a:p>
+          <a:p>
+            <a:pPr>
+              <a:lnSpc>
+                <a:spcPct val="150000"/>
+              </a:lnSpc>
+            </a:pPr>
+            <a:r>
+              <a:rPr lang="ru-RU" sz="2400" b="1" dirty="0"/>
+              <a:t>Характеристики:</a:t>
+            </a:r>
+            <a:endParaRPr lang="ru-RU" sz="2400" dirty="0"/>
+          </a:p>
+          <a:p>
+            <a:pPr lvl="1">
+              <a:lnSpc>
+                <a:spcPct val="150000"/>
+              </a:lnSpc>
+            </a:pPr>
+            <a:r>
+              <a:rPr lang="ru-RU" sz="2400" b="1" dirty="0"/>
+              <a:t>Логика внутри:</a:t>
+            </a:r>
+            <a:r>
+              <a:rPr lang="ru-RU" sz="2400" dirty="0"/>
+              <a:t> содержит методы </a:t>
+            </a:r>
+            <a:r>
+              <a:rPr lang="ru-RU" sz="2400" dirty="0" err="1"/>
+              <a:t>валидации</a:t>
+            </a:r>
+            <a:r>
+              <a:rPr lang="ru-RU" sz="2400" dirty="0"/>
+              <a:t> и расчетов.</a:t>
+            </a:r>
+          </a:p>
+          <a:p>
+            <a:pPr lvl="1">
+              <a:lnSpc>
+                <a:spcPct val="150000"/>
+              </a:lnSpc>
+            </a:pPr>
+            <a:r>
+              <a:rPr lang="ru-RU" sz="2400" b="1" dirty="0"/>
+              <a:t>Инкапсуляция:</a:t>
+            </a:r>
+            <a:r>
+              <a:rPr lang="ru-RU" sz="2400" dirty="0"/>
+              <a:t> поля часто закрыты (</a:t>
+            </a:r>
+            <a:r>
+              <a:rPr lang="ru-RU" sz="2400" dirty="0" err="1"/>
+              <a:t>private</a:t>
+            </a:r>
+            <a:r>
+              <a:rPr lang="ru-RU" sz="2400" dirty="0"/>
+              <a:t> </a:t>
+            </a:r>
+            <a:r>
+              <a:rPr lang="ru-RU" sz="2400" dirty="0" err="1"/>
+              <a:t>set</a:t>
+            </a:r>
+            <a:r>
+              <a:rPr lang="ru-RU" sz="2400" dirty="0"/>
+              <a:t>), данные меняются только через методы.</a:t>
+            </a:r>
+          </a:p>
+          <a:p>
+            <a:pPr lvl="1">
+              <a:lnSpc>
+                <a:spcPct val="150000"/>
+              </a:lnSpc>
+            </a:pPr>
+            <a:r>
+              <a:rPr lang="ru-RU" sz="2400" b="1" dirty="0"/>
+              <a:t>Чистота:</a:t>
+            </a:r>
+            <a:r>
+              <a:rPr lang="ru-RU" sz="2400" dirty="0"/>
+              <a:t> не знает про </a:t>
+            </a:r>
+            <a:r>
+              <a:rPr lang="ru-RU" sz="2400" dirty="0" err="1"/>
+              <a:t>Entity</a:t>
+            </a:r>
+            <a:r>
+              <a:rPr lang="ru-RU" sz="2400" dirty="0"/>
+              <a:t> </a:t>
+            </a:r>
+            <a:r>
+              <a:rPr lang="ru-RU" sz="2400" dirty="0" err="1"/>
+              <a:t>Framework</a:t>
+            </a:r>
+            <a:r>
+              <a:rPr lang="ru-RU" sz="2400" dirty="0"/>
+              <a:t>, базу данных или JSON.</a:t>
+            </a:r>
+          </a:p>
+          <a:p>
+            <a:pPr>
+              <a:lnSpc>
+                <a:spcPct val="150000"/>
+              </a:lnSpc>
+            </a:pPr>
+            <a:r>
+              <a:rPr lang="ru-RU" sz="2400" b="1" dirty="0"/>
+              <a:t>Задача:</a:t>
+            </a:r>
+            <a:r>
+              <a:rPr lang="ru-RU" sz="2400" dirty="0"/>
+              <a:t> гарантировать, что данные в программе всегда корректны с точки зрения бизнеса.</a:t>
+            </a:r>
+          </a:p>
+        </p:txBody>
+      </p:sp>
+    </p:spTree>
+    <p:extLst>
+      <p:ext uri="{BB962C8B-B14F-4D97-AF65-F5344CB8AC3E}">
+        <p14:creationId xmlns:p14="http://schemas.microsoft.com/office/powerpoint/2010/main" val="3099934210"/>
+      </p:ext>
+    </p:extLst>
+  </p:cSld>
+  <p:clrMapOvr>
+    <a:masterClrMapping/>
+  </p:clrMapOvr>
+  <p:timing>
+    <p:tnLst>
+      <p:par>
+        <p:cTn id="1" dur="indefinite" restart="never" nodeType="tmRoot"/>
+      </p:par>
+    </p:tnLst>
+  </p:timing>
+</p:sld>
+</file>
+
+<file path=ppt/slides/slide15.xml><?xml version="1.0" encoding="utf-8"?>
+<p:sld xmlns:a="http://schemas.openxmlformats.org/drawingml/2006/main" xmlns:r="http://schemas.openxmlformats.org/officeDocument/2006/relationships" xmlns:p="http://schemas.openxmlformats.org/presentationml/2006/main">
+  <p:cSld>
+    <p:spTree>
+      <p:nvGrpSpPr>
+        <p:cNvPr id="1" name=""/>
+        <p:cNvGrpSpPr/>
+        <p:nvPr/>
+      </p:nvGrpSpPr>
+      <p:grpSpPr>
+        <a:xfrm>
+          <a:off x="0" y="0"/>
+          <a:ext cx="0" cy="0"/>
+          <a:chOff x="0" y="0"/>
+          <a:chExt cx="0" cy="0"/>
+        </a:xfrm>
+      </p:grpSpPr>
+      <p:sp>
+        <p:nvSpPr>
+          <p:cNvPr id="7" name="Прямоугольник 6"/>
+          <p:cNvSpPr/>
+          <p:nvPr/>
+        </p:nvSpPr>
+        <p:spPr>
+          <a:xfrm>
+            <a:off x="0" y="0"/>
+            <a:ext cx="12192000" cy="5569025"/>
+          </a:xfrm>
+          <a:prstGeom prst="rect">
+            <a:avLst/>
+          </a:prstGeom>
+        </p:spPr>
+        <p:txBody>
+          <a:bodyPr wrap="square" lIns="360000" rIns="360000">
+            <a:spAutoFit/>
+          </a:bodyPr>
+          <a:lstStyle/>
+          <a:p>
+            <a:pPr>
+              <a:lnSpc>
+                <a:spcPct val="150000"/>
+              </a:lnSpc>
+            </a:pPr>
+            <a:r>
+              <a:rPr lang="ru-RU" sz="2400" b="1" dirty="0" err="1"/>
+              <a:t>Entity</a:t>
+            </a:r>
+            <a:r>
+              <a:rPr lang="ru-RU" sz="2400" b="1" dirty="0"/>
+              <a:t> — Слуга базы данных</a:t>
+            </a:r>
+          </a:p>
+          <a:p>
+            <a:pPr>
+              <a:lnSpc>
+                <a:spcPct val="150000"/>
+              </a:lnSpc>
+            </a:pPr>
+            <a:r>
+              <a:rPr lang="ru-RU" sz="2400" dirty="0"/>
+              <a:t>Класс, «заточенный» под требования ORM (</a:t>
+            </a:r>
+            <a:r>
+              <a:rPr lang="ru-RU" sz="2400" dirty="0" err="1"/>
+              <a:t>Entity</a:t>
+            </a:r>
+            <a:r>
+              <a:rPr lang="ru-RU" sz="2400" dirty="0"/>
+              <a:t> </a:t>
+            </a:r>
+            <a:r>
+              <a:rPr lang="ru-RU" sz="2400" dirty="0" err="1"/>
+              <a:t>Framework</a:t>
+            </a:r>
+            <a:r>
+              <a:rPr lang="ru-RU" sz="2400" dirty="0"/>
+              <a:t> </a:t>
+            </a:r>
+            <a:r>
+              <a:rPr lang="ru-RU" sz="2400" dirty="0" err="1"/>
+              <a:t>Core</a:t>
+            </a:r>
+            <a:r>
+              <a:rPr lang="ru-RU" sz="2400" dirty="0"/>
+              <a:t>). Живет в слое </a:t>
+            </a:r>
+            <a:r>
+              <a:rPr lang="ru-RU" sz="2400" b="1" dirty="0" err="1"/>
+              <a:t>Infrastructure</a:t>
+            </a:r>
+            <a:r>
+              <a:rPr lang="ru-RU" sz="2400" dirty="0"/>
+              <a:t>.</a:t>
+            </a:r>
+          </a:p>
+          <a:p>
+            <a:pPr>
+              <a:lnSpc>
+                <a:spcPct val="150000"/>
+              </a:lnSpc>
+            </a:pPr>
+            <a:r>
+              <a:rPr lang="ru-RU" sz="2400" b="1" dirty="0"/>
+              <a:t>Характеристики:</a:t>
+            </a:r>
+            <a:endParaRPr lang="ru-RU" sz="2400" dirty="0"/>
+          </a:p>
+          <a:p>
+            <a:pPr lvl="1">
+              <a:lnSpc>
+                <a:spcPct val="150000"/>
+              </a:lnSpc>
+            </a:pPr>
+            <a:r>
+              <a:rPr lang="ru-RU" sz="2400" b="1" dirty="0"/>
+              <a:t>Атрибуты:</a:t>
+            </a:r>
+            <a:r>
+              <a:rPr lang="ru-RU" sz="2400" dirty="0"/>
+              <a:t> обвешан пометками [</a:t>
+            </a:r>
+            <a:r>
+              <a:rPr lang="ru-RU" sz="2400" dirty="0" err="1"/>
+              <a:t>Key</a:t>
+            </a:r>
+            <a:r>
+              <a:rPr lang="ru-RU" sz="2400" dirty="0"/>
+              <a:t>], [</a:t>
+            </a:r>
+            <a:r>
+              <a:rPr lang="ru-RU" sz="2400" dirty="0" err="1"/>
+              <a:t>Table</a:t>
+            </a:r>
+            <a:r>
+              <a:rPr lang="ru-RU" sz="2400" dirty="0"/>
+              <a:t>], [</a:t>
+            </a:r>
+            <a:r>
+              <a:rPr lang="ru-RU" sz="2400" dirty="0" err="1"/>
+              <a:t>ForeignKey</a:t>
+            </a:r>
+            <a:r>
+              <a:rPr lang="ru-RU" sz="2400" dirty="0"/>
+              <a:t>].</a:t>
+            </a:r>
+          </a:p>
+          <a:p>
+            <a:pPr lvl="1">
+              <a:lnSpc>
+                <a:spcPct val="150000"/>
+              </a:lnSpc>
+            </a:pPr>
+            <a:r>
+              <a:rPr lang="ru-RU" sz="2400" b="1" dirty="0"/>
+              <a:t>Технические поля:</a:t>
+            </a:r>
+            <a:r>
+              <a:rPr lang="ru-RU" sz="2400" dirty="0"/>
+              <a:t> содержит ID, внешние ключи (</a:t>
+            </a:r>
+            <a:r>
+              <a:rPr lang="ru-RU" sz="2400" dirty="0" err="1"/>
+              <a:t>UserId</a:t>
+            </a:r>
+            <a:r>
+              <a:rPr lang="ru-RU" sz="2400" dirty="0"/>
+              <a:t>) и навигационные свойства (</a:t>
+            </a:r>
+            <a:r>
+              <a:rPr lang="ru-RU" sz="2400" dirty="0" err="1"/>
+              <a:t>ICollection</a:t>
+            </a:r>
+            <a:r>
+              <a:rPr lang="ru-RU" sz="2400" dirty="0"/>
+              <a:t>&lt;</a:t>
+            </a:r>
+            <a:r>
+              <a:rPr lang="ru-RU" sz="2400" dirty="0" err="1"/>
+              <a:t>Grade</a:t>
+            </a:r>
+            <a:r>
+              <a:rPr lang="ru-RU" sz="2400" dirty="0"/>
+              <a:t>&gt;).</a:t>
+            </a:r>
+          </a:p>
+          <a:p>
+            <a:pPr lvl="1">
+              <a:lnSpc>
+                <a:spcPct val="150000"/>
+              </a:lnSpc>
+            </a:pPr>
+            <a:r>
+              <a:rPr lang="ru-RU" sz="2400" b="1" dirty="0"/>
+              <a:t>Открытость:</a:t>
+            </a:r>
+            <a:r>
+              <a:rPr lang="ru-RU" sz="2400" dirty="0"/>
+              <a:t> обычно имеет публичные сеттеры, чтобы EF </a:t>
+            </a:r>
+            <a:r>
+              <a:rPr lang="ru-RU" sz="2400" dirty="0" err="1"/>
+              <a:t>Core</a:t>
+            </a:r>
+            <a:r>
+              <a:rPr lang="ru-RU" sz="2400" dirty="0"/>
+              <a:t> мог легко заполнять объект данными из таблиц.</a:t>
+            </a:r>
+          </a:p>
+          <a:p>
+            <a:pPr>
+              <a:lnSpc>
+                <a:spcPct val="150000"/>
+              </a:lnSpc>
+            </a:pPr>
+            <a:r>
+              <a:rPr lang="ru-RU" sz="2400" b="1" dirty="0"/>
+              <a:t>Задача:</a:t>
+            </a:r>
+            <a:r>
+              <a:rPr lang="ru-RU" sz="2400" dirty="0"/>
+              <a:t> максимально точно соответствовать структуре таблиц в БД.</a:t>
+            </a:r>
+          </a:p>
+        </p:txBody>
+      </p:sp>
+    </p:spTree>
+    <p:extLst>
+      <p:ext uri="{BB962C8B-B14F-4D97-AF65-F5344CB8AC3E}">
+        <p14:creationId xmlns:p14="http://schemas.microsoft.com/office/powerpoint/2010/main" val="4278673424"/>
+      </p:ext>
+    </p:extLst>
+  </p:cSld>
+  <p:clrMapOvr>
+    <a:masterClrMapping/>
+  </p:clrMapOvr>
+  <p:timing>
+    <p:tnLst>
+      <p:par>
+        <p:cTn id="1" dur="indefinite" restart="never" nodeType="tmRoot"/>
+      </p:par>
+    </p:tnLst>
+  </p:timing>
+</p:sld>
+</file>
+
+<file path=ppt/slides/slide16.xml><?xml version="1.0" encoding="utf-8"?>
+<p:sld xmlns:a="http://schemas.openxmlformats.org/drawingml/2006/main" xmlns:r="http://schemas.openxmlformats.org/officeDocument/2006/relationships" xmlns:p="http://schemas.openxmlformats.org/presentationml/2006/main">
+  <p:cSld>
+    <p:spTree>
+      <p:nvGrpSpPr>
+        <p:cNvPr id="1" name=""/>
+        <p:cNvGrpSpPr/>
+        <p:nvPr/>
+      </p:nvGrpSpPr>
+      <p:grpSpPr>
+        <a:xfrm>
+          <a:off x="0" y="0"/>
+          <a:ext cx="0" cy="0"/>
+          <a:chOff x="0" y="0"/>
+          <a:chExt cx="0" cy="0"/>
+        </a:xfrm>
+      </p:grpSpPr>
+      <p:sp>
+        <p:nvSpPr>
+          <p:cNvPr id="7" name="Прямоугольник 6"/>
+          <p:cNvSpPr/>
+          <p:nvPr/>
+        </p:nvSpPr>
+        <p:spPr>
+          <a:xfrm>
+            <a:off x="0" y="0"/>
+            <a:ext cx="12192000" cy="6677662"/>
+          </a:xfrm>
+          <a:prstGeom prst="rect">
+            <a:avLst/>
+          </a:prstGeom>
+        </p:spPr>
+        <p:txBody>
+          <a:bodyPr wrap="square" lIns="360000" rIns="360000">
+            <a:spAutoFit/>
+          </a:bodyPr>
+          <a:lstStyle/>
+          <a:p>
+            <a:pPr>
+              <a:lnSpc>
+                <a:spcPct val="150000"/>
+              </a:lnSpc>
+            </a:pPr>
+            <a:r>
+              <a:rPr lang="ru-RU" sz="2400" b="1" dirty="0"/>
+              <a:t>DTO — Посыльный для сети</a:t>
+            </a:r>
+          </a:p>
+          <a:p>
+            <a:pPr>
+              <a:lnSpc>
+                <a:spcPct val="150000"/>
+              </a:lnSpc>
+            </a:pPr>
+            <a:r>
+              <a:rPr lang="ru-RU" sz="2400" dirty="0"/>
+              <a:t>Плоский класс без логики, предназначенный для передачи данных по HTTP (в формате JSON). Живет в слое </a:t>
+            </a:r>
+            <a:r>
+              <a:rPr lang="ru-RU" sz="2400" b="1" dirty="0"/>
+              <a:t>API</a:t>
+            </a:r>
+            <a:r>
+              <a:rPr lang="ru-RU" sz="2400" dirty="0"/>
+              <a:t>.</a:t>
+            </a:r>
+          </a:p>
+          <a:p>
+            <a:pPr>
+              <a:lnSpc>
+                <a:spcPct val="150000"/>
+              </a:lnSpc>
+            </a:pPr>
+            <a:r>
+              <a:rPr lang="ru-RU" sz="2400" b="1" dirty="0"/>
+              <a:t>Характеристики:</a:t>
+            </a:r>
+            <a:endParaRPr lang="ru-RU" sz="2400" dirty="0"/>
+          </a:p>
+          <a:p>
+            <a:pPr lvl="1">
+              <a:lnSpc>
+                <a:spcPct val="150000"/>
+              </a:lnSpc>
+            </a:pPr>
+            <a:r>
+              <a:rPr lang="ru-RU" sz="2400" b="1" dirty="0"/>
+              <a:t>Плоская структура:</a:t>
+            </a:r>
+            <a:r>
+              <a:rPr lang="ru-RU" sz="2400" dirty="0"/>
+              <a:t> в нем нет сложных связей, только простые типы (</a:t>
+            </a:r>
+            <a:r>
+              <a:rPr lang="ru-RU" sz="2400" dirty="0" err="1"/>
+              <a:t>string</a:t>
+            </a:r>
+            <a:r>
+              <a:rPr lang="ru-RU" sz="2400" dirty="0"/>
+              <a:t>, </a:t>
+            </a:r>
+            <a:r>
+              <a:rPr lang="ru-RU" sz="2400" dirty="0" err="1"/>
+              <a:t>int</a:t>
+            </a:r>
+            <a:r>
+              <a:rPr lang="ru-RU" sz="2400" dirty="0"/>
+              <a:t>, </a:t>
+            </a:r>
+            <a:r>
+              <a:rPr lang="ru-RU" sz="2400" dirty="0" err="1"/>
+              <a:t>Guid</a:t>
+            </a:r>
+            <a:r>
+              <a:rPr lang="ru-RU" sz="2400" dirty="0"/>
+              <a:t>).</a:t>
+            </a:r>
+          </a:p>
+          <a:p>
+            <a:pPr lvl="1">
+              <a:lnSpc>
+                <a:spcPct val="150000"/>
+              </a:lnSpc>
+            </a:pPr>
+            <a:r>
+              <a:rPr lang="ru-RU" sz="2400" b="1" dirty="0"/>
+              <a:t>Безопасность:</a:t>
+            </a:r>
+            <a:r>
+              <a:rPr lang="ru-RU" sz="2400" dirty="0"/>
+              <a:t> мы передаем пользователю только то, что ему разрешено видеть (например, DTO скроет поле </a:t>
+            </a:r>
+            <a:r>
+              <a:rPr lang="ru-RU" sz="2400" dirty="0" err="1"/>
+              <a:t>PasswordHash</a:t>
+            </a:r>
+            <a:r>
+              <a:rPr lang="ru-RU" sz="2400" dirty="0"/>
+              <a:t>).</a:t>
+            </a:r>
+          </a:p>
+          <a:p>
+            <a:pPr lvl="1">
+              <a:lnSpc>
+                <a:spcPct val="150000"/>
+              </a:lnSpc>
+            </a:pPr>
+            <a:r>
+              <a:rPr lang="ru-RU" sz="2400" b="1" dirty="0"/>
+              <a:t>Оптимизация:</a:t>
+            </a:r>
+            <a:r>
+              <a:rPr lang="ru-RU" sz="2400" dirty="0"/>
+              <a:t> содержит только те поля, которые нужны конкретному экрану мобильного приложения или сайта.</a:t>
+            </a:r>
+          </a:p>
+          <a:p>
+            <a:pPr>
+              <a:lnSpc>
+                <a:spcPct val="150000"/>
+              </a:lnSpc>
+            </a:pPr>
+            <a:r>
+              <a:rPr lang="ru-RU" sz="2400" b="1" dirty="0"/>
+              <a:t>Задача:</a:t>
+            </a:r>
+            <a:r>
+              <a:rPr lang="ru-RU" sz="2400" dirty="0"/>
+              <a:t> эффективно передать данные «наружу» и принять данные от пользователя.</a:t>
+            </a:r>
+          </a:p>
+        </p:txBody>
+      </p:sp>
+    </p:spTree>
+    <p:extLst>
+      <p:ext uri="{BB962C8B-B14F-4D97-AF65-F5344CB8AC3E}">
+        <p14:creationId xmlns:p14="http://schemas.microsoft.com/office/powerpoint/2010/main" val="2626396384"/>
+      </p:ext>
+    </p:extLst>
+  </p:cSld>
+  <p:clrMapOvr>
+    <a:masterClrMapping/>
+  </p:clrMapOvr>
+  <p:timing>
+    <p:tnLst>
+      <p:par>
+        <p:cTn id="1" dur="indefinite" restart="never" nodeType="tmRoot"/>
+      </p:par>
+    </p:tnLst>
+  </p:timing>
+</p:sld>
+</file>
+
+<file path=ppt/slides/slide17.xml><?xml version="1.0" encoding="utf-8"?>
+<p:sld xmlns:a="http://schemas.openxmlformats.org/drawingml/2006/main" xmlns:r="http://schemas.openxmlformats.org/officeDocument/2006/relationships" xmlns:p="http://schemas.openxmlformats.org/presentationml/2006/main">
+  <p:cSld>
+    <p:spTree>
+      <p:nvGrpSpPr>
+        <p:cNvPr id="1" name=""/>
+        <p:cNvGrpSpPr/>
+        <p:nvPr/>
+      </p:nvGrpSpPr>
+      <p:grpSpPr>
+        <a:xfrm>
+          <a:off x="0" y="0"/>
+          <a:ext cx="0" cy="0"/>
+          <a:chOff x="0" y="0"/>
+          <a:chExt cx="0" cy="0"/>
+        </a:xfrm>
+      </p:grpSpPr>
+      <p:sp>
+        <p:nvSpPr>
+          <p:cNvPr id="7" name="Прямоугольник 6"/>
+          <p:cNvSpPr/>
+          <p:nvPr/>
+        </p:nvSpPr>
+        <p:spPr>
+          <a:xfrm>
+            <a:off x="0" y="0"/>
+            <a:ext cx="12192000" cy="6123664"/>
+          </a:xfrm>
+          <a:prstGeom prst="rect">
+            <a:avLst/>
+          </a:prstGeom>
+        </p:spPr>
+        <p:txBody>
+          <a:bodyPr wrap="square" lIns="360000" rIns="360000">
+            <a:spAutoFit/>
+          </a:bodyPr>
+          <a:lstStyle/>
+          <a:p>
+            <a:pPr>
+              <a:lnSpc>
+                <a:spcPct val="150000"/>
+              </a:lnSpc>
+            </a:pPr>
+            <a:r>
+              <a:rPr lang="ru-RU" sz="2400" dirty="0"/>
+              <a:t>Студенты часто спрашивают: «Зачем мне писать три класса вместо одного?».</a:t>
+            </a:r>
+          </a:p>
+          <a:p>
+            <a:pPr>
+              <a:lnSpc>
+                <a:spcPct val="150000"/>
+              </a:lnSpc>
+            </a:pPr>
+            <a:r>
+              <a:rPr lang="ru-RU" sz="2400" b="1" dirty="0"/>
+              <a:t>Ответ — Изоляция изменений:</a:t>
+            </a:r>
+            <a:endParaRPr lang="ru-RU" sz="2400" dirty="0"/>
+          </a:p>
+          <a:p>
+            <a:pPr>
+              <a:lnSpc>
+                <a:spcPct val="150000"/>
+              </a:lnSpc>
+            </a:pPr>
+            <a:r>
+              <a:rPr lang="ru-RU" sz="2400" b="1" dirty="0"/>
+              <a:t>Если вы измените БД</a:t>
+            </a:r>
+            <a:r>
+              <a:rPr lang="ru-RU" sz="2400" dirty="0"/>
+              <a:t> (переименуете колонку), вы поменяете только </a:t>
+            </a:r>
+            <a:r>
+              <a:rPr lang="ru-RU" sz="2400" b="1" dirty="0" err="1"/>
+              <a:t>Entity</a:t>
+            </a:r>
+            <a:r>
+              <a:rPr lang="ru-RU" sz="2400" dirty="0"/>
+              <a:t>. Логика в </a:t>
+            </a:r>
+            <a:r>
+              <a:rPr lang="ru-RU" sz="2400" b="1" dirty="0" err="1"/>
+              <a:t>Domain</a:t>
+            </a:r>
+            <a:r>
+              <a:rPr lang="ru-RU" sz="2400" dirty="0"/>
+              <a:t> и интерфейс пользователя не сломаются.</a:t>
+            </a:r>
+          </a:p>
+          <a:p>
+            <a:pPr>
+              <a:lnSpc>
+                <a:spcPct val="150000"/>
+              </a:lnSpc>
+            </a:pPr>
+            <a:r>
+              <a:rPr lang="ru-RU" sz="2400" b="1" dirty="0"/>
+              <a:t>Если вы измените </a:t>
+            </a:r>
+            <a:r>
+              <a:rPr lang="ru-RU" sz="2400" b="1" dirty="0" err="1"/>
+              <a:t>фронтенд</a:t>
+            </a:r>
+            <a:r>
+              <a:rPr lang="ru-RU" sz="2400" dirty="0"/>
+              <a:t> (нужно другое поле на экране), вы измените только </a:t>
+            </a:r>
+            <a:r>
+              <a:rPr lang="ru-RU" sz="2400" b="1" dirty="0"/>
+              <a:t>DTO</a:t>
+            </a:r>
+            <a:r>
+              <a:rPr lang="ru-RU" sz="2400" dirty="0"/>
+              <a:t>. База данных останется прежней.</a:t>
+            </a:r>
+          </a:p>
+          <a:p>
+            <a:pPr>
+              <a:lnSpc>
+                <a:spcPct val="150000"/>
+              </a:lnSpc>
+            </a:pPr>
+            <a:r>
+              <a:rPr lang="ru-RU" sz="2400" b="1" dirty="0"/>
+              <a:t>Безопасность:</a:t>
+            </a:r>
+            <a:r>
+              <a:rPr lang="ru-RU" sz="2400" dirty="0"/>
+              <a:t> DTO защищает вас от того, чтобы пользователь случайно не перезаписал системные поля (например, дату регистрации или роль </a:t>
+            </a:r>
+            <a:r>
+              <a:rPr lang="ru-RU" sz="2400" dirty="0" err="1"/>
+              <a:t>Admin</a:t>
+            </a:r>
+            <a:r>
+              <a:rPr lang="ru-RU" sz="2400" dirty="0"/>
+              <a:t>) при отправке формы.</a:t>
+            </a:r>
+          </a:p>
+        </p:txBody>
+      </p:sp>
+    </p:spTree>
+    <p:extLst>
+      <p:ext uri="{BB962C8B-B14F-4D97-AF65-F5344CB8AC3E}">
+        <p14:creationId xmlns:p14="http://schemas.microsoft.com/office/powerpoint/2010/main" val="1465645082"/>
+      </p:ext>
+    </p:extLst>
+  </p:cSld>
+  <p:clrMapOvr>
+    <a:masterClrMapping/>
+  </p:clrMapOvr>
+  <p:timing>
+    <p:tnLst>
+      <p:par>
+        <p:cTn id="1" dur="indefinite" restart="never" nodeType="tmRoot"/>
+      </p:par>
+    </p:tnLst>
+  </p:timing>
+</p:sld>
+</file>
+
+<file path=ppt/slides/slide18.xml><?xml version="1.0" encoding="utf-8"?>
+<p:sld xmlns:a="http://schemas.openxmlformats.org/drawingml/2006/main" xmlns:r="http://schemas.openxmlformats.org/officeDocument/2006/relationships" xmlns:p="http://schemas.openxmlformats.org/presentationml/2006/main">
+  <p:cSld>
+    <p:spTree>
+      <p:nvGrpSpPr>
+        <p:cNvPr id="1" name=""/>
+        <p:cNvGrpSpPr/>
+        <p:nvPr/>
+      </p:nvGrpSpPr>
+      <p:grpSpPr>
+        <a:xfrm>
+          <a:off x="0" y="0"/>
+          <a:ext cx="0" cy="0"/>
+          <a:chOff x="0" y="0"/>
+          <a:chExt cx="0" cy="0"/>
+        </a:xfrm>
+      </p:grpSpPr>
+      <p:sp>
+        <p:nvSpPr>
+          <p:cNvPr id="11" name="Rectangle 28" descr="Светлый диагональный 2"/>
+          <p:cNvSpPr>
+            <a:spLocks noChangeArrowheads="1"/>
+          </p:cNvSpPr>
+          <p:nvPr/>
+        </p:nvSpPr>
+        <p:spPr bwMode="auto">
+          <a:xfrm>
+            <a:off x="0" y="0"/>
+            <a:ext cx="12192000" cy="654357"/>
+          </a:xfrm>
+          <a:prstGeom prst="rect">
+            <a:avLst/>
+          </a:prstGeom>
+          <a:pattFill prst="ltUpDiag">
+            <a:fgClr>
+              <a:schemeClr val="accent1">
+                <a:lumMod val="40000"/>
+                <a:lumOff val="60000"/>
+              </a:schemeClr>
+            </a:fgClr>
+            <a:bgClr>
+              <a:srgbClr val="FFFFFF"/>
+            </a:bgClr>
+          </a:pattFill>
+          <a:ln w="15875" algn="ctr">
+            <a:solidFill>
+              <a:schemeClr val="accent5">
+                <a:lumMod val="50000"/>
+              </a:schemeClr>
+            </a:solidFill>
+            <a:miter lim="800000"/>
+            <a:headEnd/>
+            <a:tailEnd/>
+          </a:ln>
+          <a:effectLst/>
+        </p:spPr>
+        <p:txBody>
+          <a:bodyPr vert="horz" wrap="square" lIns="18000" tIns="18000" rIns="18000" bIns="18000" numCol="1" anchor="ctr" anchorCtr="0" compatLnSpc="1">
+            <a:prstTxWarp prst="textNoShape">
+              <a:avLst/>
+            </a:prstTxWarp>
+          </a:bodyPr>
+          <a:lstStyle/>
+          <a:p>
+            <a:pPr algn="ctr"/>
+            <a:r>
+              <a:rPr lang="en-US" sz="2800" b="1" dirty="0" err="1">
+                <a:solidFill>
+                  <a:schemeClr val="tx2">
+                    <a:lumMod val="50000"/>
+                  </a:schemeClr>
+                </a:solidFill>
+                <a:latin typeface="Bookman Old Style" panose="02050604050505020204" pitchFamily="18" charset="0"/>
+                <a:cs typeface="Times New Roman" panose="02020603050405020304" pitchFamily="18" charset="0"/>
+              </a:rPr>
+              <a:t>Что</a:t>
+            </a:r>
+            <a:r>
+              <a:rPr lang="en-US" sz="2800" b="1" dirty="0">
+                <a:solidFill>
+                  <a:schemeClr val="tx2">
+                    <a:lumMod val="50000"/>
+                  </a:schemeClr>
+                </a:solidFill>
+                <a:latin typeface="Bookman Old Style" panose="02050604050505020204" pitchFamily="18" charset="0"/>
+                <a:cs typeface="Times New Roman" panose="02020603050405020304" pitchFamily="18" charset="0"/>
+              </a:rPr>
+              <a:t> </a:t>
+            </a:r>
+            <a:r>
+              <a:rPr lang="en-US" sz="2800" b="1" dirty="0" err="1">
+                <a:solidFill>
+                  <a:schemeClr val="tx2">
+                    <a:lumMod val="50000"/>
+                  </a:schemeClr>
+                </a:solidFill>
+                <a:latin typeface="Bookman Old Style" panose="02050604050505020204" pitchFamily="18" charset="0"/>
+                <a:cs typeface="Times New Roman" panose="02020603050405020304" pitchFamily="18" charset="0"/>
+              </a:rPr>
+              <a:t>такое</a:t>
+            </a:r>
+            <a:r>
+              <a:rPr lang="en-US" sz="2800" b="1" dirty="0">
+                <a:solidFill>
+                  <a:schemeClr val="tx2">
+                    <a:lumMod val="50000"/>
+                  </a:schemeClr>
+                </a:solidFill>
+                <a:latin typeface="Bookman Old Style" panose="02050604050505020204" pitchFamily="18" charset="0"/>
+                <a:cs typeface="Times New Roman" panose="02020603050405020304" pitchFamily="18" charset="0"/>
+              </a:rPr>
+              <a:t> REST? (Representational State Transfer)</a:t>
+            </a:r>
+            <a:endParaRPr lang="ru-RU" sz="2800" b="1" dirty="0">
+              <a:solidFill>
+                <a:schemeClr val="tx2">
+                  <a:lumMod val="50000"/>
+                </a:schemeClr>
+              </a:solidFill>
+              <a:latin typeface="Bookman Old Style" panose="02050604050505020204" pitchFamily="18" charset="0"/>
+              <a:cs typeface="Times New Roman" panose="02020603050405020304" pitchFamily="18" charset="0"/>
+            </a:endParaRPr>
+          </a:p>
+        </p:txBody>
+      </p:sp>
+      <p:sp>
+        <p:nvSpPr>
+          <p:cNvPr id="7" name="Прямоугольник 6"/>
+          <p:cNvSpPr/>
+          <p:nvPr/>
+        </p:nvSpPr>
+        <p:spPr>
+          <a:xfrm>
+            <a:off x="0" y="654357"/>
+            <a:ext cx="12192000" cy="5632311"/>
+          </a:xfrm>
+          <a:prstGeom prst="rect">
+            <a:avLst/>
+          </a:prstGeom>
+        </p:spPr>
+        <p:txBody>
+          <a:bodyPr wrap="square" lIns="360000" rIns="360000">
+            <a:spAutoFit/>
+          </a:bodyPr>
+          <a:lstStyle/>
+          <a:p>
+            <a:pPr>
+              <a:lnSpc>
+                <a:spcPct val="150000"/>
+              </a:lnSpc>
+            </a:pPr>
+            <a:r>
+              <a:rPr lang="ru-RU" sz="2400" b="1" dirty="0"/>
+              <a:t>REST</a:t>
+            </a:r>
+            <a:r>
+              <a:rPr lang="ru-RU" sz="2400" dirty="0"/>
+              <a:t> — это архитектурный стиль взаимодействия компонентов распределенного приложения. Это не закон, а набор принципов («золотой стандарт»), по которым строится современный веб.</a:t>
+            </a:r>
+          </a:p>
+          <a:p>
+            <a:pPr>
+              <a:lnSpc>
+                <a:spcPct val="150000"/>
+              </a:lnSpc>
+            </a:pPr>
+            <a:r>
+              <a:rPr lang="ru-RU" sz="2400" b="1" dirty="0"/>
+              <a:t>Автор:</a:t>
+            </a:r>
+            <a:r>
+              <a:rPr lang="ru-RU" sz="2400" dirty="0"/>
+              <a:t> Рой Филдинг (2000 г.), один из создателей протокола HTTP.</a:t>
+            </a:r>
+          </a:p>
+          <a:p>
+            <a:pPr>
+              <a:lnSpc>
+                <a:spcPct val="150000"/>
+              </a:lnSpc>
+            </a:pPr>
+            <a:r>
+              <a:rPr lang="ru-RU" sz="2400" b="1" dirty="0"/>
+              <a:t>Главная концепция:</a:t>
+            </a:r>
+            <a:r>
+              <a:rPr lang="ru-RU" sz="2400" dirty="0"/>
+              <a:t> Программа общается с </a:t>
+            </a:r>
+            <a:r>
+              <a:rPr lang="ru-RU" sz="2400" b="1" dirty="0"/>
+              <a:t>Ресурсами</a:t>
+            </a:r>
+            <a:r>
+              <a:rPr lang="ru-RU" sz="2400" dirty="0"/>
+              <a:t> с помощью стандартных </a:t>
+            </a:r>
+            <a:r>
+              <a:rPr lang="ru-RU" sz="2400" b="1" dirty="0"/>
+              <a:t>Глаголов</a:t>
+            </a:r>
+            <a:r>
+              <a:rPr lang="ru-RU" sz="2400" dirty="0"/>
+              <a:t> (методов).</a:t>
+            </a:r>
+          </a:p>
+          <a:p>
+            <a:pPr>
+              <a:lnSpc>
+                <a:spcPct val="150000"/>
+              </a:lnSpc>
+            </a:pPr>
+            <a:r>
+              <a:rPr lang="ru-RU" sz="2400" b="1" dirty="0"/>
+              <a:t>Метафора:</a:t>
+            </a:r>
+            <a:endParaRPr lang="ru-RU" sz="2400" dirty="0"/>
+          </a:p>
+          <a:p>
+            <a:pPr marL="342900" indent="-342900">
+              <a:lnSpc>
+                <a:spcPct val="150000"/>
+              </a:lnSpc>
+              <a:buFont typeface="Arial" panose="020B0604020202020204" pitchFamily="34" charset="0"/>
+              <a:buChar char="•"/>
+            </a:pPr>
+            <a:r>
+              <a:rPr lang="ru-RU" sz="2400" b="1" dirty="0"/>
+              <a:t>Ресурс (Существительное):</a:t>
+            </a:r>
+            <a:r>
+              <a:rPr lang="ru-RU" sz="2400" dirty="0"/>
+              <a:t> То, над чем делаем действие (например, /</a:t>
+            </a:r>
+            <a:r>
+              <a:rPr lang="ru-RU" sz="2400" dirty="0" err="1"/>
+              <a:t>users</a:t>
+            </a:r>
+            <a:r>
+              <a:rPr lang="ru-RU" sz="2400" dirty="0"/>
+              <a:t>, /</a:t>
+            </a:r>
+            <a:r>
+              <a:rPr lang="ru-RU" sz="2400" dirty="0" err="1"/>
+              <a:t>orders</a:t>
+            </a:r>
+            <a:r>
+              <a:rPr lang="ru-RU" sz="2400" dirty="0"/>
+              <a:t>).</a:t>
+            </a:r>
+          </a:p>
+          <a:p>
+            <a:pPr marL="342900" indent="-342900">
+              <a:lnSpc>
+                <a:spcPct val="150000"/>
+              </a:lnSpc>
+              <a:buFont typeface="Arial" panose="020B0604020202020204" pitchFamily="34" charset="0"/>
+              <a:buChar char="•"/>
+            </a:pPr>
+            <a:r>
+              <a:rPr lang="ru-RU" sz="2400" b="1" dirty="0"/>
+              <a:t>Метод (Глагол):</a:t>
+            </a:r>
+            <a:r>
+              <a:rPr lang="ru-RU" sz="2400" dirty="0"/>
+              <a:t> Само действие (GET, POST, PUT, DELETE).</a:t>
+            </a:r>
+          </a:p>
+        </p:txBody>
+      </p:sp>
+    </p:spTree>
+    <p:extLst>
+      <p:ext uri="{BB962C8B-B14F-4D97-AF65-F5344CB8AC3E}">
+        <p14:creationId xmlns:p14="http://schemas.microsoft.com/office/powerpoint/2010/main" val="348689402"/>
+      </p:ext>
+    </p:extLst>
+  </p:cSld>
+  <p:clrMapOvr>
+    <a:masterClrMapping/>
+  </p:clrMapOvr>
+  <p:timing>
+    <p:tnLst>
+      <p:par>
+        <p:cTn id="1" dur="indefinite" restart="never" nodeType="tmRoot"/>
+      </p:par>
+    </p:tnLst>
+  </p:timing>
+</p:sld>
+</file>
+
+<file path=ppt/slides/slide19.xml><?xml version="1.0" encoding="utf-8"?>
+<p:sld xmlns:a="http://schemas.openxmlformats.org/drawingml/2006/main" xmlns:r="http://schemas.openxmlformats.org/officeDocument/2006/relationships" xmlns:p="http://schemas.openxmlformats.org/presentationml/2006/main">
+  <p:cSld>
+    <p:spTree>
+      <p:nvGrpSpPr>
+        <p:cNvPr id="1" name=""/>
+        <p:cNvGrpSpPr/>
+        <p:nvPr/>
+      </p:nvGrpSpPr>
+      <p:grpSpPr>
+        <a:xfrm>
+          <a:off x="0" y="0"/>
+          <a:ext cx="0" cy="0"/>
+          <a:chOff x="0" y="0"/>
+          <a:chExt cx="0" cy="0"/>
+        </a:xfrm>
+      </p:grpSpPr>
+      <p:sp>
+        <p:nvSpPr>
+          <p:cNvPr id="7" name="Прямоугольник 6"/>
+          <p:cNvSpPr/>
+          <p:nvPr/>
+        </p:nvSpPr>
+        <p:spPr>
+          <a:xfrm>
+            <a:off x="0" y="0"/>
+            <a:ext cx="12192000" cy="6677662"/>
+          </a:xfrm>
+          <a:prstGeom prst="rect">
+            <a:avLst/>
+          </a:prstGeom>
+        </p:spPr>
+        <p:txBody>
+          <a:bodyPr wrap="square" lIns="360000" rIns="360000">
+            <a:spAutoFit/>
+          </a:bodyPr>
+          <a:lstStyle/>
+          <a:p>
+            <a:pPr>
+              <a:lnSpc>
+                <a:spcPct val="150000"/>
+              </a:lnSpc>
+            </a:pPr>
+            <a:r>
+              <a:rPr lang="ru-RU" sz="2400" b="1" dirty="0"/>
+              <a:t>Ресурсный подход (</a:t>
+            </a:r>
+            <a:r>
+              <a:rPr lang="ru-RU" sz="2400" b="1" dirty="0" err="1"/>
+              <a:t>The</a:t>
+            </a:r>
+            <a:r>
+              <a:rPr lang="ru-RU" sz="2400" b="1" dirty="0"/>
+              <a:t> REST </a:t>
+            </a:r>
+            <a:r>
+              <a:rPr lang="ru-RU" sz="2400" b="1" dirty="0" err="1"/>
+              <a:t>Way</a:t>
+            </a:r>
+            <a:r>
+              <a:rPr lang="ru-RU" sz="2400" b="1" dirty="0"/>
+              <a:t>)</a:t>
+            </a:r>
+          </a:p>
+          <a:p>
+            <a:pPr>
+              <a:lnSpc>
+                <a:spcPct val="150000"/>
+              </a:lnSpc>
+            </a:pPr>
+            <a:r>
+              <a:rPr lang="ru-RU" sz="2400" dirty="0"/>
+              <a:t>В REST адрес (URL) должен указывать на </a:t>
+            </a:r>
+            <a:r>
+              <a:rPr lang="ru-RU" sz="2400" b="1" dirty="0"/>
+              <a:t>объект</a:t>
+            </a:r>
+            <a:r>
+              <a:rPr lang="ru-RU" sz="2400" dirty="0"/>
+              <a:t>, а не на действие. Действие определяется методом HTTP</a:t>
+            </a:r>
+            <a:r>
+              <a:rPr lang="ru-RU" sz="2400" dirty="0" smtClean="0"/>
+              <a:t>.</a:t>
+            </a:r>
+          </a:p>
+          <a:p>
+            <a:pPr>
+              <a:lnSpc>
+                <a:spcPct val="150000"/>
+              </a:lnSpc>
+            </a:pPr>
+            <a:endParaRPr lang="ru-RU" sz="2400" dirty="0"/>
+          </a:p>
+          <a:p>
+            <a:pPr>
+              <a:lnSpc>
+                <a:spcPct val="150000"/>
+              </a:lnSpc>
+            </a:pPr>
+            <a:endParaRPr lang="ru-RU" sz="2400" dirty="0" smtClean="0"/>
+          </a:p>
+          <a:p>
+            <a:pPr>
+              <a:lnSpc>
+                <a:spcPct val="150000"/>
+              </a:lnSpc>
+            </a:pPr>
+            <a:endParaRPr lang="ru-RU" sz="2400" dirty="0"/>
+          </a:p>
+          <a:p>
+            <a:pPr>
+              <a:lnSpc>
+                <a:spcPct val="150000"/>
+              </a:lnSpc>
+            </a:pPr>
+            <a:endParaRPr lang="ru-RU" sz="2400" dirty="0" smtClean="0"/>
+          </a:p>
+          <a:p>
+            <a:pPr>
+              <a:lnSpc>
+                <a:spcPct val="150000"/>
+              </a:lnSpc>
+            </a:pPr>
+            <a:endParaRPr lang="ru-RU" sz="2400" dirty="0"/>
+          </a:p>
+          <a:p>
+            <a:pPr>
+              <a:lnSpc>
+                <a:spcPct val="150000"/>
+              </a:lnSpc>
+            </a:pPr>
+            <a:endParaRPr lang="ru-RU" sz="2400" dirty="0" smtClean="0"/>
+          </a:p>
+          <a:p>
+            <a:pPr>
+              <a:lnSpc>
+                <a:spcPct val="150000"/>
+              </a:lnSpc>
+            </a:pPr>
+            <a:r>
+              <a:rPr lang="ru-RU" sz="2400" b="1" dirty="0"/>
+              <a:t>Почему это удобно:</a:t>
+            </a:r>
+            <a:r>
+              <a:rPr lang="ru-RU" sz="2400" dirty="0"/>
+              <a:t> Интерфейс становится предсказуемым. Разработчик </a:t>
+            </a:r>
+            <a:r>
+              <a:rPr lang="ru-RU" sz="2400" dirty="0" err="1"/>
+              <a:t>фронтенда</a:t>
+            </a:r>
+            <a:r>
+              <a:rPr lang="ru-RU" sz="2400" dirty="0"/>
+              <a:t> точно знает: чтобы получить статью №10, нужно постучаться на </a:t>
+            </a:r>
+            <a:r>
+              <a:rPr lang="ru-RU" sz="2400" dirty="0" err="1"/>
+              <a:t>articles</a:t>
+            </a:r>
+            <a:r>
+              <a:rPr lang="ru-RU" sz="2400" dirty="0"/>
+              <a:t>/10.</a:t>
+            </a:r>
+          </a:p>
+        </p:txBody>
+      </p:sp>
+      <p:graphicFrame>
+        <p:nvGraphicFramePr>
+          <p:cNvPr id="4" name="Таблица 3"/>
+          <p:cNvGraphicFramePr>
+            <a:graphicFrameLocks noGrp="1"/>
+          </p:cNvGraphicFramePr>
+          <p:nvPr>
+            <p:extLst>
+              <p:ext uri="{D42A27DB-BD31-4B8C-83A1-F6EECF244321}">
+                <p14:modId xmlns:p14="http://schemas.microsoft.com/office/powerpoint/2010/main" val="2063845511"/>
+              </p:ext>
+            </p:extLst>
+          </p:nvPr>
+        </p:nvGraphicFramePr>
+        <p:xfrm>
+          <a:off x="368643" y="1955801"/>
+          <a:ext cx="11454714" cy="2766060"/>
+        </p:xfrm>
+        <a:graphic>
+          <a:graphicData uri="http://schemas.openxmlformats.org/drawingml/2006/table">
+            <a:tbl>
+              <a:tblPr/>
+              <a:tblGrid>
+                <a:gridCol w="3818238">
+                  <a:extLst>
+                    <a:ext uri="{9D8B030D-6E8A-4147-A177-3AD203B41FA5}">
+                      <a16:colId xmlns:a16="http://schemas.microsoft.com/office/drawing/2014/main" val="1252402036"/>
+                    </a:ext>
+                  </a:extLst>
+                </a:gridCol>
+                <a:gridCol w="3818238">
+                  <a:extLst>
+                    <a:ext uri="{9D8B030D-6E8A-4147-A177-3AD203B41FA5}">
+                      <a16:colId xmlns:a16="http://schemas.microsoft.com/office/drawing/2014/main" val="2962424500"/>
+                    </a:ext>
+                  </a:extLst>
+                </a:gridCol>
+                <a:gridCol w="3818238">
+                  <a:extLst>
+                    <a:ext uri="{9D8B030D-6E8A-4147-A177-3AD203B41FA5}">
+                      <a16:colId xmlns:a16="http://schemas.microsoft.com/office/drawing/2014/main" val="2997195067"/>
+                    </a:ext>
+                  </a:extLst>
+                </a:gridCol>
+              </a:tblGrid>
+              <a:tr h="0">
+                <a:tc>
+                  <a:txBody>
+                    <a:bodyPr/>
+                    <a:lstStyle/>
+                    <a:p>
+                      <a:r>
+                        <a:rPr lang="ru-RU" sz="2400" b="1">
+                          <a:solidFill>
+                            <a:schemeClr val="tx1"/>
+                          </a:solidFill>
+                          <a:effectLst/>
+                          <a:latin typeface="+mn-lt"/>
+                        </a:rPr>
+                        <a:t>Плохо (</a:t>
+                      </a:r>
+                      <a:r>
+                        <a:rPr lang="en-US" sz="2400" b="1">
+                          <a:solidFill>
+                            <a:schemeClr val="tx1"/>
+                          </a:solidFill>
+                          <a:effectLst/>
+                          <a:latin typeface="+mn-lt"/>
+                        </a:rPr>
+                        <a:t>Action-based)</a:t>
+                      </a:r>
+                    </a:p>
+                  </a:txBody>
+                  <a:tcPr marL="114300" marR="114300" marT="57150" marB="57150" anchor="ctr">
+                    <a:lnL w="12700" cap="flat" cmpd="sng" algn="ctr">
+                      <a:solidFill>
+                        <a:schemeClr val="tx1"/>
+                      </a:solidFill>
+                      <a:prstDash val="solid"/>
+                      <a:round/>
+                      <a:headEnd type="none" w="med" len="med"/>
+                      <a:tailEnd type="none" w="med" len="med"/>
+                    </a:lnL>
+                    <a:lnR w="12700" cap="flat" cmpd="sng" algn="ctr">
+                      <a:solidFill>
+                        <a:schemeClr val="tx1"/>
+                      </a:solidFill>
+                      <a:prstDash val="solid"/>
+                      <a:round/>
+                      <a:headEnd type="none" w="med" len="med"/>
+                      <a:tailEnd type="none" w="med" len="med"/>
+                    </a:lnR>
+                    <a:lnT w="12700" cap="flat" cmpd="sng" algn="ctr">
+                      <a:solidFill>
+                        <a:schemeClr val="tx1"/>
+                      </a:solidFill>
+                      <a:prstDash val="solid"/>
+                      <a:round/>
+                      <a:headEnd type="none" w="med" len="med"/>
+                      <a:tailEnd type="none" w="med" len="med"/>
+                    </a:lnT>
+                    <a:lnB w="12700" cap="flat" cmpd="sng" algn="ctr">
+                      <a:solidFill>
+                        <a:schemeClr val="tx1"/>
+                      </a:solidFill>
+                      <a:prstDash val="solid"/>
+                      <a:round/>
+                      <a:headEnd type="none" w="med" len="med"/>
+                      <a:tailEnd type="none" w="med" len="med"/>
+                    </a:lnB>
+                    <a:solidFill>
+                      <a:srgbClr val="FFFFFF"/>
+                    </a:solidFill>
+                  </a:tcPr>
+                </a:tc>
+                <a:tc>
+                  <a:txBody>
+                    <a:bodyPr/>
+                    <a:lstStyle/>
+                    <a:p>
+                      <a:r>
+                        <a:rPr lang="ru-RU" sz="2400" b="1">
+                          <a:solidFill>
+                            <a:schemeClr val="tx1"/>
+                          </a:solidFill>
+                          <a:effectLst/>
+                          <a:latin typeface="+mn-lt"/>
+                        </a:rPr>
+                        <a:t>Хорошо (</a:t>
+                      </a:r>
+                      <a:r>
+                        <a:rPr lang="en-US" sz="2400" b="1">
+                          <a:solidFill>
+                            <a:schemeClr val="tx1"/>
+                          </a:solidFill>
+                          <a:effectLst/>
+                          <a:latin typeface="+mn-lt"/>
+                        </a:rPr>
+                        <a:t>REST-way)</a:t>
+                      </a:r>
+                    </a:p>
+                  </a:txBody>
+                  <a:tcPr marL="114300" marR="114300" marT="57150" marB="57150" anchor="ctr">
+                    <a:lnL w="12700" cap="flat" cmpd="sng" algn="ctr">
+                      <a:solidFill>
+                        <a:schemeClr val="tx1"/>
+                      </a:solidFill>
+                      <a:prstDash val="solid"/>
+                      <a:round/>
+                      <a:headEnd type="none" w="med" len="med"/>
+                      <a:tailEnd type="none" w="med" len="med"/>
+                    </a:lnL>
+                    <a:lnR w="12700" cap="flat" cmpd="sng" algn="ctr">
+                      <a:solidFill>
+                        <a:schemeClr val="tx1"/>
+                      </a:solidFill>
+                      <a:prstDash val="solid"/>
+                      <a:round/>
+                      <a:headEnd type="none" w="med" len="med"/>
+                      <a:tailEnd type="none" w="med" len="med"/>
+                    </a:lnR>
+                    <a:lnT w="12700" cap="flat" cmpd="sng" algn="ctr">
+                      <a:solidFill>
+                        <a:schemeClr val="tx1"/>
+                      </a:solidFill>
+                      <a:prstDash val="solid"/>
+                      <a:round/>
+                      <a:headEnd type="none" w="med" len="med"/>
+                      <a:tailEnd type="none" w="med" len="med"/>
+                    </a:lnT>
+                    <a:lnB w="12700" cap="flat" cmpd="sng" algn="ctr">
+                      <a:solidFill>
+                        <a:schemeClr val="tx1"/>
+                      </a:solidFill>
+                      <a:prstDash val="solid"/>
+                      <a:round/>
+                      <a:headEnd type="none" w="med" len="med"/>
+                      <a:tailEnd type="none" w="med" len="med"/>
+                    </a:lnB>
+                    <a:solidFill>
+                      <a:srgbClr val="FFFFFF"/>
+                    </a:solidFill>
+                  </a:tcPr>
+                </a:tc>
+                <a:tc>
+                  <a:txBody>
+                    <a:bodyPr/>
+                    <a:lstStyle/>
+                    <a:p>
+                      <a:r>
+                        <a:rPr lang="ru-RU" sz="2400" b="1">
+                          <a:solidFill>
+                            <a:schemeClr val="tx1"/>
+                          </a:solidFill>
+                          <a:effectLst/>
+                          <a:latin typeface="+mn-lt"/>
+                        </a:rPr>
+                        <a:t>Что происходит</a:t>
+                      </a:r>
+                    </a:p>
+                  </a:txBody>
+                  <a:tcPr marL="114300" marR="114300" marT="57150" marB="57150" anchor="ctr">
+                    <a:lnL w="12700" cap="flat" cmpd="sng" algn="ctr">
+                      <a:solidFill>
+                        <a:schemeClr val="tx1"/>
+                      </a:solidFill>
+                      <a:prstDash val="solid"/>
+                      <a:round/>
+                      <a:headEnd type="none" w="med" len="med"/>
+                      <a:tailEnd type="none" w="med" len="med"/>
+                    </a:lnL>
+                    <a:lnR w="12700" cap="flat" cmpd="sng" algn="ctr">
+                      <a:solidFill>
+                        <a:schemeClr val="tx1"/>
+                      </a:solidFill>
+                      <a:prstDash val="solid"/>
+                      <a:round/>
+                      <a:headEnd type="none" w="med" len="med"/>
+                      <a:tailEnd type="none" w="med" len="med"/>
+                    </a:lnR>
+                    <a:lnT w="12700" cap="flat" cmpd="sng" algn="ctr">
+                      <a:solidFill>
+                        <a:schemeClr val="tx1"/>
+                      </a:solidFill>
+                      <a:prstDash val="solid"/>
+                      <a:round/>
+                      <a:headEnd type="none" w="med" len="med"/>
+                      <a:tailEnd type="none" w="med" len="med"/>
+                    </a:lnT>
+                    <a:lnB w="12700" cap="flat" cmpd="sng" algn="ctr">
+                      <a:solidFill>
+                        <a:schemeClr val="tx1"/>
+                      </a:solidFill>
+                      <a:prstDash val="solid"/>
+                      <a:round/>
+                      <a:headEnd type="none" w="med" len="med"/>
+                      <a:tailEnd type="none" w="med" len="med"/>
+                    </a:lnB>
+                    <a:solidFill>
+                      <a:srgbClr val="FFFFFF"/>
+                    </a:solidFill>
+                  </a:tcPr>
+                </a:tc>
+                <a:extLst>
+                  <a:ext uri="{0D108BD9-81ED-4DB2-BD59-A6C34878D82A}">
+                    <a16:rowId xmlns:a16="http://schemas.microsoft.com/office/drawing/2014/main" val="3339584388"/>
+                  </a:ext>
+                </a:extLst>
+              </a:tr>
+              <a:tr h="0">
+                <a:tc>
+                  <a:txBody>
+                    <a:bodyPr/>
+                    <a:lstStyle/>
+                    <a:p>
+                      <a:r>
+                        <a:rPr lang="en-US" sz="2400" b="0" dirty="0">
+                          <a:solidFill>
+                            <a:schemeClr val="tx1"/>
+                          </a:solidFill>
+                          <a:effectLst/>
+                          <a:latin typeface="+mn-lt"/>
+                        </a:rPr>
+                        <a:t>GET /</a:t>
+                      </a:r>
+                      <a:r>
+                        <a:rPr lang="en-US" sz="2400" b="0" dirty="0" err="1">
+                          <a:solidFill>
+                            <a:schemeClr val="tx1"/>
+                          </a:solidFill>
+                          <a:effectLst/>
+                          <a:latin typeface="+mn-lt"/>
+                        </a:rPr>
+                        <a:t>getAllProducts</a:t>
+                      </a:r>
+                      <a:endParaRPr lang="en-US" sz="2400" b="0" dirty="0">
+                        <a:solidFill>
+                          <a:schemeClr val="tx1"/>
+                        </a:solidFill>
+                        <a:effectLst/>
+                        <a:latin typeface="+mn-lt"/>
+                      </a:endParaRPr>
+                    </a:p>
+                  </a:txBody>
+                  <a:tcPr marL="114300" marR="114300" marT="57150" marB="57150" anchor="ctr">
+                    <a:lnL w="12700" cap="flat" cmpd="sng" algn="ctr">
+                      <a:solidFill>
+                        <a:schemeClr val="tx1"/>
+                      </a:solidFill>
+                      <a:prstDash val="solid"/>
+                      <a:round/>
+                      <a:headEnd type="none" w="med" len="med"/>
+                      <a:tailEnd type="none" w="med" len="med"/>
+                    </a:lnL>
+                    <a:lnR w="12700" cap="flat" cmpd="sng" algn="ctr">
+                      <a:solidFill>
+                        <a:schemeClr val="tx1"/>
+                      </a:solidFill>
+                      <a:prstDash val="solid"/>
+                      <a:round/>
+                      <a:headEnd type="none" w="med" len="med"/>
+                      <a:tailEnd type="none" w="med" len="med"/>
+                    </a:lnR>
+                    <a:lnT w="12700" cap="flat" cmpd="sng" algn="ctr">
+                      <a:solidFill>
+                        <a:schemeClr val="tx1"/>
+                      </a:solidFill>
+                      <a:prstDash val="solid"/>
+                      <a:round/>
+                      <a:headEnd type="none" w="med" len="med"/>
+                      <a:tailEnd type="none" w="med" len="med"/>
+                    </a:lnT>
+                    <a:lnB w="12700" cap="flat" cmpd="sng" algn="ctr">
+                      <a:solidFill>
+                        <a:schemeClr val="tx1"/>
+                      </a:solidFill>
+                      <a:prstDash val="solid"/>
+                      <a:round/>
+                      <a:headEnd type="none" w="med" len="med"/>
+                      <a:tailEnd type="none" w="med" len="med"/>
+                    </a:lnB>
+                    <a:solidFill>
+                      <a:srgbClr val="FFFFFF"/>
+                    </a:solidFill>
+                  </a:tcPr>
+                </a:tc>
+                <a:tc>
+                  <a:txBody>
+                    <a:bodyPr/>
+                    <a:lstStyle/>
+                    <a:p>
+                      <a:r>
+                        <a:rPr lang="en-US" sz="2400" b="0">
+                          <a:solidFill>
+                            <a:schemeClr val="tx1"/>
+                          </a:solidFill>
+                          <a:effectLst/>
+                          <a:latin typeface="+mn-lt"/>
+                        </a:rPr>
+                        <a:t>GET /products</a:t>
+                      </a:r>
+                    </a:p>
+                  </a:txBody>
+                  <a:tcPr marL="114300" marR="114300" marT="57150" marB="57150" anchor="ctr">
+                    <a:lnL w="12700" cap="flat" cmpd="sng" algn="ctr">
+                      <a:solidFill>
+                        <a:schemeClr val="tx1"/>
+                      </a:solidFill>
+                      <a:prstDash val="solid"/>
+                      <a:round/>
+                      <a:headEnd type="none" w="med" len="med"/>
+                      <a:tailEnd type="none" w="med" len="med"/>
+                    </a:lnL>
+                    <a:lnR w="12700" cap="flat" cmpd="sng" algn="ctr">
+                      <a:solidFill>
+                        <a:schemeClr val="tx1"/>
+                      </a:solidFill>
+                      <a:prstDash val="solid"/>
+                      <a:round/>
+                      <a:headEnd type="none" w="med" len="med"/>
+                      <a:tailEnd type="none" w="med" len="med"/>
+                    </a:lnR>
+                    <a:lnT w="12700" cap="flat" cmpd="sng" algn="ctr">
+                      <a:solidFill>
+                        <a:schemeClr val="tx1"/>
+                      </a:solidFill>
+                      <a:prstDash val="solid"/>
+                      <a:round/>
+                      <a:headEnd type="none" w="med" len="med"/>
+                      <a:tailEnd type="none" w="med" len="med"/>
+                    </a:lnT>
+                    <a:lnB w="12700" cap="flat" cmpd="sng" algn="ctr">
+                      <a:solidFill>
+                        <a:schemeClr val="tx1"/>
+                      </a:solidFill>
+                      <a:prstDash val="solid"/>
+                      <a:round/>
+                      <a:headEnd type="none" w="med" len="med"/>
+                      <a:tailEnd type="none" w="med" len="med"/>
+                    </a:lnB>
+                    <a:solidFill>
+                      <a:srgbClr val="FFFFFF"/>
+                    </a:solidFill>
+                  </a:tcPr>
+                </a:tc>
+                <a:tc>
+                  <a:txBody>
+                    <a:bodyPr/>
+                    <a:lstStyle/>
+                    <a:p>
+                      <a:r>
+                        <a:rPr lang="ru-RU" sz="2400" b="0" dirty="0">
+                          <a:solidFill>
+                            <a:schemeClr val="tx1"/>
+                          </a:solidFill>
+                          <a:effectLst/>
+                          <a:latin typeface="+mn-lt"/>
+                        </a:rPr>
+                        <a:t>Получить список</a:t>
+                      </a:r>
+                    </a:p>
+                  </a:txBody>
+                  <a:tcPr marL="114300" marR="114300" marT="57150" marB="57150" anchor="ctr">
+                    <a:lnL w="12700" cap="flat" cmpd="sng" algn="ctr">
+                      <a:solidFill>
+                        <a:schemeClr val="tx1"/>
+                      </a:solidFill>
+                      <a:prstDash val="solid"/>
+                      <a:round/>
+                      <a:headEnd type="none" w="med" len="med"/>
+                      <a:tailEnd type="none" w="med" len="med"/>
+                    </a:lnL>
+                    <a:lnR w="12700" cap="flat" cmpd="sng" algn="ctr">
+                      <a:solidFill>
+                        <a:schemeClr val="tx1"/>
+                      </a:solidFill>
+                      <a:prstDash val="solid"/>
+                      <a:round/>
+                      <a:headEnd type="none" w="med" len="med"/>
+                      <a:tailEnd type="none" w="med" len="med"/>
+                    </a:lnR>
+                    <a:lnT w="12700" cap="flat" cmpd="sng" algn="ctr">
+                      <a:solidFill>
+                        <a:schemeClr val="tx1"/>
+                      </a:solidFill>
+                      <a:prstDash val="solid"/>
+                      <a:round/>
+                      <a:headEnd type="none" w="med" len="med"/>
+                      <a:tailEnd type="none" w="med" len="med"/>
+                    </a:lnT>
+                    <a:lnB w="12700" cap="flat" cmpd="sng" algn="ctr">
+                      <a:solidFill>
+                        <a:schemeClr val="tx1"/>
+                      </a:solidFill>
+                      <a:prstDash val="solid"/>
+                      <a:round/>
+                      <a:headEnd type="none" w="med" len="med"/>
+                      <a:tailEnd type="none" w="med" len="med"/>
+                    </a:lnB>
+                    <a:solidFill>
+                      <a:srgbClr val="FFFFFF"/>
+                    </a:solidFill>
+                  </a:tcPr>
+                </a:tc>
+                <a:extLst>
+                  <a:ext uri="{0D108BD9-81ED-4DB2-BD59-A6C34878D82A}">
+                    <a16:rowId xmlns:a16="http://schemas.microsoft.com/office/drawing/2014/main" val="145959385"/>
+                  </a:ext>
+                </a:extLst>
+              </a:tr>
+              <a:tr h="0">
+                <a:tc>
+                  <a:txBody>
+                    <a:bodyPr/>
+                    <a:lstStyle/>
+                    <a:p>
+                      <a:r>
+                        <a:rPr lang="en-US" sz="2400" b="0">
+                          <a:solidFill>
+                            <a:schemeClr val="tx1"/>
+                          </a:solidFill>
+                          <a:effectLst/>
+                          <a:latin typeface="+mn-lt"/>
+                        </a:rPr>
+                        <a:t>POST /createNewUser</a:t>
+                      </a:r>
+                    </a:p>
+                  </a:txBody>
+                  <a:tcPr marL="114300" marR="114300" marT="57150" marB="57150" anchor="ctr">
+                    <a:lnL w="12700" cap="flat" cmpd="sng" algn="ctr">
+                      <a:solidFill>
+                        <a:schemeClr val="tx1"/>
+                      </a:solidFill>
+                      <a:prstDash val="solid"/>
+                      <a:round/>
+                      <a:headEnd type="none" w="med" len="med"/>
+                      <a:tailEnd type="none" w="med" len="med"/>
+                    </a:lnL>
+                    <a:lnR w="12700" cap="flat" cmpd="sng" algn="ctr">
+                      <a:solidFill>
+                        <a:schemeClr val="tx1"/>
+                      </a:solidFill>
+                      <a:prstDash val="solid"/>
+                      <a:round/>
+                      <a:headEnd type="none" w="med" len="med"/>
+                      <a:tailEnd type="none" w="med" len="med"/>
+                    </a:lnR>
+                    <a:lnT w="12700" cap="flat" cmpd="sng" algn="ctr">
+                      <a:solidFill>
+                        <a:schemeClr val="tx1"/>
+                      </a:solidFill>
+                      <a:prstDash val="solid"/>
+                      <a:round/>
+                      <a:headEnd type="none" w="med" len="med"/>
+                      <a:tailEnd type="none" w="med" len="med"/>
+                    </a:lnT>
+                    <a:lnB w="12700" cap="flat" cmpd="sng" algn="ctr">
+                      <a:solidFill>
+                        <a:schemeClr val="tx1"/>
+                      </a:solidFill>
+                      <a:prstDash val="solid"/>
+                      <a:round/>
+                      <a:headEnd type="none" w="med" len="med"/>
+                      <a:tailEnd type="none" w="med" len="med"/>
+                    </a:lnB>
+                    <a:solidFill>
+                      <a:srgbClr val="FFFFFF"/>
+                    </a:solidFill>
+                  </a:tcPr>
+                </a:tc>
+                <a:tc>
+                  <a:txBody>
+                    <a:bodyPr/>
+                    <a:lstStyle/>
+                    <a:p>
+                      <a:r>
+                        <a:rPr lang="en-US" sz="2400" b="0" dirty="0">
+                          <a:solidFill>
+                            <a:schemeClr val="tx1"/>
+                          </a:solidFill>
+                          <a:effectLst/>
+                          <a:latin typeface="+mn-lt"/>
+                        </a:rPr>
+                        <a:t>POST /users</a:t>
+                      </a:r>
+                    </a:p>
+                  </a:txBody>
+                  <a:tcPr marL="114300" marR="114300" marT="57150" marB="57150" anchor="ctr">
+                    <a:lnL w="12700" cap="flat" cmpd="sng" algn="ctr">
+                      <a:solidFill>
+                        <a:schemeClr val="tx1"/>
+                      </a:solidFill>
+                      <a:prstDash val="solid"/>
+                      <a:round/>
+                      <a:headEnd type="none" w="med" len="med"/>
+                      <a:tailEnd type="none" w="med" len="med"/>
+                    </a:lnL>
+                    <a:lnR w="12700" cap="flat" cmpd="sng" algn="ctr">
+                      <a:solidFill>
+                        <a:schemeClr val="tx1"/>
+                      </a:solidFill>
+                      <a:prstDash val="solid"/>
+                      <a:round/>
+                      <a:headEnd type="none" w="med" len="med"/>
+                      <a:tailEnd type="none" w="med" len="med"/>
+                    </a:lnR>
+                    <a:lnT w="12700" cap="flat" cmpd="sng" algn="ctr">
+                      <a:solidFill>
+                        <a:schemeClr val="tx1"/>
+                      </a:solidFill>
+                      <a:prstDash val="solid"/>
+                      <a:round/>
+                      <a:headEnd type="none" w="med" len="med"/>
+                      <a:tailEnd type="none" w="med" len="med"/>
+                    </a:lnT>
+                    <a:lnB w="12700" cap="flat" cmpd="sng" algn="ctr">
+                      <a:solidFill>
+                        <a:schemeClr val="tx1"/>
+                      </a:solidFill>
+                      <a:prstDash val="solid"/>
+                      <a:round/>
+                      <a:headEnd type="none" w="med" len="med"/>
+                      <a:tailEnd type="none" w="med" len="med"/>
+                    </a:lnB>
+                    <a:solidFill>
+                      <a:srgbClr val="FFFFFF"/>
+                    </a:solidFill>
+                  </a:tcPr>
+                </a:tc>
+                <a:tc>
+                  <a:txBody>
+                    <a:bodyPr/>
+                    <a:lstStyle/>
+                    <a:p>
+                      <a:r>
+                        <a:rPr lang="ru-RU" sz="2400" b="0">
+                          <a:solidFill>
+                            <a:schemeClr val="tx1"/>
+                          </a:solidFill>
+                          <a:effectLst/>
+                          <a:latin typeface="+mn-lt"/>
+                        </a:rPr>
+                        <a:t>Создать запись</a:t>
+                      </a:r>
+                    </a:p>
+                  </a:txBody>
+                  <a:tcPr marL="114300" marR="114300" marT="57150" marB="57150" anchor="ctr">
+                    <a:lnL w="12700" cap="flat" cmpd="sng" algn="ctr">
+                      <a:solidFill>
+                        <a:schemeClr val="tx1"/>
+                      </a:solidFill>
+                      <a:prstDash val="solid"/>
+                      <a:round/>
+                      <a:headEnd type="none" w="med" len="med"/>
+                      <a:tailEnd type="none" w="med" len="med"/>
+                    </a:lnL>
+                    <a:lnR w="12700" cap="flat" cmpd="sng" algn="ctr">
+                      <a:solidFill>
+                        <a:schemeClr val="tx1"/>
+                      </a:solidFill>
+                      <a:prstDash val="solid"/>
+                      <a:round/>
+                      <a:headEnd type="none" w="med" len="med"/>
+                      <a:tailEnd type="none" w="med" len="med"/>
+                    </a:lnR>
+                    <a:lnT w="12700" cap="flat" cmpd="sng" algn="ctr">
+                      <a:solidFill>
+                        <a:schemeClr val="tx1"/>
+                      </a:solidFill>
+                      <a:prstDash val="solid"/>
+                      <a:round/>
+                      <a:headEnd type="none" w="med" len="med"/>
+                      <a:tailEnd type="none" w="med" len="med"/>
+                    </a:lnT>
+                    <a:lnB w="12700" cap="flat" cmpd="sng" algn="ctr">
+                      <a:solidFill>
+                        <a:schemeClr val="tx1"/>
+                      </a:solidFill>
+                      <a:prstDash val="solid"/>
+                      <a:round/>
+                      <a:headEnd type="none" w="med" len="med"/>
+                      <a:tailEnd type="none" w="med" len="med"/>
+                    </a:lnB>
+                    <a:solidFill>
+                      <a:srgbClr val="FFFFFF"/>
+                    </a:solidFill>
+                  </a:tcPr>
+                </a:tc>
+                <a:extLst>
+                  <a:ext uri="{0D108BD9-81ED-4DB2-BD59-A6C34878D82A}">
+                    <a16:rowId xmlns:a16="http://schemas.microsoft.com/office/drawing/2014/main" val="1893778510"/>
+                  </a:ext>
+                </a:extLst>
+              </a:tr>
+              <a:tr h="0">
+                <a:tc>
+                  <a:txBody>
+                    <a:bodyPr/>
+                    <a:lstStyle/>
+                    <a:p>
+                      <a:r>
+                        <a:rPr lang="en-US" sz="2400" b="0">
+                          <a:solidFill>
+                            <a:schemeClr val="tx1"/>
+                          </a:solidFill>
+                          <a:effectLst/>
+                          <a:latin typeface="+mn-lt"/>
+                        </a:rPr>
+                        <a:t>GET /deleteItem?id=1</a:t>
+                      </a:r>
+                    </a:p>
+                  </a:txBody>
+                  <a:tcPr marL="114300" marR="114300" marT="57150" marB="57150" anchor="ctr">
+                    <a:lnL w="12700" cap="flat" cmpd="sng" algn="ctr">
+                      <a:solidFill>
+                        <a:schemeClr val="tx1"/>
+                      </a:solidFill>
+                      <a:prstDash val="solid"/>
+                      <a:round/>
+                      <a:headEnd type="none" w="med" len="med"/>
+                      <a:tailEnd type="none" w="med" len="med"/>
+                    </a:lnL>
+                    <a:lnR w="12700" cap="flat" cmpd="sng" algn="ctr">
+                      <a:solidFill>
+                        <a:schemeClr val="tx1"/>
+                      </a:solidFill>
+                      <a:prstDash val="solid"/>
+                      <a:round/>
+                      <a:headEnd type="none" w="med" len="med"/>
+                      <a:tailEnd type="none" w="med" len="med"/>
+                    </a:lnR>
+                    <a:lnT w="12700" cap="flat" cmpd="sng" algn="ctr">
+                      <a:solidFill>
+                        <a:schemeClr val="tx1"/>
+                      </a:solidFill>
+                      <a:prstDash val="solid"/>
+                      <a:round/>
+                      <a:headEnd type="none" w="med" len="med"/>
+                      <a:tailEnd type="none" w="med" len="med"/>
+                    </a:lnT>
+                    <a:lnB w="12700" cap="flat" cmpd="sng" algn="ctr">
+                      <a:solidFill>
+                        <a:schemeClr val="tx1"/>
+                      </a:solidFill>
+                      <a:prstDash val="solid"/>
+                      <a:round/>
+                      <a:headEnd type="none" w="med" len="med"/>
+                      <a:tailEnd type="none" w="med" len="med"/>
+                    </a:lnB>
+                    <a:solidFill>
+                      <a:srgbClr val="FFFFFF"/>
+                    </a:solidFill>
+                  </a:tcPr>
+                </a:tc>
+                <a:tc>
+                  <a:txBody>
+                    <a:bodyPr/>
+                    <a:lstStyle/>
+                    <a:p>
+                      <a:r>
+                        <a:rPr lang="en-US" sz="2400" b="0">
+                          <a:solidFill>
+                            <a:schemeClr val="tx1"/>
+                          </a:solidFill>
+                          <a:effectLst/>
+                          <a:latin typeface="+mn-lt"/>
+                        </a:rPr>
+                        <a:t>DELETE /items/1</a:t>
+                      </a:r>
+                    </a:p>
+                  </a:txBody>
+                  <a:tcPr marL="114300" marR="114300" marT="57150" marB="57150" anchor="ctr">
+                    <a:lnL w="12700" cap="flat" cmpd="sng" algn="ctr">
+                      <a:solidFill>
+                        <a:schemeClr val="tx1"/>
+                      </a:solidFill>
+                      <a:prstDash val="solid"/>
+                      <a:round/>
+                      <a:headEnd type="none" w="med" len="med"/>
+                      <a:tailEnd type="none" w="med" len="med"/>
+                    </a:lnL>
+                    <a:lnR w="12700" cap="flat" cmpd="sng" algn="ctr">
+                      <a:solidFill>
+                        <a:schemeClr val="tx1"/>
+                      </a:solidFill>
+                      <a:prstDash val="solid"/>
+                      <a:round/>
+                      <a:headEnd type="none" w="med" len="med"/>
+                      <a:tailEnd type="none" w="med" len="med"/>
+                    </a:lnR>
+                    <a:lnT w="12700" cap="flat" cmpd="sng" algn="ctr">
+                      <a:solidFill>
+                        <a:schemeClr val="tx1"/>
+                      </a:solidFill>
+                      <a:prstDash val="solid"/>
+                      <a:round/>
+                      <a:headEnd type="none" w="med" len="med"/>
+                      <a:tailEnd type="none" w="med" len="med"/>
+                    </a:lnT>
+                    <a:lnB w="12700" cap="flat" cmpd="sng" algn="ctr">
+                      <a:solidFill>
+                        <a:schemeClr val="tx1"/>
+                      </a:solidFill>
+                      <a:prstDash val="solid"/>
+                      <a:round/>
+                      <a:headEnd type="none" w="med" len="med"/>
+                      <a:tailEnd type="none" w="med" len="med"/>
+                    </a:lnB>
+                    <a:solidFill>
+                      <a:srgbClr val="FFFFFF"/>
+                    </a:solidFill>
+                  </a:tcPr>
+                </a:tc>
+                <a:tc>
+                  <a:txBody>
+                    <a:bodyPr/>
+                    <a:lstStyle/>
+                    <a:p>
+                      <a:r>
+                        <a:rPr lang="ru-RU" sz="2400" b="0">
+                          <a:solidFill>
+                            <a:schemeClr val="tx1"/>
+                          </a:solidFill>
+                          <a:effectLst/>
+                          <a:latin typeface="+mn-lt"/>
+                        </a:rPr>
+                        <a:t>Удалить запись</a:t>
+                      </a:r>
+                    </a:p>
+                  </a:txBody>
+                  <a:tcPr marL="114300" marR="114300" marT="57150" marB="57150" anchor="ctr">
+                    <a:lnL w="12700" cap="flat" cmpd="sng" algn="ctr">
+                      <a:solidFill>
+                        <a:schemeClr val="tx1"/>
+                      </a:solidFill>
+                      <a:prstDash val="solid"/>
+                      <a:round/>
+                      <a:headEnd type="none" w="med" len="med"/>
+                      <a:tailEnd type="none" w="med" len="med"/>
+                    </a:lnL>
+                    <a:lnR w="12700" cap="flat" cmpd="sng" algn="ctr">
+                      <a:solidFill>
+                        <a:schemeClr val="tx1"/>
+                      </a:solidFill>
+                      <a:prstDash val="solid"/>
+                      <a:round/>
+                      <a:headEnd type="none" w="med" len="med"/>
+                      <a:tailEnd type="none" w="med" len="med"/>
+                    </a:lnR>
+                    <a:lnT w="12700" cap="flat" cmpd="sng" algn="ctr">
+                      <a:solidFill>
+                        <a:schemeClr val="tx1"/>
+                      </a:solidFill>
+                      <a:prstDash val="solid"/>
+                      <a:round/>
+                      <a:headEnd type="none" w="med" len="med"/>
+                      <a:tailEnd type="none" w="med" len="med"/>
+                    </a:lnT>
+                    <a:lnB w="12700" cap="flat" cmpd="sng" algn="ctr">
+                      <a:solidFill>
+                        <a:schemeClr val="tx1"/>
+                      </a:solidFill>
+                      <a:prstDash val="solid"/>
+                      <a:round/>
+                      <a:headEnd type="none" w="med" len="med"/>
+                      <a:tailEnd type="none" w="med" len="med"/>
+                    </a:lnB>
+                    <a:solidFill>
+                      <a:srgbClr val="FFFFFF"/>
+                    </a:solidFill>
+                  </a:tcPr>
+                </a:tc>
+                <a:extLst>
+                  <a:ext uri="{0D108BD9-81ED-4DB2-BD59-A6C34878D82A}">
+                    <a16:rowId xmlns:a16="http://schemas.microsoft.com/office/drawing/2014/main" val="4170059029"/>
+                  </a:ext>
+                </a:extLst>
+              </a:tr>
+              <a:tr h="0">
+                <a:tc>
+                  <a:txBody>
+                    <a:bodyPr/>
+                    <a:lstStyle/>
+                    <a:p>
+                      <a:r>
+                        <a:rPr lang="en-US" sz="2400" b="0">
+                          <a:solidFill>
+                            <a:schemeClr val="tx1"/>
+                          </a:solidFill>
+                          <a:effectLst/>
+                          <a:latin typeface="+mn-lt"/>
+                        </a:rPr>
+                        <a:t>GET /updateInfo</a:t>
+                      </a:r>
+                    </a:p>
+                  </a:txBody>
+                  <a:tcPr marL="114300" marR="114300" marT="57150" marB="57150" anchor="ctr">
+                    <a:lnL w="12700" cap="flat" cmpd="sng" algn="ctr">
+                      <a:solidFill>
+                        <a:schemeClr val="tx1"/>
+                      </a:solidFill>
+                      <a:prstDash val="solid"/>
+                      <a:round/>
+                      <a:headEnd type="none" w="med" len="med"/>
+                      <a:tailEnd type="none" w="med" len="med"/>
+                    </a:lnL>
+                    <a:lnR w="12700" cap="flat" cmpd="sng" algn="ctr">
+                      <a:solidFill>
+                        <a:schemeClr val="tx1"/>
+                      </a:solidFill>
+                      <a:prstDash val="solid"/>
+                      <a:round/>
+                      <a:headEnd type="none" w="med" len="med"/>
+                      <a:tailEnd type="none" w="med" len="med"/>
+                    </a:lnR>
+                    <a:lnT w="12700" cap="flat" cmpd="sng" algn="ctr">
+                      <a:solidFill>
+                        <a:schemeClr val="tx1"/>
+                      </a:solidFill>
+                      <a:prstDash val="solid"/>
+                      <a:round/>
+                      <a:headEnd type="none" w="med" len="med"/>
+                      <a:tailEnd type="none" w="med" len="med"/>
+                    </a:lnT>
+                    <a:lnB w="12700" cap="flat" cmpd="sng" algn="ctr">
+                      <a:solidFill>
+                        <a:schemeClr val="tx1"/>
+                      </a:solidFill>
+                      <a:prstDash val="solid"/>
+                      <a:round/>
+                      <a:headEnd type="none" w="med" len="med"/>
+                      <a:tailEnd type="none" w="med" len="med"/>
+                    </a:lnB>
+                    <a:solidFill>
+                      <a:srgbClr val="FFFFFF"/>
+                    </a:solidFill>
+                  </a:tcPr>
+                </a:tc>
+                <a:tc>
+                  <a:txBody>
+                    <a:bodyPr/>
+                    <a:lstStyle/>
+                    <a:p>
+                      <a:r>
+                        <a:rPr lang="en-US" sz="2400" b="0">
+                          <a:solidFill>
+                            <a:schemeClr val="tx1"/>
+                          </a:solidFill>
+                          <a:effectLst/>
+                          <a:latin typeface="+mn-lt"/>
+                        </a:rPr>
+                        <a:t>PATCH /users/me</a:t>
+                      </a:r>
+                    </a:p>
+                  </a:txBody>
+                  <a:tcPr marL="114300" marR="114300" marT="57150" marB="57150" anchor="ctr">
+                    <a:lnL w="12700" cap="flat" cmpd="sng" algn="ctr">
+                      <a:solidFill>
+                        <a:schemeClr val="tx1"/>
+                      </a:solidFill>
+                      <a:prstDash val="solid"/>
+                      <a:round/>
+                      <a:headEnd type="none" w="med" len="med"/>
+                      <a:tailEnd type="none" w="med" len="med"/>
+                    </a:lnL>
+                    <a:lnR w="12700" cap="flat" cmpd="sng" algn="ctr">
+                      <a:solidFill>
+                        <a:schemeClr val="tx1"/>
+                      </a:solidFill>
+                      <a:prstDash val="solid"/>
+                      <a:round/>
+                      <a:headEnd type="none" w="med" len="med"/>
+                      <a:tailEnd type="none" w="med" len="med"/>
+                    </a:lnR>
+                    <a:lnT w="12700" cap="flat" cmpd="sng" algn="ctr">
+                      <a:solidFill>
+                        <a:schemeClr val="tx1"/>
+                      </a:solidFill>
+                      <a:prstDash val="solid"/>
+                      <a:round/>
+                      <a:headEnd type="none" w="med" len="med"/>
+                      <a:tailEnd type="none" w="med" len="med"/>
+                    </a:lnT>
+                    <a:lnB w="12700" cap="flat" cmpd="sng" algn="ctr">
+                      <a:solidFill>
+                        <a:schemeClr val="tx1"/>
+                      </a:solidFill>
+                      <a:prstDash val="solid"/>
+                      <a:round/>
+                      <a:headEnd type="none" w="med" len="med"/>
+                      <a:tailEnd type="none" w="med" len="med"/>
+                    </a:lnB>
+                    <a:solidFill>
+                      <a:srgbClr val="FFFFFF"/>
+                    </a:solidFill>
+                  </a:tcPr>
+                </a:tc>
+                <a:tc>
+                  <a:txBody>
+                    <a:bodyPr/>
+                    <a:lstStyle/>
+                    <a:p>
+                      <a:r>
+                        <a:rPr lang="ru-RU" sz="2400" b="0" dirty="0">
+                          <a:solidFill>
+                            <a:schemeClr val="tx1"/>
+                          </a:solidFill>
+                          <a:effectLst/>
+                          <a:latin typeface="+mn-lt"/>
+                        </a:rPr>
+                        <a:t>Обновить часть данных</a:t>
+                      </a:r>
+                    </a:p>
+                  </a:txBody>
+                  <a:tcPr marL="114300" marR="114300" marT="57150" marB="57150" anchor="ctr">
+                    <a:lnL w="12700" cap="flat" cmpd="sng" algn="ctr">
+                      <a:solidFill>
+                        <a:schemeClr val="tx1"/>
+                      </a:solidFill>
+                      <a:prstDash val="solid"/>
+                      <a:round/>
+                      <a:headEnd type="none" w="med" len="med"/>
+                      <a:tailEnd type="none" w="med" len="med"/>
+                    </a:lnL>
+                    <a:lnR w="12700" cap="flat" cmpd="sng" algn="ctr">
+                      <a:solidFill>
+                        <a:schemeClr val="tx1"/>
+                      </a:solidFill>
+                      <a:prstDash val="solid"/>
+                      <a:round/>
+                      <a:headEnd type="none" w="med" len="med"/>
+                      <a:tailEnd type="none" w="med" len="med"/>
+                    </a:lnR>
+                    <a:lnT w="12700" cap="flat" cmpd="sng" algn="ctr">
+                      <a:solidFill>
+                        <a:schemeClr val="tx1"/>
+                      </a:solidFill>
+                      <a:prstDash val="solid"/>
+                      <a:round/>
+                      <a:headEnd type="none" w="med" len="med"/>
+                      <a:tailEnd type="none" w="med" len="med"/>
+                    </a:lnT>
+                    <a:lnB w="12700" cap="flat" cmpd="sng" algn="ctr">
+                      <a:solidFill>
+                        <a:schemeClr val="tx1"/>
+                      </a:solidFill>
+                      <a:prstDash val="solid"/>
+                      <a:round/>
+                      <a:headEnd type="none" w="med" len="med"/>
+                      <a:tailEnd type="none" w="med" len="med"/>
+                    </a:lnB>
+                    <a:solidFill>
+                      <a:srgbClr val="FFFFFF"/>
+                    </a:solidFill>
+                  </a:tcPr>
+                </a:tc>
+                <a:extLst>
+                  <a:ext uri="{0D108BD9-81ED-4DB2-BD59-A6C34878D82A}">
+                    <a16:rowId xmlns:a16="http://schemas.microsoft.com/office/drawing/2014/main" val="517993408"/>
+                  </a:ext>
+                </a:extLst>
+              </a:tr>
+            </a:tbl>
+          </a:graphicData>
+        </a:graphic>
+      </p:graphicFrame>
+    </p:spTree>
+    <p:extLst>
+      <p:ext uri="{BB962C8B-B14F-4D97-AF65-F5344CB8AC3E}">
+        <p14:creationId xmlns:p14="http://schemas.microsoft.com/office/powerpoint/2010/main" val="1660899929"/>
+      </p:ext>
+    </p:extLst>
+  </p:cSld>
+  <p:clrMapOvr>
+    <a:masterClrMapping/>
+  </p:clrMapOvr>
+  <p:timing>
+    <p:tnLst>
+      <p:par>
+        <p:cTn id="1" dur="indefinite" restart="never" nodeType="tmRoot"/>
+      </p:par>
+    </p:tnLst>
+  </p:timing>
+</p:sld>
+</file>
+
+<file path=ppt/slides/slide2.xml><?xml version="1.0" encoding="utf-8"?>
+<p:sld xmlns:a="http://schemas.openxmlformats.org/drawingml/2006/main" xmlns:r="http://schemas.openxmlformats.org/officeDocument/2006/relationships" xmlns:p="http://schemas.openxmlformats.org/presentationml/2006/main">
+  <p:cSld>
+    <p:spTree>
+      <p:nvGrpSpPr>
+        <p:cNvPr id="1" name=""/>
+        <p:cNvGrpSpPr/>
+        <p:nvPr/>
+      </p:nvGrpSpPr>
+      <p:grpSpPr>
+        <a:xfrm>
+          <a:off x="0" y="0"/>
+          <a:ext cx="0" cy="0"/>
+          <a:chOff x="0" y="0"/>
+          <a:chExt cx="0" cy="0"/>
+        </a:xfrm>
+      </p:grpSpPr>
+      <p:sp>
+        <p:nvSpPr>
+          <p:cNvPr id="11" name="Rectangle 28" descr="Светлый диагональный 2"/>
+          <p:cNvSpPr>
+            <a:spLocks noChangeArrowheads="1"/>
+          </p:cNvSpPr>
+          <p:nvPr/>
+        </p:nvSpPr>
+        <p:spPr bwMode="auto">
+          <a:xfrm>
+            <a:off x="0" y="0"/>
+            <a:ext cx="12192000" cy="654357"/>
+          </a:xfrm>
+          <a:prstGeom prst="rect">
+            <a:avLst/>
+          </a:prstGeom>
+          <a:pattFill prst="ltUpDiag">
+            <a:fgClr>
+              <a:schemeClr val="accent1">
+                <a:lumMod val="40000"/>
+                <a:lumOff val="60000"/>
+              </a:schemeClr>
+            </a:fgClr>
+            <a:bgClr>
+              <a:srgbClr val="FFFFFF"/>
+            </a:bgClr>
+          </a:pattFill>
+          <a:ln w="15875" algn="ctr">
+            <a:solidFill>
+              <a:schemeClr val="accent5">
+                <a:lumMod val="50000"/>
+              </a:schemeClr>
+            </a:solidFill>
+            <a:miter lim="800000"/>
+            <a:headEnd/>
+            <a:tailEnd/>
+          </a:ln>
+          <a:effectLst/>
+        </p:spPr>
+        <p:txBody>
+          <a:bodyPr vert="horz" wrap="square" lIns="18000" tIns="18000" rIns="18000" bIns="18000" numCol="1" anchor="ctr" anchorCtr="0" compatLnSpc="1">
+            <a:prstTxWarp prst="textNoShape">
+              <a:avLst/>
+            </a:prstTxWarp>
+          </a:bodyPr>
+          <a:lstStyle/>
+          <a:p>
+            <a:pPr algn="ctr"/>
+            <a:r>
+              <a:rPr lang="ru-RU" sz="2800" b="1" dirty="0">
+                <a:solidFill>
+                  <a:schemeClr val="tx2">
+                    <a:lumMod val="50000"/>
+                  </a:schemeClr>
+                </a:solidFill>
+                <a:latin typeface="Bookman Old Style" panose="02050604050505020204" pitchFamily="18" charset="0"/>
+                <a:cs typeface="Times New Roman" panose="02020603050405020304" pitchFamily="18" charset="0"/>
+              </a:rPr>
+              <a:t>Философия Чистой архитектуры</a:t>
+            </a:r>
           </a:p>
         </p:txBody>
       </p:sp>
@@ -3093,6 +8559,2509 @@
     <p:extLst>
       <p:ext uri="{BB962C8B-B14F-4D97-AF65-F5344CB8AC3E}">
         <p14:creationId xmlns:p14="http://schemas.microsoft.com/office/powerpoint/2010/main" val="1458695104"/>
+      </p:ext>
+    </p:extLst>
+  </p:cSld>
+  <p:clrMapOvr>
+    <a:masterClrMapping/>
+  </p:clrMapOvr>
+  <p:timing>
+    <p:tnLst>
+      <p:par>
+        <p:cTn id="1" dur="indefinite" restart="never" nodeType="tmRoot"/>
+      </p:par>
+    </p:tnLst>
+  </p:timing>
+</p:sld>
+</file>
+
+<file path=ppt/slides/slide20.xml><?xml version="1.0" encoding="utf-8"?>
+<p:sld xmlns:a="http://schemas.openxmlformats.org/drawingml/2006/main" xmlns:r="http://schemas.openxmlformats.org/officeDocument/2006/relationships" xmlns:p="http://schemas.openxmlformats.org/presentationml/2006/main">
+  <p:cSld>
+    <p:spTree>
+      <p:nvGrpSpPr>
+        <p:cNvPr id="1" name=""/>
+        <p:cNvGrpSpPr/>
+        <p:nvPr/>
+      </p:nvGrpSpPr>
+      <p:grpSpPr>
+        <a:xfrm>
+          <a:off x="0" y="0"/>
+          <a:ext cx="0" cy="0"/>
+          <a:chOff x="0" y="0"/>
+          <a:chExt cx="0" cy="0"/>
+        </a:xfrm>
+      </p:grpSpPr>
+      <p:sp>
+        <p:nvSpPr>
+          <p:cNvPr id="7" name="Прямоугольник 6"/>
+          <p:cNvSpPr/>
+          <p:nvPr/>
+        </p:nvSpPr>
+        <p:spPr>
+          <a:xfrm>
+            <a:off x="0" y="0"/>
+            <a:ext cx="12192000" cy="6186309"/>
+          </a:xfrm>
+          <a:prstGeom prst="rect">
+            <a:avLst/>
+          </a:prstGeom>
+        </p:spPr>
+        <p:txBody>
+          <a:bodyPr wrap="square" lIns="360000" rIns="360000">
+            <a:spAutoFit/>
+          </a:bodyPr>
+          <a:lstStyle/>
+          <a:p>
+            <a:pPr>
+              <a:lnSpc>
+                <a:spcPct val="150000"/>
+              </a:lnSpc>
+            </a:pPr>
+            <a:r>
+              <a:rPr lang="ru-RU" sz="2400" b="1" dirty="0"/>
+              <a:t>Принцип </a:t>
+            </a:r>
+            <a:r>
+              <a:rPr lang="ru-RU" sz="2400" b="1" dirty="0" err="1"/>
+              <a:t>Stateless</a:t>
+            </a:r>
+            <a:r>
+              <a:rPr lang="ru-RU" sz="2400" b="1" dirty="0"/>
+              <a:t> (Без состояния)</a:t>
+            </a:r>
+          </a:p>
+          <a:p>
+            <a:pPr>
+              <a:lnSpc>
+                <a:spcPct val="150000"/>
+              </a:lnSpc>
+            </a:pPr>
+            <a:r>
+              <a:rPr lang="ru-RU" sz="2400" dirty="0"/>
+              <a:t>Это важнейшее требование для масштабируемости систем.</a:t>
+            </a:r>
+          </a:p>
+          <a:p>
+            <a:pPr>
+              <a:lnSpc>
+                <a:spcPct val="150000"/>
+              </a:lnSpc>
+            </a:pPr>
+            <a:r>
+              <a:rPr lang="ru-RU" sz="2400" b="1" dirty="0"/>
+              <a:t>Суть:</a:t>
+            </a:r>
+            <a:r>
+              <a:rPr lang="ru-RU" sz="2400" dirty="0"/>
+              <a:t> Сервер не должен «помнить» клиента между запросами. Каждый запрос от клиента должен содержать </a:t>
+            </a:r>
+            <a:r>
+              <a:rPr lang="ru-RU" sz="2400" b="1" dirty="0"/>
+              <a:t>всю информацию</a:t>
+            </a:r>
+            <a:r>
+              <a:rPr lang="ru-RU" sz="2400" dirty="0"/>
+              <a:t>, необходимую для его выполнения (например, </a:t>
+            </a:r>
+            <a:r>
+              <a:rPr lang="ru-RU" sz="2400" dirty="0" err="1"/>
+              <a:t>токен</a:t>
+            </a:r>
+            <a:r>
+              <a:rPr lang="ru-RU" sz="2400" dirty="0"/>
+              <a:t> авторизации).</a:t>
+            </a:r>
+          </a:p>
+          <a:p>
+            <a:pPr marL="342900" indent="-342900">
+              <a:lnSpc>
+                <a:spcPct val="150000"/>
+              </a:lnSpc>
+              <a:buFont typeface="Arial" panose="020B0604020202020204" pitchFamily="34" charset="0"/>
+              <a:buChar char="•"/>
+            </a:pPr>
+            <a:r>
+              <a:rPr lang="ru-RU" sz="2400" b="1" dirty="0"/>
+              <a:t>Как было раньше:</a:t>
+            </a:r>
+            <a:r>
+              <a:rPr lang="ru-RU" sz="2400" dirty="0"/>
+              <a:t> Сервер хранил «Сессию». Если сервер перезагружался, пользователь «вылетал» из системы.</a:t>
+            </a:r>
+          </a:p>
+          <a:p>
+            <a:pPr marL="342900" indent="-342900">
+              <a:lnSpc>
+                <a:spcPct val="150000"/>
+              </a:lnSpc>
+              <a:buFont typeface="Arial" panose="020B0604020202020204" pitchFamily="34" charset="0"/>
+              <a:buChar char="•"/>
+            </a:pPr>
+            <a:r>
+              <a:rPr lang="ru-RU" sz="2400" b="1" dirty="0"/>
+              <a:t>Как в REST:</a:t>
+            </a:r>
+            <a:r>
+              <a:rPr lang="ru-RU" sz="2400" dirty="0"/>
+              <a:t> Клиент отправляет </a:t>
+            </a:r>
+            <a:r>
+              <a:rPr lang="ru-RU" sz="2400" dirty="0" err="1"/>
+              <a:t>токен</a:t>
+            </a:r>
+            <a:r>
+              <a:rPr lang="ru-RU" sz="2400" dirty="0"/>
+              <a:t> в каждом заголовке.</a:t>
+            </a:r>
+          </a:p>
+          <a:p>
+            <a:pPr marL="342900" indent="-342900">
+              <a:lnSpc>
+                <a:spcPct val="150000"/>
+              </a:lnSpc>
+              <a:buFont typeface="Arial" panose="020B0604020202020204" pitchFamily="34" charset="0"/>
+              <a:buChar char="•"/>
+            </a:pPr>
+            <a:r>
+              <a:rPr lang="ru-RU" sz="2400" b="1" dirty="0"/>
+              <a:t>Профит:</a:t>
+            </a:r>
+            <a:r>
+              <a:rPr lang="ru-RU" sz="2400" dirty="0"/>
+              <a:t> Если ваше приложение вырастет, вы сможете запустить 10 одинаковых серверов, и запрос пользователя сможет обработать </a:t>
+            </a:r>
+            <a:r>
+              <a:rPr lang="ru-RU" sz="2400" b="1" dirty="0"/>
+              <a:t>любой</a:t>
+            </a:r>
+            <a:r>
+              <a:rPr lang="ru-RU" sz="2400" dirty="0"/>
+              <a:t> из них.</a:t>
+            </a:r>
+          </a:p>
+        </p:txBody>
+      </p:sp>
+    </p:spTree>
+    <p:extLst>
+      <p:ext uri="{BB962C8B-B14F-4D97-AF65-F5344CB8AC3E}">
+        <p14:creationId xmlns:p14="http://schemas.microsoft.com/office/powerpoint/2010/main" val="1148015402"/>
+      </p:ext>
+    </p:extLst>
+  </p:cSld>
+  <p:clrMapOvr>
+    <a:masterClrMapping/>
+  </p:clrMapOvr>
+  <p:timing>
+    <p:tnLst>
+      <p:par>
+        <p:cTn id="1" dur="indefinite" restart="never" nodeType="tmRoot"/>
+      </p:par>
+    </p:tnLst>
+  </p:timing>
+</p:sld>
+</file>
+
+<file path=ppt/slides/slide21.xml><?xml version="1.0" encoding="utf-8"?>
+<p:sld xmlns:a="http://schemas.openxmlformats.org/drawingml/2006/main" xmlns:r="http://schemas.openxmlformats.org/officeDocument/2006/relationships" xmlns:p="http://schemas.openxmlformats.org/presentationml/2006/main">
+  <p:cSld>
+    <p:spTree>
+      <p:nvGrpSpPr>
+        <p:cNvPr id="1" name=""/>
+        <p:cNvGrpSpPr/>
+        <p:nvPr/>
+      </p:nvGrpSpPr>
+      <p:grpSpPr>
+        <a:xfrm>
+          <a:off x="0" y="0"/>
+          <a:ext cx="0" cy="0"/>
+          <a:chOff x="0" y="0"/>
+          <a:chExt cx="0" cy="0"/>
+        </a:xfrm>
+      </p:grpSpPr>
+      <p:sp>
+        <p:nvSpPr>
+          <p:cNvPr id="7" name="Прямоугольник 6"/>
+          <p:cNvSpPr/>
+          <p:nvPr/>
+        </p:nvSpPr>
+        <p:spPr>
+          <a:xfrm>
+            <a:off x="0" y="0"/>
+            <a:ext cx="12192000" cy="5632311"/>
+          </a:xfrm>
+          <a:prstGeom prst="rect">
+            <a:avLst/>
+          </a:prstGeom>
+        </p:spPr>
+        <p:txBody>
+          <a:bodyPr wrap="square" lIns="360000" rIns="360000">
+            <a:spAutoFit/>
+          </a:bodyPr>
+          <a:lstStyle/>
+          <a:p>
+            <a:pPr>
+              <a:lnSpc>
+                <a:spcPct val="150000"/>
+              </a:lnSpc>
+            </a:pPr>
+            <a:r>
+              <a:rPr lang="ru-RU" sz="2400" b="1" dirty="0"/>
+              <a:t>Ключевые принципы </a:t>
+            </a:r>
+            <a:r>
+              <a:rPr lang="ru-RU" sz="2400" b="1" dirty="0" err="1"/>
+              <a:t>RESTful</a:t>
+            </a:r>
+            <a:r>
+              <a:rPr lang="ru-RU" sz="2400" b="1" dirty="0"/>
+              <a:t> систем</a:t>
+            </a:r>
+          </a:p>
+          <a:p>
+            <a:pPr marL="457200" indent="-457200">
+              <a:lnSpc>
+                <a:spcPct val="150000"/>
+              </a:lnSpc>
+              <a:buFont typeface="+mj-lt"/>
+              <a:buAutoNum type="arabicPeriod"/>
+            </a:pPr>
+            <a:r>
+              <a:rPr lang="ru-RU" sz="2400" b="1" dirty="0"/>
+              <a:t>Отделение клиента от сервера:</a:t>
+            </a:r>
+            <a:r>
+              <a:rPr lang="ru-RU" sz="2400" dirty="0"/>
+              <a:t> </a:t>
+            </a:r>
+            <a:r>
+              <a:rPr lang="ru-RU" sz="2400" dirty="0" smtClean="0"/>
+              <a:t>Клиент </a:t>
+            </a:r>
+            <a:r>
+              <a:rPr lang="ru-RU" sz="2400" dirty="0"/>
+              <a:t>(</a:t>
+            </a:r>
+            <a:r>
+              <a:rPr lang="ru-RU" sz="2400" dirty="0" err="1" smtClean="0"/>
+              <a:t>фронтенд</a:t>
+            </a:r>
+            <a:r>
+              <a:rPr lang="ru-RU" sz="2400" dirty="0" smtClean="0"/>
+              <a:t>) не знает о базе </a:t>
+            </a:r>
+            <a:r>
+              <a:rPr lang="ru-RU" sz="2400" dirty="0"/>
+              <a:t>данных. </a:t>
+            </a:r>
+            <a:r>
+              <a:rPr lang="ru-RU" sz="2400" dirty="0" smtClean="0"/>
+              <a:t>Сервер не знает о дизайне кнопок</a:t>
+            </a:r>
+            <a:r>
+              <a:rPr lang="ru-RU" sz="2400" dirty="0"/>
+              <a:t>. Они связаны только общим интерфейсом (API).</a:t>
+            </a:r>
+          </a:p>
+          <a:p>
+            <a:pPr marL="457200" indent="-457200">
+              <a:lnSpc>
+                <a:spcPct val="150000"/>
+              </a:lnSpc>
+              <a:buFont typeface="+mj-lt"/>
+              <a:buAutoNum type="arabicPeriod"/>
+            </a:pPr>
+            <a:r>
+              <a:rPr lang="ru-RU" sz="2400" b="1" dirty="0"/>
+              <a:t>Единообразие интерфейса:</a:t>
+            </a:r>
+            <a:r>
+              <a:rPr lang="ru-RU" sz="2400" dirty="0"/>
+              <a:t> Используются стандартные методы HTTP и стандартные форматы данных (обычно </a:t>
+            </a:r>
+            <a:r>
+              <a:rPr lang="ru-RU" sz="2400" b="1" dirty="0"/>
+              <a:t>JSON</a:t>
+            </a:r>
+            <a:r>
+              <a:rPr lang="ru-RU" sz="2400" dirty="0"/>
+              <a:t>).</a:t>
+            </a:r>
+          </a:p>
+          <a:p>
+            <a:pPr marL="457200" indent="-457200">
+              <a:lnSpc>
+                <a:spcPct val="150000"/>
+              </a:lnSpc>
+              <a:buFont typeface="+mj-lt"/>
+              <a:buAutoNum type="arabicPeriod"/>
+            </a:pPr>
+            <a:r>
+              <a:rPr lang="ru-RU" sz="2400" b="1" dirty="0" err="1"/>
+              <a:t>Кэшируемость</a:t>
+            </a:r>
+            <a:r>
+              <a:rPr lang="ru-RU" sz="2400" b="1" dirty="0"/>
+              <a:t>:</a:t>
+            </a:r>
+            <a:r>
+              <a:rPr lang="ru-RU" sz="2400" dirty="0"/>
+              <a:t> Ответы сервера должны помечаться как кэшируемые или нет. Это экономит ресурсы сети.</a:t>
+            </a:r>
+          </a:p>
+          <a:p>
+            <a:pPr marL="457200" indent="-457200">
+              <a:lnSpc>
+                <a:spcPct val="150000"/>
+              </a:lnSpc>
+              <a:buFont typeface="+mj-lt"/>
+              <a:buAutoNum type="arabicPeriod"/>
+            </a:pPr>
+            <a:r>
+              <a:rPr lang="ru-RU" sz="2400" b="1" dirty="0" err="1"/>
+              <a:t>Многоуровневость</a:t>
+            </a:r>
+            <a:r>
+              <a:rPr lang="ru-RU" sz="2400" b="1" dirty="0"/>
+              <a:t>:</a:t>
+            </a:r>
+            <a:r>
+              <a:rPr lang="ru-RU" sz="2400" dirty="0"/>
+              <a:t> Клиент не должен знать, общается он напрямую с сервером или через промежуточный узел (прокси, </a:t>
+            </a:r>
+            <a:r>
+              <a:rPr lang="ru-RU" sz="2400" dirty="0" err="1"/>
+              <a:t>балансировщик</a:t>
+            </a:r>
+            <a:r>
+              <a:rPr lang="ru-RU" sz="2400" dirty="0"/>
+              <a:t>).</a:t>
+            </a:r>
+          </a:p>
+        </p:txBody>
+      </p:sp>
+    </p:spTree>
+    <p:extLst>
+      <p:ext uri="{BB962C8B-B14F-4D97-AF65-F5344CB8AC3E}">
+        <p14:creationId xmlns:p14="http://schemas.microsoft.com/office/powerpoint/2010/main" val="2896646279"/>
+      </p:ext>
+    </p:extLst>
+  </p:cSld>
+  <p:clrMapOvr>
+    <a:masterClrMapping/>
+  </p:clrMapOvr>
+  <p:timing>
+    <p:tnLst>
+      <p:par>
+        <p:cTn id="1" dur="indefinite" restart="never" nodeType="tmRoot"/>
+      </p:par>
+    </p:tnLst>
+  </p:timing>
+</p:sld>
+</file>
+
+<file path=ppt/slides/slide22.xml><?xml version="1.0" encoding="utf-8"?>
+<p:sld xmlns:a="http://schemas.openxmlformats.org/drawingml/2006/main" xmlns:r="http://schemas.openxmlformats.org/officeDocument/2006/relationships" xmlns:p="http://schemas.openxmlformats.org/presentationml/2006/main">
+  <p:cSld>
+    <p:spTree>
+      <p:nvGrpSpPr>
+        <p:cNvPr id="1" name=""/>
+        <p:cNvGrpSpPr/>
+        <p:nvPr/>
+      </p:nvGrpSpPr>
+      <p:grpSpPr>
+        <a:xfrm>
+          <a:off x="0" y="0"/>
+          <a:ext cx="0" cy="0"/>
+          <a:chOff x="0" y="0"/>
+          <a:chExt cx="0" cy="0"/>
+        </a:xfrm>
+      </p:grpSpPr>
+      <p:sp>
+        <p:nvSpPr>
+          <p:cNvPr id="7" name="Прямоугольник 6"/>
+          <p:cNvSpPr/>
+          <p:nvPr/>
+        </p:nvSpPr>
+        <p:spPr>
+          <a:xfrm>
+            <a:off x="0" y="0"/>
+            <a:ext cx="12192000" cy="5632311"/>
+          </a:xfrm>
+          <a:prstGeom prst="rect">
+            <a:avLst/>
+          </a:prstGeom>
+        </p:spPr>
+        <p:txBody>
+          <a:bodyPr wrap="square" lIns="360000" rIns="360000">
+            <a:spAutoFit/>
+          </a:bodyPr>
+          <a:lstStyle/>
+          <a:p>
+            <a:pPr>
+              <a:lnSpc>
+                <a:spcPct val="150000"/>
+              </a:lnSpc>
+            </a:pPr>
+            <a:r>
+              <a:rPr lang="ru-RU" sz="2400" b="1" dirty="0"/>
+              <a:t>Итоги: Почему REST идеален для Чистой Архитектуры?</a:t>
+            </a:r>
+          </a:p>
+          <a:p>
+            <a:pPr>
+              <a:lnSpc>
+                <a:spcPct val="150000"/>
+              </a:lnSpc>
+            </a:pPr>
+            <a:r>
+              <a:rPr lang="ru-RU" sz="2400" dirty="0"/>
+              <a:t>В нашей «луковице» REST API — это всего лишь </a:t>
+            </a:r>
+            <a:r>
+              <a:rPr lang="ru-RU" sz="2400" b="1" dirty="0"/>
+              <a:t>слой UI (внешнее кольцо)</a:t>
+            </a:r>
+            <a:r>
+              <a:rPr lang="ru-RU" sz="2400" dirty="0"/>
+              <a:t>.</a:t>
+            </a:r>
+          </a:p>
+          <a:p>
+            <a:pPr marL="342900" indent="-342900">
+              <a:lnSpc>
+                <a:spcPct val="150000"/>
+              </a:lnSpc>
+              <a:buFont typeface="Arial" panose="020B0604020202020204" pitchFamily="34" charset="0"/>
+              <a:buChar char="•"/>
+            </a:pPr>
+            <a:r>
+              <a:rPr lang="ru-RU" sz="2400" dirty="0"/>
+              <a:t>Контроллеры API принимают REST-запросы.</a:t>
+            </a:r>
+          </a:p>
+          <a:p>
+            <a:pPr marL="342900" indent="-342900">
+              <a:lnSpc>
+                <a:spcPct val="150000"/>
+              </a:lnSpc>
+              <a:buFont typeface="Arial" panose="020B0604020202020204" pitchFamily="34" charset="0"/>
+              <a:buChar char="•"/>
+            </a:pPr>
+            <a:r>
+              <a:rPr lang="ru-RU" sz="2400" dirty="0"/>
+              <a:t>Переводят их в команды для слоя </a:t>
+            </a:r>
+            <a:r>
+              <a:rPr lang="ru-RU" sz="2400" b="1" dirty="0" err="1"/>
+              <a:t>Application</a:t>
+            </a:r>
+            <a:r>
+              <a:rPr lang="ru-RU" sz="2400" dirty="0"/>
+              <a:t>.</a:t>
+            </a:r>
+          </a:p>
+          <a:p>
+            <a:pPr marL="342900" indent="-342900">
+              <a:lnSpc>
+                <a:spcPct val="150000"/>
+              </a:lnSpc>
+              <a:buFont typeface="Arial" panose="020B0604020202020204" pitchFamily="34" charset="0"/>
+              <a:buChar char="•"/>
+            </a:pPr>
+            <a:r>
+              <a:rPr lang="ru-RU" sz="2400" dirty="0"/>
+              <a:t>Возвращают ответ в формате JSON.</a:t>
+            </a:r>
+          </a:p>
+          <a:p>
+            <a:pPr>
+              <a:lnSpc>
+                <a:spcPct val="150000"/>
+              </a:lnSpc>
+            </a:pPr>
+            <a:r>
+              <a:rPr lang="ru-RU" sz="2400" b="1" dirty="0"/>
+              <a:t>Результат:</a:t>
+            </a:r>
+            <a:r>
+              <a:rPr lang="ru-RU" sz="2400" dirty="0"/>
+              <a:t> Вы можете полностью переписать внутренности приложения, сменить базу данных или язык программирования ядра, но если ваше </a:t>
+            </a:r>
+            <a:r>
+              <a:rPr lang="ru-RU" sz="2400" b="1" dirty="0"/>
+              <a:t>REST API</a:t>
+            </a:r>
+            <a:r>
+              <a:rPr lang="ru-RU" sz="2400" dirty="0"/>
+              <a:t> останется прежним — все мобильные приложения и сайты продолжат работать без единой правки кода.</a:t>
+            </a:r>
+          </a:p>
+        </p:txBody>
+      </p:sp>
+    </p:spTree>
+    <p:extLst>
+      <p:ext uri="{BB962C8B-B14F-4D97-AF65-F5344CB8AC3E}">
+        <p14:creationId xmlns:p14="http://schemas.microsoft.com/office/powerpoint/2010/main" val="1933092022"/>
+      </p:ext>
+    </p:extLst>
+  </p:cSld>
+  <p:clrMapOvr>
+    <a:masterClrMapping/>
+  </p:clrMapOvr>
+  <p:timing>
+    <p:tnLst>
+      <p:par>
+        <p:cTn id="1" dur="indefinite" restart="never" nodeType="tmRoot"/>
+      </p:par>
+    </p:tnLst>
+  </p:timing>
+</p:sld>
+</file>
+
+<file path=ppt/slides/slide23.xml><?xml version="1.0" encoding="utf-8"?>
+<p:sld xmlns:a="http://schemas.openxmlformats.org/drawingml/2006/main" xmlns:r="http://schemas.openxmlformats.org/officeDocument/2006/relationships" xmlns:p="http://schemas.openxmlformats.org/presentationml/2006/main">
+  <p:cSld>
+    <p:spTree>
+      <p:nvGrpSpPr>
+        <p:cNvPr id="1" name=""/>
+        <p:cNvGrpSpPr/>
+        <p:nvPr/>
+      </p:nvGrpSpPr>
+      <p:grpSpPr>
+        <a:xfrm>
+          <a:off x="0" y="0"/>
+          <a:ext cx="0" cy="0"/>
+          <a:chOff x="0" y="0"/>
+          <a:chExt cx="0" cy="0"/>
+        </a:xfrm>
+      </p:grpSpPr>
+      <p:sp>
+        <p:nvSpPr>
+          <p:cNvPr id="11" name="Rectangle 28" descr="Светлый диагональный 2"/>
+          <p:cNvSpPr>
+            <a:spLocks noChangeArrowheads="1"/>
+          </p:cNvSpPr>
+          <p:nvPr/>
+        </p:nvSpPr>
+        <p:spPr bwMode="auto">
+          <a:xfrm>
+            <a:off x="0" y="0"/>
+            <a:ext cx="12192000" cy="654357"/>
+          </a:xfrm>
+          <a:prstGeom prst="rect">
+            <a:avLst/>
+          </a:prstGeom>
+          <a:pattFill prst="ltUpDiag">
+            <a:fgClr>
+              <a:schemeClr val="accent1">
+                <a:lumMod val="40000"/>
+                <a:lumOff val="60000"/>
+              </a:schemeClr>
+            </a:fgClr>
+            <a:bgClr>
+              <a:srgbClr val="FFFFFF"/>
+            </a:bgClr>
+          </a:pattFill>
+          <a:ln w="15875" algn="ctr">
+            <a:solidFill>
+              <a:schemeClr val="accent5">
+                <a:lumMod val="50000"/>
+              </a:schemeClr>
+            </a:solidFill>
+            <a:miter lim="800000"/>
+            <a:headEnd/>
+            <a:tailEnd/>
+          </a:ln>
+          <a:effectLst/>
+        </p:spPr>
+        <p:txBody>
+          <a:bodyPr vert="horz" wrap="square" lIns="18000" tIns="18000" rIns="18000" bIns="18000" numCol="1" anchor="ctr" anchorCtr="0" compatLnSpc="1">
+            <a:prstTxWarp prst="textNoShape">
+              <a:avLst/>
+            </a:prstTxWarp>
+          </a:bodyPr>
+          <a:lstStyle/>
+          <a:p>
+            <a:pPr algn="ctr"/>
+            <a:r>
+              <a:rPr lang="en-US" sz="2800" b="1" dirty="0">
+                <a:solidFill>
+                  <a:schemeClr val="tx2">
+                    <a:lumMod val="50000"/>
+                  </a:schemeClr>
+                </a:solidFill>
+                <a:latin typeface="Bookman Old Style" panose="02050604050505020204" pitchFamily="18" charset="0"/>
+                <a:cs typeface="Times New Roman" panose="02020603050405020304" pitchFamily="18" charset="0"/>
+              </a:rPr>
+              <a:t>Swagger — </a:t>
+            </a:r>
+            <a:r>
+              <a:rPr lang="ru-RU" sz="2800" b="1" dirty="0">
+                <a:solidFill>
+                  <a:schemeClr val="tx2">
+                    <a:lumMod val="50000"/>
+                  </a:schemeClr>
+                </a:solidFill>
+                <a:latin typeface="Bookman Old Style" panose="02050604050505020204" pitchFamily="18" charset="0"/>
+                <a:cs typeface="Times New Roman" panose="02020603050405020304" pitchFamily="18" charset="0"/>
+              </a:rPr>
+              <a:t>лицо вашего </a:t>
+            </a:r>
+            <a:r>
+              <a:rPr lang="en-US" sz="2800" b="1" dirty="0">
+                <a:solidFill>
+                  <a:schemeClr val="tx2">
+                    <a:lumMod val="50000"/>
+                  </a:schemeClr>
+                </a:solidFill>
+                <a:latin typeface="Bookman Old Style" panose="02050604050505020204" pitchFamily="18" charset="0"/>
+                <a:cs typeface="Times New Roman" panose="02020603050405020304" pitchFamily="18" charset="0"/>
+              </a:rPr>
+              <a:t>API</a:t>
+            </a:r>
+            <a:endParaRPr lang="ru-RU" sz="2800" b="1" dirty="0">
+              <a:solidFill>
+                <a:schemeClr val="tx2">
+                  <a:lumMod val="50000"/>
+                </a:schemeClr>
+              </a:solidFill>
+              <a:latin typeface="Bookman Old Style" panose="02050604050505020204" pitchFamily="18" charset="0"/>
+              <a:cs typeface="Times New Roman" panose="02020603050405020304" pitchFamily="18" charset="0"/>
+            </a:endParaRPr>
+          </a:p>
+        </p:txBody>
+      </p:sp>
+      <p:sp>
+        <p:nvSpPr>
+          <p:cNvPr id="7" name="Прямоугольник 6"/>
+          <p:cNvSpPr/>
+          <p:nvPr/>
+        </p:nvSpPr>
+        <p:spPr>
+          <a:xfrm>
+            <a:off x="0" y="654357"/>
+            <a:ext cx="12192000" cy="5632311"/>
+          </a:xfrm>
+          <a:prstGeom prst="rect">
+            <a:avLst/>
+          </a:prstGeom>
+        </p:spPr>
+        <p:txBody>
+          <a:bodyPr wrap="square" lIns="360000" rIns="360000">
+            <a:spAutoFit/>
+          </a:bodyPr>
+          <a:lstStyle/>
+          <a:p>
+            <a:pPr>
+              <a:lnSpc>
+                <a:spcPct val="150000"/>
+              </a:lnSpc>
+            </a:pPr>
+            <a:r>
+              <a:rPr lang="ru-RU" sz="2400" b="1" dirty="0"/>
+              <a:t>Проблема:</a:t>
+            </a:r>
+            <a:r>
+              <a:rPr lang="ru-RU" sz="2400" dirty="0"/>
+              <a:t> </a:t>
+            </a:r>
+            <a:r>
+              <a:rPr lang="ru-RU" sz="2400" dirty="0" err="1"/>
+              <a:t>Бэкенд</a:t>
+            </a:r>
+            <a:r>
+              <a:rPr lang="ru-RU" sz="2400" dirty="0"/>
+              <a:t>-разработчик написал десятки контроллеров и методов. Как </a:t>
+            </a:r>
+            <a:r>
+              <a:rPr lang="ru-RU" sz="2400" dirty="0" err="1"/>
+              <a:t>фронтенд</a:t>
+            </a:r>
+            <a:r>
+              <a:rPr lang="ru-RU" sz="2400" dirty="0"/>
+              <a:t>-разработчику или </a:t>
+            </a:r>
+            <a:r>
+              <a:rPr lang="ru-RU" sz="2400" dirty="0" err="1"/>
+              <a:t>тестировщику</a:t>
+            </a:r>
+            <a:r>
+              <a:rPr lang="ru-RU" sz="2400" dirty="0"/>
+              <a:t> узнать:</a:t>
+            </a:r>
+          </a:p>
+          <a:p>
+            <a:pPr marL="342900" indent="-342900">
+              <a:lnSpc>
+                <a:spcPct val="150000"/>
+              </a:lnSpc>
+              <a:buFont typeface="Arial" panose="020B0604020202020204" pitchFamily="34" charset="0"/>
+              <a:buChar char="•"/>
+            </a:pPr>
+            <a:r>
+              <a:rPr lang="ru-RU" sz="2400" dirty="0"/>
+              <a:t>Какие адреса существуют?</a:t>
+            </a:r>
+          </a:p>
+          <a:p>
+            <a:pPr marL="342900" indent="-342900">
+              <a:lnSpc>
+                <a:spcPct val="150000"/>
+              </a:lnSpc>
+              <a:buFont typeface="Arial" panose="020B0604020202020204" pitchFamily="34" charset="0"/>
+              <a:buChar char="•"/>
+            </a:pPr>
+            <a:r>
+              <a:rPr lang="ru-RU" sz="2400" dirty="0"/>
+              <a:t>Какие данные нужно отправить (названия полей, типы)?</a:t>
+            </a:r>
+          </a:p>
+          <a:p>
+            <a:pPr marL="342900" indent="-342900">
+              <a:lnSpc>
+                <a:spcPct val="150000"/>
+              </a:lnSpc>
+              <a:buFont typeface="Arial" panose="020B0604020202020204" pitchFamily="34" charset="0"/>
+              <a:buChar char="•"/>
+            </a:pPr>
+            <a:r>
+              <a:rPr lang="ru-RU" sz="2400" dirty="0"/>
+              <a:t>Что сервер вернет в ответ?</a:t>
+            </a:r>
+            <a:br>
+              <a:rPr lang="ru-RU" sz="2400" dirty="0"/>
+            </a:br>
+            <a:r>
+              <a:rPr lang="ru-RU" sz="2400" i="1" dirty="0"/>
+              <a:t>Чтение чужого C#-кода — это долго и неэффективно.</a:t>
+            </a:r>
+            <a:endParaRPr lang="ru-RU" sz="2400" dirty="0"/>
+          </a:p>
+          <a:p>
+            <a:pPr>
+              <a:lnSpc>
+                <a:spcPct val="150000"/>
+              </a:lnSpc>
+            </a:pPr>
+            <a:r>
+              <a:rPr lang="ru-RU" sz="2400" b="1" dirty="0"/>
+              <a:t>Решение: </a:t>
+            </a:r>
+            <a:r>
+              <a:rPr lang="ru-RU" sz="2400" b="1" dirty="0" err="1"/>
+              <a:t>Swagger</a:t>
+            </a:r>
+            <a:r>
+              <a:rPr lang="ru-RU" sz="2400" b="1" dirty="0"/>
+              <a:t> (</a:t>
+            </a:r>
+            <a:r>
+              <a:rPr lang="ru-RU" sz="2400" b="1" dirty="0" err="1"/>
+              <a:t>OpenAPI</a:t>
+            </a:r>
+            <a:r>
+              <a:rPr lang="ru-RU" sz="2400" b="1" dirty="0"/>
+              <a:t>)</a:t>
+            </a:r>
+            <a:r>
+              <a:rPr lang="ru-RU" sz="2400" dirty="0"/>
+              <a:t/>
+            </a:r>
+            <a:br>
+              <a:rPr lang="ru-RU" sz="2400" dirty="0"/>
+            </a:br>
+            <a:r>
+              <a:rPr lang="ru-RU" sz="2400" dirty="0"/>
+              <a:t>Это встроенный в ASP.NET </a:t>
+            </a:r>
+            <a:r>
+              <a:rPr lang="ru-RU" sz="2400" dirty="0" err="1"/>
+              <a:t>Core</a:t>
+            </a:r>
+            <a:r>
+              <a:rPr lang="ru-RU" sz="2400" dirty="0"/>
+              <a:t> инструмент, который автоматически сканирует ваши контроллеры и генерирует красивую, интерактивную веб-страницу с документацией.</a:t>
+            </a:r>
+          </a:p>
+        </p:txBody>
+      </p:sp>
+    </p:spTree>
+    <p:extLst>
+      <p:ext uri="{BB962C8B-B14F-4D97-AF65-F5344CB8AC3E}">
+        <p14:creationId xmlns:p14="http://schemas.microsoft.com/office/powerpoint/2010/main" val="1698853242"/>
+      </p:ext>
+    </p:extLst>
+  </p:cSld>
+  <p:clrMapOvr>
+    <a:masterClrMapping/>
+  </p:clrMapOvr>
+  <p:timing>
+    <p:tnLst>
+      <p:par>
+        <p:cTn id="1" dur="indefinite" restart="never" nodeType="tmRoot"/>
+      </p:par>
+    </p:tnLst>
+  </p:timing>
+</p:sld>
+</file>
+
+<file path=ppt/slides/slide24.xml><?xml version="1.0" encoding="utf-8"?>
+<p:sld xmlns:a="http://schemas.openxmlformats.org/drawingml/2006/main" xmlns:r="http://schemas.openxmlformats.org/officeDocument/2006/relationships" xmlns:p="http://schemas.openxmlformats.org/presentationml/2006/main">
+  <p:cSld>
+    <p:spTree>
+      <p:nvGrpSpPr>
+        <p:cNvPr id="1" name=""/>
+        <p:cNvGrpSpPr/>
+        <p:nvPr/>
+      </p:nvGrpSpPr>
+      <p:grpSpPr>
+        <a:xfrm>
+          <a:off x="0" y="0"/>
+          <a:ext cx="0" cy="0"/>
+          <a:chOff x="0" y="0"/>
+          <a:chExt cx="0" cy="0"/>
+        </a:xfrm>
+      </p:grpSpPr>
+      <p:sp>
+        <p:nvSpPr>
+          <p:cNvPr id="7" name="Прямоугольник 6"/>
+          <p:cNvSpPr/>
+          <p:nvPr/>
+        </p:nvSpPr>
+        <p:spPr>
+          <a:xfrm>
+            <a:off x="0" y="0"/>
+            <a:ext cx="12192000" cy="6863417"/>
+          </a:xfrm>
+          <a:prstGeom prst="rect">
+            <a:avLst/>
+          </a:prstGeom>
+        </p:spPr>
+        <p:txBody>
+          <a:bodyPr wrap="square" lIns="360000" rIns="360000">
+            <a:spAutoFit/>
+          </a:bodyPr>
+          <a:lstStyle/>
+          <a:p>
+            <a:pPr>
+              <a:lnSpc>
+                <a:spcPct val="150000"/>
+              </a:lnSpc>
+            </a:pPr>
+            <a:r>
+              <a:rPr lang="ru-RU" sz="2200" dirty="0"/>
+              <a:t>Для работы </a:t>
+            </a:r>
+            <a:r>
+              <a:rPr lang="ru-RU" sz="2200" dirty="0" err="1"/>
+              <a:t>Swagger</a:t>
+            </a:r>
+            <a:r>
+              <a:rPr lang="ru-RU" sz="2200" dirty="0"/>
+              <a:t> нужно добавить два вызова в файл </a:t>
+            </a:r>
+            <a:r>
+              <a:rPr lang="ru-RU" sz="2200" dirty="0" err="1"/>
+              <a:t>Program.cs</a:t>
+            </a:r>
+            <a:r>
+              <a:rPr lang="ru-RU" sz="2200" dirty="0"/>
+              <a:t>. Один для настройки генератора, второй — для отображения интерфейса (UI</a:t>
+            </a:r>
+            <a:r>
+              <a:rPr lang="ru-RU" sz="2200" dirty="0" smtClean="0"/>
+              <a:t>).</a:t>
+            </a:r>
+            <a:endParaRPr lang="en-US" sz="2200" dirty="0"/>
+          </a:p>
+          <a:p>
+            <a:r>
+              <a:rPr lang="en-US" sz="2200" dirty="0" err="1">
+                <a:solidFill>
+                  <a:srgbClr val="0000FF"/>
+                </a:solidFill>
+                <a:highlight>
+                  <a:srgbClr val="FFFFFF"/>
+                </a:highlight>
+                <a:latin typeface="Cascadia Mono" panose="020B0609020000020004" pitchFamily="49" charset="0"/>
+              </a:rPr>
+              <a:t>var</a:t>
+            </a:r>
+            <a:r>
+              <a:rPr lang="en-US" sz="2200" dirty="0">
+                <a:solidFill>
+                  <a:srgbClr val="000000"/>
+                </a:solidFill>
+                <a:highlight>
+                  <a:srgbClr val="FFFFFF"/>
+                </a:highlight>
+                <a:latin typeface="Cascadia Mono" panose="020B0609020000020004" pitchFamily="49" charset="0"/>
+              </a:rPr>
+              <a:t> </a:t>
+            </a:r>
+            <a:r>
+              <a:rPr lang="en-US" sz="2200" dirty="0">
+                <a:solidFill>
+                  <a:srgbClr val="1F377F"/>
+                </a:solidFill>
+                <a:highlight>
+                  <a:srgbClr val="FFFFFF"/>
+                </a:highlight>
+                <a:latin typeface="Cascadia Mono" panose="020B0609020000020004" pitchFamily="49" charset="0"/>
+              </a:rPr>
+              <a:t>builder</a:t>
+            </a:r>
+            <a:r>
+              <a:rPr lang="en-US" sz="2200" dirty="0">
+                <a:solidFill>
+                  <a:srgbClr val="000000"/>
+                </a:solidFill>
+                <a:highlight>
+                  <a:srgbClr val="FFFFFF"/>
+                </a:highlight>
+                <a:latin typeface="Cascadia Mono" panose="020B0609020000020004" pitchFamily="49" charset="0"/>
+              </a:rPr>
+              <a:t> = </a:t>
+            </a:r>
+            <a:r>
+              <a:rPr lang="en-US" sz="2200" dirty="0" err="1">
+                <a:solidFill>
+                  <a:srgbClr val="2B91AF"/>
+                </a:solidFill>
+                <a:highlight>
+                  <a:srgbClr val="FFFFFF"/>
+                </a:highlight>
+                <a:latin typeface="Cascadia Mono" panose="020B0609020000020004" pitchFamily="49" charset="0"/>
+              </a:rPr>
+              <a:t>WebApplication</a:t>
+            </a:r>
+            <a:r>
+              <a:rPr lang="en-US" sz="2200" dirty="0" err="1">
+                <a:solidFill>
+                  <a:srgbClr val="000000"/>
+                </a:solidFill>
+                <a:highlight>
+                  <a:srgbClr val="FFFFFF"/>
+                </a:highlight>
+                <a:latin typeface="Cascadia Mono" panose="020B0609020000020004" pitchFamily="49" charset="0"/>
+              </a:rPr>
+              <a:t>.</a:t>
+            </a:r>
+            <a:r>
+              <a:rPr lang="en-US" sz="2200" dirty="0" err="1">
+                <a:solidFill>
+                  <a:srgbClr val="74531F"/>
+                </a:solidFill>
+                <a:highlight>
+                  <a:srgbClr val="FFFFFF"/>
+                </a:highlight>
+                <a:latin typeface="Cascadia Mono" panose="020B0609020000020004" pitchFamily="49" charset="0"/>
+              </a:rPr>
+              <a:t>CreateBuilder</a:t>
+            </a:r>
+            <a:r>
+              <a:rPr lang="en-US" sz="2200" dirty="0">
+                <a:solidFill>
+                  <a:srgbClr val="000000"/>
+                </a:solidFill>
+                <a:highlight>
+                  <a:srgbClr val="FFFFFF"/>
+                </a:highlight>
+                <a:latin typeface="Cascadia Mono" panose="020B0609020000020004" pitchFamily="49" charset="0"/>
+              </a:rPr>
+              <a:t>(</a:t>
+            </a:r>
+            <a:r>
+              <a:rPr lang="en-US" sz="2200" dirty="0" err="1">
+                <a:solidFill>
+                  <a:srgbClr val="0000FF"/>
+                </a:solidFill>
+                <a:highlight>
+                  <a:srgbClr val="FFFFFF"/>
+                </a:highlight>
+                <a:latin typeface="Cascadia Mono" panose="020B0609020000020004" pitchFamily="49" charset="0"/>
+              </a:rPr>
+              <a:t>args</a:t>
+            </a:r>
+            <a:r>
+              <a:rPr lang="en-US" sz="2200" dirty="0">
+                <a:solidFill>
+                  <a:srgbClr val="000000"/>
+                </a:solidFill>
+                <a:highlight>
+                  <a:srgbClr val="FFFFFF"/>
+                </a:highlight>
+                <a:latin typeface="Cascadia Mono" panose="020B0609020000020004" pitchFamily="49" charset="0"/>
+              </a:rPr>
+              <a:t>);</a:t>
+            </a:r>
+          </a:p>
+          <a:p>
+            <a:r>
+              <a:rPr lang="en-US" sz="2200" dirty="0" err="1">
+                <a:solidFill>
+                  <a:srgbClr val="1F377F"/>
+                </a:solidFill>
+                <a:highlight>
+                  <a:srgbClr val="FFFFFF"/>
+                </a:highlight>
+                <a:latin typeface="Cascadia Mono" panose="020B0609020000020004" pitchFamily="49" charset="0"/>
+              </a:rPr>
+              <a:t>builder</a:t>
+            </a:r>
+            <a:r>
+              <a:rPr lang="en-US" sz="2200" dirty="0" err="1">
+                <a:solidFill>
+                  <a:srgbClr val="000000"/>
+                </a:solidFill>
+                <a:highlight>
+                  <a:srgbClr val="FFFFFF"/>
+                </a:highlight>
+                <a:latin typeface="Cascadia Mono" panose="020B0609020000020004" pitchFamily="49" charset="0"/>
+              </a:rPr>
+              <a:t>.Services.</a:t>
+            </a:r>
+            <a:r>
+              <a:rPr lang="en-US" sz="2200" dirty="0" err="1">
+                <a:solidFill>
+                  <a:srgbClr val="74531F"/>
+                </a:solidFill>
+                <a:highlight>
+                  <a:srgbClr val="FFFFFF"/>
+                </a:highlight>
+                <a:latin typeface="Cascadia Mono" panose="020B0609020000020004" pitchFamily="49" charset="0"/>
+              </a:rPr>
+              <a:t>AddControllers</a:t>
+            </a:r>
+            <a:r>
+              <a:rPr lang="en-US" sz="2200" dirty="0">
+                <a:solidFill>
+                  <a:srgbClr val="000000"/>
+                </a:solidFill>
+                <a:highlight>
+                  <a:srgbClr val="FFFFFF"/>
+                </a:highlight>
+                <a:latin typeface="Cascadia Mono" panose="020B0609020000020004" pitchFamily="49" charset="0"/>
+              </a:rPr>
+              <a:t>();</a:t>
+            </a:r>
+          </a:p>
+          <a:p>
+            <a:endParaRPr lang="ru-RU" sz="2200" dirty="0">
+              <a:solidFill>
+                <a:srgbClr val="000000"/>
+              </a:solidFill>
+              <a:highlight>
+                <a:srgbClr val="FFFFFF"/>
+              </a:highlight>
+              <a:latin typeface="Cascadia Mono" panose="020B0609020000020004" pitchFamily="49" charset="0"/>
+            </a:endParaRPr>
+          </a:p>
+          <a:p>
+            <a:r>
+              <a:rPr lang="ru-RU" sz="2200" dirty="0">
+                <a:solidFill>
+                  <a:srgbClr val="008000"/>
+                </a:solidFill>
+                <a:highlight>
+                  <a:srgbClr val="FFFFFF"/>
+                </a:highlight>
+                <a:latin typeface="Cascadia Mono" panose="020B0609020000020004" pitchFamily="49" charset="0"/>
+              </a:rPr>
+              <a:t>// 1. Добавляем сервис генерации документации</a:t>
+            </a:r>
+            <a:endParaRPr lang="ru-RU" sz="2200" dirty="0">
+              <a:solidFill>
+                <a:srgbClr val="000000"/>
+              </a:solidFill>
+              <a:highlight>
+                <a:srgbClr val="FFFFFF"/>
+              </a:highlight>
+              <a:latin typeface="Cascadia Mono" panose="020B0609020000020004" pitchFamily="49" charset="0"/>
+            </a:endParaRPr>
+          </a:p>
+          <a:p>
+            <a:r>
+              <a:rPr lang="en-US" sz="2200" dirty="0" err="1">
+                <a:solidFill>
+                  <a:srgbClr val="1F377F"/>
+                </a:solidFill>
+                <a:highlight>
+                  <a:srgbClr val="FFFFFF"/>
+                </a:highlight>
+                <a:latin typeface="Cascadia Mono" panose="020B0609020000020004" pitchFamily="49" charset="0"/>
+              </a:rPr>
+              <a:t>builder</a:t>
+            </a:r>
+            <a:r>
+              <a:rPr lang="en-US" sz="2200" dirty="0" err="1">
+                <a:solidFill>
+                  <a:srgbClr val="000000"/>
+                </a:solidFill>
+                <a:highlight>
+                  <a:srgbClr val="FFFFFF"/>
+                </a:highlight>
+                <a:latin typeface="Cascadia Mono" panose="020B0609020000020004" pitchFamily="49" charset="0"/>
+              </a:rPr>
+              <a:t>.Services.</a:t>
+            </a:r>
+            <a:r>
+              <a:rPr lang="en-US" sz="2200" dirty="0" err="1">
+                <a:solidFill>
+                  <a:srgbClr val="74531F"/>
+                </a:solidFill>
+                <a:highlight>
+                  <a:srgbClr val="FFFFFF"/>
+                </a:highlight>
+                <a:latin typeface="Cascadia Mono" panose="020B0609020000020004" pitchFamily="49" charset="0"/>
+              </a:rPr>
+              <a:t>AddSwaggerGen</a:t>
+            </a:r>
+            <a:r>
+              <a:rPr lang="en-US" sz="2200" dirty="0">
+                <a:solidFill>
+                  <a:srgbClr val="000000"/>
+                </a:solidFill>
+                <a:highlight>
+                  <a:srgbClr val="FFFFFF"/>
+                </a:highlight>
+                <a:latin typeface="Cascadia Mono" panose="020B0609020000020004" pitchFamily="49" charset="0"/>
+              </a:rPr>
+              <a:t>();</a:t>
+            </a:r>
+          </a:p>
+          <a:p>
+            <a:endParaRPr lang="ru-RU" sz="2200" dirty="0">
+              <a:solidFill>
+                <a:srgbClr val="000000"/>
+              </a:solidFill>
+              <a:highlight>
+                <a:srgbClr val="FFFFFF"/>
+              </a:highlight>
+              <a:latin typeface="Cascadia Mono" panose="020B0609020000020004" pitchFamily="49" charset="0"/>
+            </a:endParaRPr>
+          </a:p>
+          <a:p>
+            <a:r>
+              <a:rPr lang="en-US" sz="2200" dirty="0" err="1">
+                <a:solidFill>
+                  <a:srgbClr val="0000FF"/>
+                </a:solidFill>
+                <a:highlight>
+                  <a:srgbClr val="FFFFFF"/>
+                </a:highlight>
+                <a:latin typeface="Cascadia Mono" panose="020B0609020000020004" pitchFamily="49" charset="0"/>
+              </a:rPr>
+              <a:t>var</a:t>
+            </a:r>
+            <a:r>
+              <a:rPr lang="en-US" sz="2200" dirty="0">
+                <a:solidFill>
+                  <a:srgbClr val="000000"/>
+                </a:solidFill>
+                <a:highlight>
+                  <a:srgbClr val="FFFFFF"/>
+                </a:highlight>
+                <a:latin typeface="Cascadia Mono" panose="020B0609020000020004" pitchFamily="49" charset="0"/>
+              </a:rPr>
+              <a:t> </a:t>
+            </a:r>
+            <a:r>
+              <a:rPr lang="en-US" sz="2200" dirty="0">
+                <a:solidFill>
+                  <a:srgbClr val="1F377F"/>
+                </a:solidFill>
+                <a:highlight>
+                  <a:srgbClr val="FFFFFF"/>
+                </a:highlight>
+                <a:latin typeface="Cascadia Mono" panose="020B0609020000020004" pitchFamily="49" charset="0"/>
+              </a:rPr>
+              <a:t>app</a:t>
+            </a:r>
+            <a:r>
+              <a:rPr lang="en-US" sz="2200" dirty="0">
+                <a:solidFill>
+                  <a:srgbClr val="000000"/>
+                </a:solidFill>
+                <a:highlight>
+                  <a:srgbClr val="FFFFFF"/>
+                </a:highlight>
+                <a:latin typeface="Cascadia Mono" panose="020B0609020000020004" pitchFamily="49" charset="0"/>
+              </a:rPr>
+              <a:t> = </a:t>
+            </a:r>
+            <a:r>
+              <a:rPr lang="en-US" sz="2200" dirty="0" err="1">
+                <a:solidFill>
+                  <a:srgbClr val="1F377F"/>
+                </a:solidFill>
+                <a:highlight>
+                  <a:srgbClr val="FFFFFF"/>
+                </a:highlight>
+                <a:latin typeface="Cascadia Mono" panose="020B0609020000020004" pitchFamily="49" charset="0"/>
+              </a:rPr>
+              <a:t>builder</a:t>
+            </a:r>
+            <a:r>
+              <a:rPr lang="en-US" sz="2200" dirty="0" err="1">
+                <a:solidFill>
+                  <a:srgbClr val="000000"/>
+                </a:solidFill>
+                <a:highlight>
+                  <a:srgbClr val="FFFFFF"/>
+                </a:highlight>
+                <a:latin typeface="Cascadia Mono" panose="020B0609020000020004" pitchFamily="49" charset="0"/>
+              </a:rPr>
+              <a:t>.</a:t>
+            </a:r>
+            <a:r>
+              <a:rPr lang="en-US" sz="2200" dirty="0" err="1">
+                <a:solidFill>
+                  <a:srgbClr val="74531F"/>
+                </a:solidFill>
+                <a:highlight>
+                  <a:srgbClr val="FFFFFF"/>
+                </a:highlight>
+                <a:latin typeface="Cascadia Mono" panose="020B0609020000020004" pitchFamily="49" charset="0"/>
+              </a:rPr>
+              <a:t>Build</a:t>
+            </a:r>
+            <a:r>
+              <a:rPr lang="en-US" sz="2200" dirty="0">
+                <a:solidFill>
+                  <a:srgbClr val="000000"/>
+                </a:solidFill>
+                <a:highlight>
+                  <a:srgbClr val="FFFFFF"/>
+                </a:highlight>
+                <a:latin typeface="Cascadia Mono" panose="020B0609020000020004" pitchFamily="49" charset="0"/>
+              </a:rPr>
+              <a:t>();</a:t>
+            </a:r>
+          </a:p>
+          <a:p>
+            <a:endParaRPr lang="ru-RU" sz="2200" dirty="0">
+              <a:solidFill>
+                <a:srgbClr val="000000"/>
+              </a:solidFill>
+              <a:highlight>
+                <a:srgbClr val="FFFFFF"/>
+              </a:highlight>
+              <a:latin typeface="Cascadia Mono" panose="020B0609020000020004" pitchFamily="49" charset="0"/>
+            </a:endParaRPr>
+          </a:p>
+          <a:p>
+            <a:r>
+              <a:rPr lang="ru-RU" sz="2200" dirty="0">
+                <a:solidFill>
+                  <a:srgbClr val="008000"/>
+                </a:solidFill>
+                <a:highlight>
+                  <a:srgbClr val="FFFFFF"/>
+                </a:highlight>
+                <a:latin typeface="Cascadia Mono" panose="020B0609020000020004" pitchFamily="49" charset="0"/>
+              </a:rPr>
+              <a:t>// 2. Включаем отображение </a:t>
+            </a:r>
+            <a:r>
+              <a:rPr lang="ru-RU" sz="2200" dirty="0" err="1">
+                <a:solidFill>
+                  <a:srgbClr val="008000"/>
+                </a:solidFill>
+                <a:highlight>
+                  <a:srgbClr val="FFFFFF"/>
+                </a:highlight>
+                <a:latin typeface="Cascadia Mono" panose="020B0609020000020004" pitchFamily="49" charset="0"/>
+              </a:rPr>
+              <a:t>Swagger</a:t>
+            </a:r>
+            <a:r>
+              <a:rPr lang="ru-RU" sz="2200" dirty="0">
+                <a:solidFill>
+                  <a:srgbClr val="008000"/>
+                </a:solidFill>
+                <a:highlight>
+                  <a:srgbClr val="FFFFFF"/>
+                </a:highlight>
+                <a:latin typeface="Cascadia Mono" panose="020B0609020000020004" pitchFamily="49" charset="0"/>
+              </a:rPr>
+              <a:t> UI (обычно только для разработчиков)</a:t>
+            </a:r>
+            <a:endParaRPr lang="ru-RU" sz="2200" dirty="0">
+              <a:solidFill>
+                <a:srgbClr val="000000"/>
+              </a:solidFill>
+              <a:highlight>
+                <a:srgbClr val="FFFFFF"/>
+              </a:highlight>
+              <a:latin typeface="Cascadia Mono" panose="020B0609020000020004" pitchFamily="49" charset="0"/>
+            </a:endParaRPr>
+          </a:p>
+          <a:p>
+            <a:r>
+              <a:rPr lang="en-US" sz="2200" dirty="0">
+                <a:solidFill>
+                  <a:srgbClr val="8F08C4"/>
+                </a:solidFill>
+                <a:highlight>
+                  <a:srgbClr val="FFFFFF"/>
+                </a:highlight>
+                <a:latin typeface="Cascadia Mono" panose="020B0609020000020004" pitchFamily="49" charset="0"/>
+              </a:rPr>
+              <a:t>if</a:t>
+            </a:r>
+            <a:r>
+              <a:rPr lang="en-US" sz="2200" dirty="0">
+                <a:solidFill>
+                  <a:srgbClr val="000000"/>
+                </a:solidFill>
+                <a:highlight>
+                  <a:srgbClr val="FFFFFF"/>
+                </a:highlight>
+                <a:latin typeface="Cascadia Mono" panose="020B0609020000020004" pitchFamily="49" charset="0"/>
+              </a:rPr>
+              <a:t> (</a:t>
+            </a:r>
+            <a:r>
+              <a:rPr lang="en-US" sz="2200" dirty="0" err="1">
+                <a:solidFill>
+                  <a:srgbClr val="1F377F"/>
+                </a:solidFill>
+                <a:highlight>
+                  <a:srgbClr val="FFFFFF"/>
+                </a:highlight>
+                <a:latin typeface="Cascadia Mono" panose="020B0609020000020004" pitchFamily="49" charset="0"/>
+              </a:rPr>
+              <a:t>app</a:t>
+            </a:r>
+            <a:r>
+              <a:rPr lang="en-US" sz="2200" dirty="0" err="1">
+                <a:solidFill>
+                  <a:srgbClr val="000000"/>
+                </a:solidFill>
+                <a:highlight>
+                  <a:srgbClr val="FFFFFF"/>
+                </a:highlight>
+                <a:latin typeface="Cascadia Mono" panose="020B0609020000020004" pitchFamily="49" charset="0"/>
+              </a:rPr>
+              <a:t>.Environment.</a:t>
+            </a:r>
+            <a:r>
+              <a:rPr lang="en-US" sz="2200" dirty="0" err="1">
+                <a:solidFill>
+                  <a:srgbClr val="74531F"/>
+                </a:solidFill>
+                <a:highlight>
+                  <a:srgbClr val="FFFFFF"/>
+                </a:highlight>
+                <a:latin typeface="Cascadia Mono" panose="020B0609020000020004" pitchFamily="49" charset="0"/>
+              </a:rPr>
+              <a:t>IsDevelopment</a:t>
+            </a:r>
+            <a:r>
+              <a:rPr lang="en-US" sz="2200" dirty="0">
+                <a:solidFill>
+                  <a:srgbClr val="000000"/>
+                </a:solidFill>
+                <a:highlight>
+                  <a:srgbClr val="FFFFFF"/>
+                </a:highlight>
+                <a:latin typeface="Cascadia Mono" panose="020B0609020000020004" pitchFamily="49" charset="0"/>
+              </a:rPr>
+              <a:t>())</a:t>
+            </a:r>
+          </a:p>
+          <a:p>
+            <a:r>
+              <a:rPr lang="ru-RU" sz="2200" dirty="0">
+                <a:solidFill>
+                  <a:srgbClr val="000000"/>
+                </a:solidFill>
+                <a:highlight>
+                  <a:srgbClr val="FFFFFF"/>
+                </a:highlight>
+                <a:latin typeface="Cascadia Mono" panose="020B0609020000020004" pitchFamily="49" charset="0"/>
+              </a:rPr>
+              <a:t>{</a:t>
+            </a:r>
+          </a:p>
+          <a:p>
+            <a:r>
+              <a:rPr lang="en-US" sz="2200" dirty="0">
+                <a:solidFill>
+                  <a:srgbClr val="000000"/>
+                </a:solidFill>
+                <a:highlight>
+                  <a:srgbClr val="FFFFFF"/>
+                </a:highlight>
+                <a:latin typeface="Cascadia Mono" panose="020B0609020000020004" pitchFamily="49" charset="0"/>
+              </a:rPr>
+              <a:t>    </a:t>
+            </a:r>
+            <a:r>
+              <a:rPr lang="en-US" sz="2200" dirty="0" err="1">
+                <a:solidFill>
+                  <a:srgbClr val="1F377F"/>
+                </a:solidFill>
+                <a:highlight>
+                  <a:srgbClr val="FFFFFF"/>
+                </a:highlight>
+                <a:latin typeface="Cascadia Mono" panose="020B0609020000020004" pitchFamily="49" charset="0"/>
+              </a:rPr>
+              <a:t>app</a:t>
+            </a:r>
+            <a:r>
+              <a:rPr lang="en-US" sz="2200" dirty="0" err="1">
+                <a:solidFill>
+                  <a:srgbClr val="000000"/>
+                </a:solidFill>
+                <a:highlight>
+                  <a:srgbClr val="FFFFFF"/>
+                </a:highlight>
+                <a:latin typeface="Cascadia Mono" panose="020B0609020000020004" pitchFamily="49" charset="0"/>
+              </a:rPr>
+              <a:t>.</a:t>
+            </a:r>
+            <a:r>
+              <a:rPr lang="en-US" sz="2200" dirty="0" err="1">
+                <a:solidFill>
+                  <a:srgbClr val="74531F"/>
+                </a:solidFill>
+                <a:highlight>
+                  <a:srgbClr val="FFFFFF"/>
+                </a:highlight>
+                <a:latin typeface="Cascadia Mono" panose="020B0609020000020004" pitchFamily="49" charset="0"/>
+              </a:rPr>
+              <a:t>UseSwagger</a:t>
+            </a:r>
+            <a:r>
+              <a:rPr lang="en-US" sz="2200" dirty="0">
+                <a:solidFill>
+                  <a:srgbClr val="000000"/>
+                </a:solidFill>
+                <a:highlight>
+                  <a:srgbClr val="FFFFFF"/>
+                </a:highlight>
+                <a:latin typeface="Cascadia Mono" panose="020B0609020000020004" pitchFamily="49" charset="0"/>
+              </a:rPr>
+              <a:t>();</a:t>
+            </a:r>
+          </a:p>
+          <a:p>
+            <a:r>
+              <a:rPr lang="en-US" sz="2200" dirty="0">
+                <a:solidFill>
+                  <a:srgbClr val="000000"/>
+                </a:solidFill>
+                <a:highlight>
+                  <a:srgbClr val="FFFFFF"/>
+                </a:highlight>
+                <a:latin typeface="Cascadia Mono" panose="020B0609020000020004" pitchFamily="49" charset="0"/>
+              </a:rPr>
+              <a:t>    </a:t>
+            </a:r>
+            <a:r>
+              <a:rPr lang="en-US" sz="2200" dirty="0" err="1">
+                <a:solidFill>
+                  <a:srgbClr val="1F377F"/>
+                </a:solidFill>
+                <a:highlight>
+                  <a:srgbClr val="FFFFFF"/>
+                </a:highlight>
+                <a:latin typeface="Cascadia Mono" panose="020B0609020000020004" pitchFamily="49" charset="0"/>
+              </a:rPr>
+              <a:t>app</a:t>
+            </a:r>
+            <a:r>
+              <a:rPr lang="en-US" sz="2200" dirty="0" err="1">
+                <a:solidFill>
+                  <a:srgbClr val="000000"/>
+                </a:solidFill>
+                <a:highlight>
+                  <a:srgbClr val="FFFFFF"/>
+                </a:highlight>
+                <a:latin typeface="Cascadia Mono" panose="020B0609020000020004" pitchFamily="49" charset="0"/>
+              </a:rPr>
+              <a:t>.</a:t>
+            </a:r>
+            <a:r>
+              <a:rPr lang="en-US" sz="2200" dirty="0" err="1">
+                <a:solidFill>
+                  <a:srgbClr val="74531F"/>
+                </a:solidFill>
+                <a:highlight>
+                  <a:srgbClr val="FFFFFF"/>
+                </a:highlight>
+                <a:latin typeface="Cascadia Mono" panose="020B0609020000020004" pitchFamily="49" charset="0"/>
+              </a:rPr>
+              <a:t>UseSwaggerUI</a:t>
+            </a:r>
+            <a:r>
+              <a:rPr lang="en-US" sz="2200" dirty="0">
+                <a:solidFill>
+                  <a:srgbClr val="000000"/>
+                </a:solidFill>
+                <a:highlight>
+                  <a:srgbClr val="FFFFFF"/>
+                </a:highlight>
+                <a:latin typeface="Cascadia Mono" panose="020B0609020000020004" pitchFamily="49" charset="0"/>
+              </a:rPr>
+              <a:t>();</a:t>
+            </a:r>
+          </a:p>
+          <a:p>
+            <a:r>
+              <a:rPr lang="ru-RU" sz="2200" dirty="0" smtClean="0">
+                <a:solidFill>
+                  <a:srgbClr val="000000"/>
+                </a:solidFill>
+                <a:highlight>
+                  <a:srgbClr val="FFFFFF"/>
+                </a:highlight>
+                <a:latin typeface="Cascadia Mono" panose="020B0609020000020004" pitchFamily="49" charset="0"/>
+              </a:rPr>
+              <a:t>}</a:t>
+            </a:r>
+            <a:endParaRPr lang="ru-RU" sz="2200" dirty="0">
+              <a:solidFill>
+                <a:srgbClr val="000000"/>
+              </a:solidFill>
+              <a:highlight>
+                <a:srgbClr val="FFFFFF"/>
+              </a:highlight>
+              <a:latin typeface="Cascadia Mono" panose="020B0609020000020004" pitchFamily="49" charset="0"/>
+            </a:endParaRPr>
+          </a:p>
+          <a:p>
+            <a:r>
+              <a:rPr lang="en-US" sz="2200" dirty="0" err="1">
+                <a:solidFill>
+                  <a:srgbClr val="1F377F"/>
+                </a:solidFill>
+                <a:highlight>
+                  <a:srgbClr val="FFFFFF"/>
+                </a:highlight>
+                <a:latin typeface="Cascadia Mono" panose="020B0609020000020004" pitchFamily="49" charset="0"/>
+              </a:rPr>
+              <a:t>app</a:t>
+            </a:r>
+            <a:r>
+              <a:rPr lang="en-US" sz="2200" dirty="0" err="1">
+                <a:solidFill>
+                  <a:srgbClr val="000000"/>
+                </a:solidFill>
+                <a:highlight>
+                  <a:srgbClr val="FFFFFF"/>
+                </a:highlight>
+                <a:latin typeface="Cascadia Mono" panose="020B0609020000020004" pitchFamily="49" charset="0"/>
+              </a:rPr>
+              <a:t>.</a:t>
+            </a:r>
+            <a:r>
+              <a:rPr lang="en-US" sz="2200" dirty="0" err="1">
+                <a:solidFill>
+                  <a:srgbClr val="74531F"/>
+                </a:solidFill>
+                <a:highlight>
+                  <a:srgbClr val="FFFFFF"/>
+                </a:highlight>
+                <a:latin typeface="Cascadia Mono" panose="020B0609020000020004" pitchFamily="49" charset="0"/>
+              </a:rPr>
+              <a:t>MapControllers</a:t>
+            </a:r>
+            <a:r>
+              <a:rPr lang="en-US" sz="2200" dirty="0">
+                <a:solidFill>
+                  <a:srgbClr val="000000"/>
+                </a:solidFill>
+                <a:highlight>
+                  <a:srgbClr val="FFFFFF"/>
+                </a:highlight>
+                <a:latin typeface="Cascadia Mono" panose="020B0609020000020004" pitchFamily="49" charset="0"/>
+              </a:rPr>
+              <a:t>();</a:t>
+            </a:r>
+          </a:p>
+          <a:p>
+            <a:r>
+              <a:rPr lang="en-US" sz="2200" dirty="0" err="1">
+                <a:solidFill>
+                  <a:srgbClr val="1F377F"/>
+                </a:solidFill>
+                <a:highlight>
+                  <a:srgbClr val="FFFFFF"/>
+                </a:highlight>
+                <a:latin typeface="Cascadia Mono" panose="020B0609020000020004" pitchFamily="49" charset="0"/>
+              </a:rPr>
+              <a:t>app</a:t>
+            </a:r>
+            <a:r>
+              <a:rPr lang="en-US" sz="2200" dirty="0" err="1">
+                <a:solidFill>
+                  <a:srgbClr val="000000"/>
+                </a:solidFill>
+                <a:highlight>
+                  <a:srgbClr val="FFFFFF"/>
+                </a:highlight>
+                <a:latin typeface="Cascadia Mono" panose="020B0609020000020004" pitchFamily="49" charset="0"/>
+              </a:rPr>
+              <a:t>.</a:t>
+            </a:r>
+            <a:r>
+              <a:rPr lang="en-US" sz="2200" dirty="0" err="1">
+                <a:solidFill>
+                  <a:srgbClr val="74531F"/>
+                </a:solidFill>
+                <a:highlight>
+                  <a:srgbClr val="FFFFFF"/>
+                </a:highlight>
+                <a:latin typeface="Cascadia Mono" panose="020B0609020000020004" pitchFamily="49" charset="0"/>
+              </a:rPr>
+              <a:t>Run</a:t>
+            </a:r>
+            <a:r>
+              <a:rPr lang="en-US" sz="2200" dirty="0">
+                <a:solidFill>
+                  <a:srgbClr val="000000"/>
+                </a:solidFill>
+                <a:highlight>
+                  <a:srgbClr val="FFFFFF"/>
+                </a:highlight>
+                <a:latin typeface="Cascadia Mono" panose="020B0609020000020004" pitchFamily="49" charset="0"/>
+              </a:rPr>
+              <a:t>();</a:t>
+            </a:r>
+            <a:endParaRPr lang="ru-RU" sz="2200" dirty="0"/>
+          </a:p>
+        </p:txBody>
+      </p:sp>
+    </p:spTree>
+    <p:extLst>
+      <p:ext uri="{BB962C8B-B14F-4D97-AF65-F5344CB8AC3E}">
+        <p14:creationId xmlns:p14="http://schemas.microsoft.com/office/powerpoint/2010/main" val="1970402579"/>
+      </p:ext>
+    </p:extLst>
+  </p:cSld>
+  <p:clrMapOvr>
+    <a:masterClrMapping/>
+  </p:clrMapOvr>
+  <p:timing>
+    <p:tnLst>
+      <p:par>
+        <p:cTn id="1" dur="indefinite" restart="never" nodeType="tmRoot"/>
+      </p:par>
+    </p:tnLst>
+  </p:timing>
+</p:sld>
+</file>
+
+<file path=ppt/slides/slide25.xml><?xml version="1.0" encoding="utf-8"?>
+<p:sld xmlns:a="http://schemas.openxmlformats.org/drawingml/2006/main" xmlns:r="http://schemas.openxmlformats.org/officeDocument/2006/relationships" xmlns:p="http://schemas.openxmlformats.org/presentationml/2006/main">
+  <p:cSld>
+    <p:spTree>
+      <p:nvGrpSpPr>
+        <p:cNvPr id="1" name=""/>
+        <p:cNvGrpSpPr/>
+        <p:nvPr/>
+      </p:nvGrpSpPr>
+      <p:grpSpPr>
+        <a:xfrm>
+          <a:off x="0" y="0"/>
+          <a:ext cx="0" cy="0"/>
+          <a:chOff x="0" y="0"/>
+          <a:chExt cx="0" cy="0"/>
+        </a:xfrm>
+      </p:grpSpPr>
+      <p:sp>
+        <p:nvSpPr>
+          <p:cNvPr id="7" name="Прямоугольник 6"/>
+          <p:cNvSpPr/>
+          <p:nvPr/>
+        </p:nvSpPr>
+        <p:spPr>
+          <a:xfrm>
+            <a:off x="0" y="0"/>
+            <a:ext cx="12192000" cy="580672"/>
+          </a:xfrm>
+          <a:prstGeom prst="rect">
+            <a:avLst/>
+          </a:prstGeom>
+        </p:spPr>
+        <p:txBody>
+          <a:bodyPr wrap="square" lIns="360000" rIns="360000">
+            <a:spAutoFit/>
+          </a:bodyPr>
+          <a:lstStyle/>
+          <a:p>
+            <a:pPr algn="just">
+              <a:lnSpc>
+                <a:spcPct val="150000"/>
+              </a:lnSpc>
+            </a:pPr>
+            <a:r>
+              <a:rPr lang="en-US" sz="2400" b="1" dirty="0">
+                <a:solidFill>
+                  <a:srgbClr val="161616"/>
+                </a:solidFill>
+                <a:latin typeface="Bookman Old Style" panose="02050604050505020204" pitchFamily="18" charset="0"/>
+              </a:rPr>
+              <a:t>https://localhost:7164/swagger/index.html</a:t>
+            </a:r>
+            <a:endParaRPr lang="ru-RU" sz="2400" b="1" dirty="0">
+              <a:solidFill>
+                <a:srgbClr val="161616"/>
+              </a:solidFill>
+              <a:latin typeface="Bookman Old Style" panose="02050604050505020204" pitchFamily="18" charset="0"/>
+            </a:endParaRPr>
+          </a:p>
+        </p:txBody>
+      </p:sp>
+      <p:pic>
+        <p:nvPicPr>
+          <p:cNvPr id="4" name="Рисунок 3"/>
+          <p:cNvPicPr>
+            <a:picLocks noChangeAspect="1"/>
+          </p:cNvPicPr>
+          <p:nvPr/>
+        </p:nvPicPr>
+        <p:blipFill rotWithShape="1">
+          <a:blip r:embed="rId3"/>
+          <a:srcRect t="32565" b="32716"/>
+          <a:stretch/>
+        </p:blipFill>
+        <p:spPr>
+          <a:xfrm>
+            <a:off x="58888" y="1186248"/>
+            <a:ext cx="12074224" cy="5156426"/>
+          </a:xfrm>
+          <a:prstGeom prst="rect">
+            <a:avLst/>
+          </a:prstGeom>
+        </p:spPr>
+      </p:pic>
+    </p:spTree>
+    <p:extLst>
+      <p:ext uri="{BB962C8B-B14F-4D97-AF65-F5344CB8AC3E}">
+        <p14:creationId xmlns:p14="http://schemas.microsoft.com/office/powerpoint/2010/main" val="1997288438"/>
+      </p:ext>
+    </p:extLst>
+  </p:cSld>
+  <p:clrMapOvr>
+    <a:masterClrMapping/>
+  </p:clrMapOvr>
+  <p:timing>
+    <p:tnLst>
+      <p:par>
+        <p:cTn id="1" dur="indefinite" restart="never" nodeType="tmRoot"/>
+      </p:par>
+    </p:tnLst>
+  </p:timing>
+</p:sld>
+</file>
+
+<file path=ppt/slides/slide26.xml><?xml version="1.0" encoding="utf-8"?>
+<p:sld xmlns:a="http://schemas.openxmlformats.org/drawingml/2006/main" xmlns:r="http://schemas.openxmlformats.org/officeDocument/2006/relationships" xmlns:p="http://schemas.openxmlformats.org/presentationml/2006/main">
+  <p:cSld>
+    <p:spTree>
+      <p:nvGrpSpPr>
+        <p:cNvPr id="1" name=""/>
+        <p:cNvGrpSpPr/>
+        <p:nvPr/>
+      </p:nvGrpSpPr>
+      <p:grpSpPr>
+        <a:xfrm>
+          <a:off x="0" y="0"/>
+          <a:ext cx="0" cy="0"/>
+          <a:chOff x="0" y="0"/>
+          <a:chExt cx="0" cy="0"/>
+        </a:xfrm>
+      </p:grpSpPr>
+      <p:sp>
+        <p:nvSpPr>
+          <p:cNvPr id="7" name="Прямоугольник 6"/>
+          <p:cNvSpPr/>
+          <p:nvPr/>
+        </p:nvSpPr>
+        <p:spPr>
+          <a:xfrm>
+            <a:off x="0" y="0"/>
+            <a:ext cx="12192000" cy="6516079"/>
+          </a:xfrm>
+          <a:prstGeom prst="rect">
+            <a:avLst/>
+          </a:prstGeom>
+        </p:spPr>
+        <p:txBody>
+          <a:bodyPr wrap="square" lIns="360000" rIns="360000">
+            <a:spAutoFit/>
+          </a:bodyPr>
+          <a:lstStyle/>
+          <a:p>
+            <a:pPr>
+              <a:lnSpc>
+                <a:spcPct val="125000"/>
+              </a:lnSpc>
+            </a:pPr>
+            <a:r>
+              <a:rPr lang="ru-RU" sz="2400" b="1" dirty="0"/>
+              <a:t>Интерфейс </a:t>
+            </a:r>
+            <a:r>
+              <a:rPr lang="ru-RU" sz="2400" b="1" dirty="0" err="1"/>
+              <a:t>Swagger</a:t>
+            </a:r>
+            <a:r>
+              <a:rPr lang="ru-RU" sz="2400" b="1" dirty="0"/>
+              <a:t> (Как с ним работать)</a:t>
+            </a:r>
+          </a:p>
+          <a:p>
+            <a:pPr>
+              <a:lnSpc>
+                <a:spcPct val="125000"/>
+              </a:lnSpc>
+            </a:pPr>
+            <a:r>
+              <a:rPr lang="ru-RU" sz="2400" dirty="0"/>
+              <a:t>Когда вы запускаете проект (по адресу /</a:t>
+            </a:r>
+            <a:r>
+              <a:rPr lang="ru-RU" sz="2400" dirty="0" err="1"/>
+              <a:t>swagger</a:t>
+            </a:r>
+            <a:r>
+              <a:rPr lang="ru-RU" sz="2400" dirty="0"/>
+              <a:t>), вы видите список всех доступных ресурсов (например, </a:t>
+            </a:r>
+            <a:r>
+              <a:rPr lang="ru-RU" sz="2400" dirty="0" err="1"/>
+              <a:t>Notes</a:t>
+            </a:r>
+            <a:r>
+              <a:rPr lang="ru-RU" sz="2400" dirty="0"/>
+              <a:t>).</a:t>
+            </a:r>
+          </a:p>
+          <a:p>
+            <a:pPr>
+              <a:lnSpc>
+                <a:spcPct val="125000"/>
+              </a:lnSpc>
+            </a:pPr>
+            <a:r>
+              <a:rPr lang="ru-RU" sz="2400" b="1" dirty="0"/>
+              <a:t>Процесс тестирования метода:</a:t>
+            </a:r>
+            <a:endParaRPr lang="ru-RU" sz="2400" dirty="0"/>
+          </a:p>
+          <a:p>
+            <a:pPr marL="457200" indent="-457200">
+              <a:lnSpc>
+                <a:spcPct val="125000"/>
+              </a:lnSpc>
+              <a:buFont typeface="+mj-lt"/>
+              <a:buAutoNum type="arabicPeriod"/>
+            </a:pPr>
+            <a:r>
+              <a:rPr lang="ru-RU" sz="2400" dirty="0"/>
+              <a:t>Открываем нужный метод (например, POST /</a:t>
+            </a:r>
+            <a:r>
+              <a:rPr lang="ru-RU" sz="2400" dirty="0" err="1"/>
+              <a:t>Notes</a:t>
+            </a:r>
+            <a:r>
+              <a:rPr lang="ru-RU" sz="2400" dirty="0"/>
+              <a:t>/</a:t>
+            </a:r>
+            <a:r>
+              <a:rPr lang="ru-RU" sz="2400" dirty="0" err="1"/>
+              <a:t>Create</a:t>
+            </a:r>
+            <a:r>
+              <a:rPr lang="ru-RU" sz="2400" dirty="0"/>
+              <a:t>).</a:t>
+            </a:r>
+          </a:p>
+          <a:p>
+            <a:pPr marL="457200" indent="-457200">
+              <a:lnSpc>
+                <a:spcPct val="125000"/>
+              </a:lnSpc>
+              <a:buFont typeface="+mj-lt"/>
+              <a:buAutoNum type="arabicPeriod"/>
+            </a:pPr>
+            <a:r>
+              <a:rPr lang="ru-RU" sz="2400" dirty="0"/>
+              <a:t>Нажимаем кнопку </a:t>
+            </a:r>
+            <a:r>
+              <a:rPr lang="ru-RU" sz="2400" b="1" dirty="0"/>
+              <a:t>«</a:t>
+            </a:r>
+            <a:r>
+              <a:rPr lang="ru-RU" sz="2400" b="1" dirty="0" err="1"/>
+              <a:t>Try</a:t>
+            </a:r>
+            <a:r>
+              <a:rPr lang="ru-RU" sz="2400" b="1" dirty="0"/>
+              <a:t> </a:t>
+            </a:r>
+            <a:r>
+              <a:rPr lang="ru-RU" sz="2400" b="1" dirty="0" err="1"/>
+              <a:t>it</a:t>
+            </a:r>
+            <a:r>
+              <a:rPr lang="ru-RU" sz="2400" b="1" dirty="0"/>
+              <a:t> </a:t>
+            </a:r>
+            <a:r>
+              <a:rPr lang="ru-RU" sz="2400" b="1" dirty="0" err="1"/>
+              <a:t>out</a:t>
+            </a:r>
+            <a:r>
+              <a:rPr lang="ru-RU" sz="2400" b="1" dirty="0"/>
+              <a:t>»</a:t>
+            </a:r>
+            <a:r>
+              <a:rPr lang="ru-RU" sz="2400" dirty="0"/>
+              <a:t> (Попробовать).</a:t>
+            </a:r>
+          </a:p>
+          <a:p>
+            <a:pPr marL="457200" indent="-457200">
+              <a:lnSpc>
+                <a:spcPct val="125000"/>
+              </a:lnSpc>
+              <a:buFont typeface="+mj-lt"/>
+              <a:buAutoNum type="arabicPeriod"/>
+            </a:pPr>
+            <a:r>
+              <a:rPr lang="ru-RU" sz="2400" dirty="0"/>
+              <a:t>В поле </a:t>
+            </a:r>
+            <a:r>
+              <a:rPr lang="ru-RU" sz="2400" b="1" dirty="0" err="1"/>
+              <a:t>Request</a:t>
+            </a:r>
+            <a:r>
+              <a:rPr lang="ru-RU" sz="2400" b="1" dirty="0"/>
+              <a:t> </a:t>
+            </a:r>
+            <a:r>
+              <a:rPr lang="ru-RU" sz="2400" b="1" dirty="0" err="1"/>
+              <a:t>body</a:t>
+            </a:r>
+            <a:r>
+              <a:rPr lang="ru-RU" sz="2400" dirty="0"/>
+              <a:t> </a:t>
+            </a:r>
+            <a:r>
+              <a:rPr lang="ru-RU" sz="2400" dirty="0" err="1"/>
+              <a:t>Swagger</a:t>
+            </a:r>
+            <a:r>
+              <a:rPr lang="ru-RU" sz="2400" dirty="0"/>
+              <a:t> уже сгенерировал шаблон JSON на основе вашего DTO</a:t>
+            </a:r>
+            <a:r>
+              <a:rPr lang="ru-RU" sz="2400" dirty="0" smtClean="0"/>
+              <a:t>:</a:t>
+            </a:r>
+            <a:endParaRPr lang="en-US" sz="2400" dirty="0"/>
+          </a:p>
+          <a:p>
+            <a:pPr>
+              <a:lnSpc>
+                <a:spcPct val="125000"/>
+              </a:lnSpc>
+            </a:pPr>
+            <a:r>
+              <a:rPr lang="en-US" sz="2400" dirty="0"/>
+              <a:t>{</a:t>
+            </a:r>
+          </a:p>
+          <a:p>
+            <a:pPr>
+              <a:lnSpc>
+                <a:spcPct val="125000"/>
+              </a:lnSpc>
+            </a:pPr>
+            <a:r>
+              <a:rPr lang="en-US" sz="2400" dirty="0"/>
+              <a:t>  "title": "</a:t>
+            </a:r>
+            <a:r>
+              <a:rPr lang="ru-RU" sz="2400" dirty="0"/>
+              <a:t>строка",</a:t>
+            </a:r>
+          </a:p>
+          <a:p>
+            <a:pPr>
+              <a:lnSpc>
+                <a:spcPct val="125000"/>
+              </a:lnSpc>
+            </a:pPr>
+            <a:r>
+              <a:rPr lang="ru-RU" sz="2400" dirty="0"/>
+              <a:t>  "</a:t>
+            </a:r>
+            <a:r>
+              <a:rPr lang="en-US" sz="2400" dirty="0"/>
+              <a:t>description": "</a:t>
+            </a:r>
+            <a:r>
+              <a:rPr lang="ru-RU" sz="2400" dirty="0"/>
+              <a:t>строка"</a:t>
+            </a:r>
+          </a:p>
+          <a:p>
+            <a:pPr>
+              <a:lnSpc>
+                <a:spcPct val="125000"/>
+              </a:lnSpc>
+            </a:pPr>
+            <a:r>
+              <a:rPr lang="ru-RU" sz="2400" dirty="0" smtClean="0"/>
+              <a:t>}</a:t>
+            </a:r>
+            <a:endParaRPr lang="en-US" sz="2400" dirty="0" smtClean="0"/>
+          </a:p>
+          <a:p>
+            <a:pPr marL="457200" indent="-457200">
+              <a:lnSpc>
+                <a:spcPct val="125000"/>
+              </a:lnSpc>
+              <a:buFont typeface="+mj-lt"/>
+              <a:buAutoNum type="arabicPeriod" startAt="4"/>
+            </a:pPr>
+            <a:r>
+              <a:rPr lang="ru-RU" sz="2400" dirty="0"/>
+              <a:t>Меняем</a:t>
+            </a:r>
+            <a:r>
+              <a:rPr lang="ru-RU" sz="2400" dirty="0"/>
+              <a:t> «строка» на свои данные (например, "Заметка 1") и жмем </a:t>
+            </a:r>
+            <a:r>
+              <a:rPr lang="ru-RU" sz="2400" b="1" dirty="0" err="1"/>
+              <a:t>Execute</a:t>
+            </a:r>
+            <a:r>
+              <a:rPr lang="ru-RU" sz="2400" dirty="0"/>
+              <a:t> (Выполнить).</a:t>
+            </a:r>
+            <a:endParaRPr lang="en-US" sz="2400" dirty="0" smtClean="0"/>
+          </a:p>
+        </p:txBody>
+      </p:sp>
+    </p:spTree>
+    <p:extLst>
+      <p:ext uri="{BB962C8B-B14F-4D97-AF65-F5344CB8AC3E}">
+        <p14:creationId xmlns:p14="http://schemas.microsoft.com/office/powerpoint/2010/main" val="2169487593"/>
+      </p:ext>
+    </p:extLst>
+  </p:cSld>
+  <p:clrMapOvr>
+    <a:masterClrMapping/>
+  </p:clrMapOvr>
+  <p:timing>
+    <p:tnLst>
+      <p:par>
+        <p:cTn id="1" dur="indefinite" restart="never" nodeType="tmRoot"/>
+      </p:par>
+    </p:tnLst>
+  </p:timing>
+</p:sld>
+</file>
+
+<file path=ppt/slides/slide27.xml><?xml version="1.0" encoding="utf-8"?>
+<p:sld xmlns:a="http://schemas.openxmlformats.org/drawingml/2006/main" xmlns:r="http://schemas.openxmlformats.org/officeDocument/2006/relationships" xmlns:p="http://schemas.openxmlformats.org/presentationml/2006/main">
+  <p:cSld>
+    <p:spTree>
+      <p:nvGrpSpPr>
+        <p:cNvPr id="1" name=""/>
+        <p:cNvGrpSpPr/>
+        <p:nvPr/>
+      </p:nvGrpSpPr>
+      <p:grpSpPr>
+        <a:xfrm>
+          <a:off x="0" y="0"/>
+          <a:ext cx="0" cy="0"/>
+          <a:chOff x="0" y="0"/>
+          <a:chExt cx="0" cy="0"/>
+        </a:xfrm>
+      </p:grpSpPr>
+      <p:pic>
+        <p:nvPicPr>
+          <p:cNvPr id="3" name="Рисунок 2"/>
+          <p:cNvPicPr>
+            <a:picLocks noChangeAspect="1"/>
+          </p:cNvPicPr>
+          <p:nvPr/>
+        </p:nvPicPr>
+        <p:blipFill>
+          <a:blip r:embed="rId3"/>
+          <a:stretch>
+            <a:fillRect/>
+          </a:stretch>
+        </p:blipFill>
+        <p:spPr>
+          <a:xfrm>
+            <a:off x="3972724" y="0"/>
+            <a:ext cx="8219276" cy="6756811"/>
+          </a:xfrm>
+          <a:prstGeom prst="rect">
+            <a:avLst/>
+          </a:prstGeom>
+        </p:spPr>
+      </p:pic>
+      <p:pic>
+        <p:nvPicPr>
+          <p:cNvPr id="4" name="Рисунок 3"/>
+          <p:cNvPicPr>
+            <a:picLocks noChangeAspect="1"/>
+          </p:cNvPicPr>
+          <p:nvPr/>
+        </p:nvPicPr>
+        <p:blipFill>
+          <a:blip r:embed="rId4"/>
+          <a:stretch>
+            <a:fillRect/>
+          </a:stretch>
+        </p:blipFill>
+        <p:spPr>
+          <a:xfrm>
+            <a:off x="764917" y="806928"/>
+            <a:ext cx="2638880" cy="1219483"/>
+          </a:xfrm>
+          <a:prstGeom prst="rect">
+            <a:avLst/>
+          </a:prstGeom>
+        </p:spPr>
+      </p:pic>
+    </p:spTree>
+    <p:extLst>
+      <p:ext uri="{BB962C8B-B14F-4D97-AF65-F5344CB8AC3E}">
+        <p14:creationId xmlns:p14="http://schemas.microsoft.com/office/powerpoint/2010/main" val="75578762"/>
+      </p:ext>
+    </p:extLst>
+  </p:cSld>
+  <p:clrMapOvr>
+    <a:masterClrMapping/>
+  </p:clrMapOvr>
+  <p:timing>
+    <p:tnLst>
+      <p:par>
+        <p:cTn id="1" dur="indefinite" restart="never" nodeType="tmRoot"/>
+      </p:par>
+    </p:tnLst>
+  </p:timing>
+</p:sld>
+</file>
+
+<file path=ppt/slides/slide28.xml><?xml version="1.0" encoding="utf-8"?>
+<p:sld xmlns:a="http://schemas.openxmlformats.org/drawingml/2006/main" xmlns:r="http://schemas.openxmlformats.org/officeDocument/2006/relationships" xmlns:p="http://schemas.openxmlformats.org/presentationml/2006/main">
+  <p:cSld>
+    <p:spTree>
+      <p:nvGrpSpPr>
+        <p:cNvPr id="1" name=""/>
+        <p:cNvGrpSpPr/>
+        <p:nvPr/>
+      </p:nvGrpSpPr>
+      <p:grpSpPr>
+        <a:xfrm>
+          <a:off x="0" y="0"/>
+          <a:ext cx="0" cy="0"/>
+          <a:chOff x="0" y="0"/>
+          <a:chExt cx="0" cy="0"/>
+        </a:xfrm>
+      </p:grpSpPr>
+      <p:sp>
+        <p:nvSpPr>
+          <p:cNvPr id="7" name="Прямоугольник 6"/>
+          <p:cNvSpPr/>
+          <p:nvPr/>
+        </p:nvSpPr>
+        <p:spPr>
+          <a:xfrm>
+            <a:off x="0" y="0"/>
+            <a:ext cx="12192000" cy="6740307"/>
+          </a:xfrm>
+          <a:prstGeom prst="rect">
+            <a:avLst/>
+          </a:prstGeom>
+        </p:spPr>
+        <p:txBody>
+          <a:bodyPr wrap="square" lIns="360000" rIns="360000">
+            <a:spAutoFit/>
+          </a:bodyPr>
+          <a:lstStyle/>
+          <a:p>
+            <a:pPr>
+              <a:lnSpc>
+                <a:spcPct val="150000"/>
+              </a:lnSpc>
+            </a:pPr>
+            <a:r>
+              <a:rPr lang="ru-RU" sz="2400" b="1" dirty="0"/>
+              <a:t>Анализ ответа (</a:t>
+            </a:r>
+            <a:r>
+              <a:rPr lang="ru-RU" sz="2400" b="1" dirty="0" err="1"/>
+              <a:t>Response</a:t>
+            </a:r>
+            <a:r>
+              <a:rPr lang="ru-RU" sz="2400" b="1" dirty="0"/>
+              <a:t>)</a:t>
+            </a:r>
+          </a:p>
+          <a:p>
+            <a:pPr>
+              <a:lnSpc>
+                <a:spcPct val="150000"/>
+              </a:lnSpc>
+            </a:pPr>
+            <a:r>
+              <a:rPr lang="ru-RU" sz="2400" dirty="0"/>
+              <a:t>После нажатия «</a:t>
+            </a:r>
+            <a:r>
+              <a:rPr lang="ru-RU" sz="2400" dirty="0" err="1"/>
+              <a:t>Execute</a:t>
+            </a:r>
+            <a:r>
+              <a:rPr lang="ru-RU" sz="2400" dirty="0"/>
+              <a:t>» </a:t>
+            </a:r>
+            <a:r>
+              <a:rPr lang="ru-RU" sz="2400" dirty="0" err="1"/>
+              <a:t>Swagger</a:t>
+            </a:r>
+            <a:r>
+              <a:rPr lang="ru-RU" sz="2400" dirty="0"/>
+              <a:t> показывает полную картину того, как сервер отреагировал на запрос.</a:t>
+            </a:r>
+          </a:p>
+          <a:p>
+            <a:pPr>
+              <a:lnSpc>
+                <a:spcPct val="150000"/>
+              </a:lnSpc>
+            </a:pPr>
+            <a:r>
+              <a:rPr lang="ru-RU" sz="2400" b="1" dirty="0"/>
+              <a:t>Что мы видим в ответе:</a:t>
+            </a:r>
+            <a:endParaRPr lang="ru-RU" sz="2400" dirty="0"/>
+          </a:p>
+          <a:p>
+            <a:pPr marL="342900" indent="-342900">
+              <a:lnSpc>
+                <a:spcPct val="150000"/>
+              </a:lnSpc>
+              <a:buFont typeface="Arial" panose="020B0604020202020204" pitchFamily="34" charset="0"/>
+              <a:buChar char="•"/>
+            </a:pPr>
+            <a:r>
+              <a:rPr lang="ru-RU" sz="2400" b="1" dirty="0" err="1"/>
+              <a:t>Curl</a:t>
+            </a:r>
+            <a:r>
+              <a:rPr lang="ru-RU" sz="2400" b="1" dirty="0"/>
+              <a:t>:</a:t>
+            </a:r>
+            <a:r>
+              <a:rPr lang="ru-RU" sz="2400" dirty="0"/>
+              <a:t> Готовая команда для консоли, если нужно повторить запрос вне браузера.</a:t>
+            </a:r>
+          </a:p>
+          <a:p>
+            <a:pPr marL="342900" indent="-342900">
+              <a:lnSpc>
+                <a:spcPct val="150000"/>
+              </a:lnSpc>
+              <a:buFont typeface="Arial" panose="020B0604020202020204" pitchFamily="34" charset="0"/>
+              <a:buChar char="•"/>
+            </a:pPr>
+            <a:r>
+              <a:rPr lang="ru-RU" sz="2400" b="1" dirty="0" err="1"/>
+              <a:t>Response</a:t>
+            </a:r>
+            <a:r>
+              <a:rPr lang="ru-RU" sz="2400" b="1" dirty="0"/>
+              <a:t> </a:t>
+            </a:r>
+            <a:r>
+              <a:rPr lang="ru-RU" sz="2400" b="1" dirty="0" err="1"/>
+              <a:t>Body</a:t>
+            </a:r>
+            <a:r>
+              <a:rPr lang="ru-RU" sz="2400" b="1" dirty="0"/>
+              <a:t> (Тело ответа):</a:t>
+            </a:r>
+            <a:r>
+              <a:rPr lang="ru-RU" sz="2400" dirty="0"/>
+              <a:t> Сервер вернул нам созданный объект с присвоенным </a:t>
+            </a:r>
+            <a:r>
+              <a:rPr lang="ru-RU" sz="2400" dirty="0" err="1"/>
+              <a:t>id</a:t>
+            </a:r>
+            <a:r>
+              <a:rPr lang="ru-RU" sz="2400" dirty="0"/>
+              <a:t> и датой </a:t>
+            </a:r>
+            <a:r>
+              <a:rPr lang="ru-RU" sz="2400" dirty="0" err="1"/>
+              <a:t>createdAt</a:t>
+            </a:r>
+            <a:r>
+              <a:rPr lang="ru-RU" sz="2400" dirty="0"/>
+              <a:t> в формате JSON.</a:t>
+            </a:r>
+          </a:p>
+          <a:p>
+            <a:pPr marL="342900" indent="-342900">
+              <a:lnSpc>
+                <a:spcPct val="150000"/>
+              </a:lnSpc>
+              <a:buFont typeface="Arial" panose="020B0604020202020204" pitchFamily="34" charset="0"/>
+              <a:buChar char="•"/>
+            </a:pPr>
+            <a:r>
+              <a:rPr lang="ru-RU" sz="2400" b="1" dirty="0" err="1"/>
+              <a:t>Response</a:t>
+            </a:r>
+            <a:r>
+              <a:rPr lang="ru-RU" sz="2400" b="1" dirty="0"/>
+              <a:t> </a:t>
+            </a:r>
+            <a:r>
+              <a:rPr lang="ru-RU" sz="2400" b="1" dirty="0" err="1"/>
+              <a:t>Headers</a:t>
+            </a:r>
+            <a:r>
+              <a:rPr lang="ru-RU" sz="2400" b="1" dirty="0"/>
+              <a:t>:</a:t>
+            </a:r>
+            <a:r>
+              <a:rPr lang="ru-RU" sz="2400" dirty="0"/>
+              <a:t> Технические заголовки ответа (тип контента, сервер).</a:t>
+            </a:r>
+          </a:p>
+          <a:p>
+            <a:pPr marL="342900" indent="-342900">
+              <a:lnSpc>
+                <a:spcPct val="150000"/>
+              </a:lnSpc>
+              <a:buFont typeface="Arial" panose="020B0604020202020204" pitchFamily="34" charset="0"/>
+              <a:buChar char="•"/>
+            </a:pPr>
+            <a:r>
+              <a:rPr lang="ru-RU" sz="2400" b="1" dirty="0" err="1"/>
+              <a:t>Code</a:t>
+            </a:r>
+            <a:r>
+              <a:rPr lang="ru-RU" sz="2400" b="1" dirty="0"/>
+              <a:t> (Статус-код):</a:t>
+            </a:r>
+            <a:r>
+              <a:rPr lang="ru-RU" sz="2400" dirty="0"/>
+              <a:t> Например, 200 OK (всё прошло успешно) или 400 </a:t>
+            </a:r>
+            <a:r>
+              <a:rPr lang="ru-RU" sz="2400" dirty="0" err="1"/>
+              <a:t>Bad</a:t>
+            </a:r>
+            <a:r>
+              <a:rPr lang="ru-RU" sz="2400" dirty="0"/>
+              <a:t> </a:t>
+            </a:r>
+            <a:r>
+              <a:rPr lang="ru-RU" sz="2400" dirty="0" err="1"/>
+              <a:t>Request</a:t>
+            </a:r>
+            <a:r>
+              <a:rPr lang="ru-RU" sz="2400" dirty="0"/>
+              <a:t> (ошибка </a:t>
+            </a:r>
+            <a:r>
+              <a:rPr lang="ru-RU" sz="2400" dirty="0" err="1"/>
+              <a:t>валидации</a:t>
+            </a:r>
+            <a:r>
+              <a:rPr lang="ru-RU" sz="2400" dirty="0"/>
+              <a:t>).</a:t>
+            </a:r>
+          </a:p>
+        </p:txBody>
+      </p:sp>
+    </p:spTree>
+    <p:extLst>
+      <p:ext uri="{BB962C8B-B14F-4D97-AF65-F5344CB8AC3E}">
+        <p14:creationId xmlns:p14="http://schemas.microsoft.com/office/powerpoint/2010/main" val="383189630"/>
+      </p:ext>
+    </p:extLst>
+  </p:cSld>
+  <p:clrMapOvr>
+    <a:masterClrMapping/>
+  </p:clrMapOvr>
+  <p:timing>
+    <p:tnLst>
+      <p:par>
+        <p:cTn id="1" dur="indefinite" restart="never" nodeType="tmRoot"/>
+      </p:par>
+    </p:tnLst>
+  </p:timing>
+</p:sld>
+</file>
+
+<file path=ppt/slides/slide29.xml><?xml version="1.0" encoding="utf-8"?>
+<p:sld xmlns:a="http://schemas.openxmlformats.org/drawingml/2006/main" xmlns:r="http://schemas.openxmlformats.org/officeDocument/2006/relationships" xmlns:p="http://schemas.openxmlformats.org/presentationml/2006/main">
+  <p:cSld>
+    <p:spTree>
+      <p:nvGrpSpPr>
+        <p:cNvPr id="1" name=""/>
+        <p:cNvGrpSpPr/>
+        <p:nvPr/>
+      </p:nvGrpSpPr>
+      <p:grpSpPr>
+        <a:xfrm>
+          <a:off x="0" y="0"/>
+          <a:ext cx="0" cy="0"/>
+          <a:chOff x="0" y="0"/>
+          <a:chExt cx="0" cy="0"/>
+        </a:xfrm>
+      </p:grpSpPr>
+      <p:pic>
+        <p:nvPicPr>
+          <p:cNvPr id="5" name="Рисунок 4"/>
+          <p:cNvPicPr>
+            <a:picLocks noChangeAspect="1"/>
+          </p:cNvPicPr>
+          <p:nvPr/>
+        </p:nvPicPr>
+        <p:blipFill rotWithShape="1">
+          <a:blip r:embed="rId3"/>
+          <a:srcRect b="56688"/>
+          <a:stretch/>
+        </p:blipFill>
+        <p:spPr>
+          <a:xfrm>
+            <a:off x="200022" y="844942"/>
+            <a:ext cx="11846834" cy="5301919"/>
+          </a:xfrm>
+          <a:prstGeom prst="rect">
+            <a:avLst/>
+          </a:prstGeom>
+        </p:spPr>
+      </p:pic>
+    </p:spTree>
+    <p:extLst>
+      <p:ext uri="{BB962C8B-B14F-4D97-AF65-F5344CB8AC3E}">
+        <p14:creationId xmlns:p14="http://schemas.microsoft.com/office/powerpoint/2010/main" val="784251050"/>
       </p:ext>
     </p:extLst>
   </p:cSld>
@@ -3263,6 +11232,1013 @@
     <p:extLst>
       <p:ext uri="{BB962C8B-B14F-4D97-AF65-F5344CB8AC3E}">
         <p14:creationId xmlns:p14="http://schemas.microsoft.com/office/powerpoint/2010/main" val="610206427"/>
+      </p:ext>
+    </p:extLst>
+  </p:cSld>
+  <p:clrMapOvr>
+    <a:masterClrMapping/>
+  </p:clrMapOvr>
+  <p:timing>
+    <p:tnLst>
+      <p:par>
+        <p:cTn id="1" dur="indefinite" restart="never" nodeType="tmRoot"/>
+      </p:par>
+    </p:tnLst>
+  </p:timing>
+</p:sld>
+</file>
+
+<file path=ppt/slides/slide30.xml><?xml version="1.0" encoding="utf-8"?>
+<p:sld xmlns:a="http://schemas.openxmlformats.org/drawingml/2006/main" xmlns:r="http://schemas.openxmlformats.org/officeDocument/2006/relationships" xmlns:p="http://schemas.openxmlformats.org/presentationml/2006/main">
+  <p:cSld>
+    <p:spTree>
+      <p:nvGrpSpPr>
+        <p:cNvPr id="1" name=""/>
+        <p:cNvGrpSpPr/>
+        <p:nvPr/>
+      </p:nvGrpSpPr>
+      <p:grpSpPr>
+        <a:xfrm>
+          <a:off x="0" y="0"/>
+          <a:ext cx="0" cy="0"/>
+          <a:chOff x="0" y="0"/>
+          <a:chExt cx="0" cy="0"/>
+        </a:xfrm>
+      </p:grpSpPr>
+      <p:sp>
+        <p:nvSpPr>
+          <p:cNvPr id="11" name="Rectangle 28" descr="Светлый диагональный 2"/>
+          <p:cNvSpPr>
+            <a:spLocks noChangeArrowheads="1"/>
+          </p:cNvSpPr>
+          <p:nvPr/>
+        </p:nvSpPr>
+        <p:spPr bwMode="auto">
+          <a:xfrm>
+            <a:off x="0" y="0"/>
+            <a:ext cx="12192000" cy="654357"/>
+          </a:xfrm>
+          <a:prstGeom prst="rect">
+            <a:avLst/>
+          </a:prstGeom>
+          <a:pattFill prst="ltUpDiag">
+            <a:fgClr>
+              <a:schemeClr val="accent1">
+                <a:lumMod val="40000"/>
+                <a:lumOff val="60000"/>
+              </a:schemeClr>
+            </a:fgClr>
+            <a:bgClr>
+              <a:srgbClr val="FFFFFF"/>
+            </a:bgClr>
+          </a:pattFill>
+          <a:ln w="15875" algn="ctr">
+            <a:solidFill>
+              <a:schemeClr val="accent5">
+                <a:lumMod val="50000"/>
+              </a:schemeClr>
+            </a:solidFill>
+            <a:miter lim="800000"/>
+            <a:headEnd/>
+            <a:tailEnd/>
+          </a:ln>
+          <a:effectLst/>
+        </p:spPr>
+        <p:txBody>
+          <a:bodyPr vert="horz" wrap="square" lIns="18000" tIns="18000" rIns="18000" bIns="18000" numCol="1" anchor="ctr" anchorCtr="0" compatLnSpc="1">
+            <a:prstTxWarp prst="textNoShape">
+              <a:avLst/>
+            </a:prstTxWarp>
+          </a:bodyPr>
+          <a:lstStyle/>
+          <a:p>
+            <a:pPr algn="ctr"/>
+            <a:r>
+              <a:rPr lang="en-US" sz="2800" b="1" dirty="0">
+                <a:solidFill>
+                  <a:schemeClr val="tx2">
+                    <a:lumMod val="50000"/>
+                  </a:schemeClr>
+                </a:solidFill>
+                <a:latin typeface="Bookman Old Style" panose="02050604050505020204" pitchFamily="18" charset="0"/>
+                <a:cs typeface="Times New Roman" panose="02020603050405020304" pitchFamily="18" charset="0"/>
+              </a:rPr>
+              <a:t>Docker — «</a:t>
+            </a:r>
+            <a:r>
+              <a:rPr lang="ru-RU" sz="2800" b="1" dirty="0">
+                <a:solidFill>
+                  <a:schemeClr val="tx2">
+                    <a:lumMod val="50000"/>
+                  </a:schemeClr>
+                </a:solidFill>
+                <a:latin typeface="Bookman Old Style" panose="02050604050505020204" pitchFamily="18" charset="0"/>
+                <a:cs typeface="Times New Roman" panose="02020603050405020304" pitchFamily="18" charset="0"/>
+              </a:rPr>
+              <a:t>упаковка» приложения</a:t>
+            </a:r>
+            <a:endParaRPr lang="ru-RU" sz="2800" b="1" dirty="0">
+              <a:solidFill>
+                <a:schemeClr val="tx2">
+                  <a:lumMod val="50000"/>
+                </a:schemeClr>
+              </a:solidFill>
+              <a:latin typeface="Bookman Old Style" panose="02050604050505020204" pitchFamily="18" charset="0"/>
+              <a:cs typeface="Times New Roman" panose="02020603050405020304" pitchFamily="18" charset="0"/>
+            </a:endParaRPr>
+          </a:p>
+        </p:txBody>
+      </p:sp>
+      <p:sp>
+        <p:nvSpPr>
+          <p:cNvPr id="7" name="Прямоугольник 6"/>
+          <p:cNvSpPr/>
+          <p:nvPr/>
+        </p:nvSpPr>
+        <p:spPr>
+          <a:xfrm>
+            <a:off x="0" y="654357"/>
+            <a:ext cx="12192000" cy="5809732"/>
+          </a:xfrm>
+          <a:prstGeom prst="rect">
+            <a:avLst/>
+          </a:prstGeom>
+        </p:spPr>
+        <p:txBody>
+          <a:bodyPr wrap="square" lIns="360000" rIns="360000">
+            <a:spAutoFit/>
+          </a:bodyPr>
+          <a:lstStyle/>
+          <a:p>
+            <a:pPr>
+              <a:lnSpc>
+                <a:spcPct val="130000"/>
+              </a:lnSpc>
+            </a:pPr>
+            <a:r>
+              <a:rPr lang="ru-RU" sz="2400" b="1" dirty="0"/>
+              <a:t>Проблема «На моем компьютере всё работает</a:t>
+            </a:r>
+            <a:r>
+              <a:rPr lang="ru-RU" sz="2400" b="1" dirty="0" smtClean="0"/>
+              <a:t>!»</a:t>
+            </a:r>
+          </a:p>
+          <a:p>
+            <a:pPr>
+              <a:lnSpc>
+                <a:spcPct val="130000"/>
+              </a:lnSpc>
+            </a:pPr>
+            <a:r>
+              <a:rPr lang="ru-RU" sz="2400" b="1" dirty="0"/>
+              <a:t>Ситуация:</a:t>
+            </a:r>
+            <a:r>
+              <a:rPr lang="ru-RU" sz="2400" dirty="0"/>
+              <a:t> Вы написали отличный код, настроили базу данных, всё работает идеально. Вы передаете проект заказчику или коллеге, и у них... ничего не запускается</a:t>
+            </a:r>
+            <a:r>
+              <a:rPr lang="ru-RU" sz="2400" dirty="0" smtClean="0"/>
+              <a:t>.</a:t>
+            </a:r>
+          </a:p>
+          <a:p>
+            <a:pPr marL="342900" indent="-342900">
+              <a:lnSpc>
+                <a:spcPct val="130000"/>
+              </a:lnSpc>
+              <a:buFont typeface="Arial" panose="020B0604020202020204" pitchFamily="34" charset="0"/>
+              <a:buChar char="•"/>
+            </a:pPr>
+            <a:r>
+              <a:rPr lang="ru-RU" sz="2400" b="1" dirty="0"/>
+              <a:t>Причины:</a:t>
+            </a:r>
+            <a:r>
+              <a:rPr lang="ru-RU" sz="2400" dirty="0"/>
+              <a:t> Другая версия </a:t>
+            </a:r>
+            <a:r>
+              <a:rPr lang="ru-RU" sz="2400" dirty="0" err="1"/>
+              <a:t>Windows</a:t>
+            </a:r>
+            <a:r>
+              <a:rPr lang="ru-RU" sz="2400" dirty="0"/>
+              <a:t>/</a:t>
+            </a:r>
+            <a:r>
+              <a:rPr lang="ru-RU" sz="2400" dirty="0" err="1"/>
+              <a:t>Linux</a:t>
+            </a:r>
+            <a:r>
+              <a:rPr lang="ru-RU" sz="2400" dirty="0"/>
+              <a:t>, не установлены библиотеки, заняты порты, не хватает прав доступа.</a:t>
+            </a:r>
+          </a:p>
+          <a:p>
+            <a:pPr>
+              <a:lnSpc>
+                <a:spcPct val="130000"/>
+              </a:lnSpc>
+            </a:pPr>
+            <a:r>
+              <a:rPr lang="ru-RU" sz="2400" b="1" dirty="0"/>
+              <a:t>Решение: </a:t>
+            </a:r>
+            <a:r>
+              <a:rPr lang="ru-RU" sz="2400" b="1" dirty="0" err="1"/>
+              <a:t>Docker</a:t>
+            </a:r>
+            <a:r>
+              <a:rPr lang="ru-RU" sz="2400" b="1" dirty="0"/>
+              <a:t> (Контейнеризация)</a:t>
+            </a:r>
+            <a:r>
+              <a:rPr lang="ru-RU" sz="2400" dirty="0"/>
+              <a:t/>
+            </a:r>
+            <a:br>
+              <a:rPr lang="ru-RU" sz="2400" dirty="0"/>
+            </a:br>
+            <a:r>
+              <a:rPr lang="ru-RU" sz="2400" dirty="0"/>
+              <a:t>Это технология, которая позволяет упаковать ваше приложение вместе со всем его окружением (ОС, системные библиотеки, настройки) в один изолированный «ящик» — </a:t>
+            </a:r>
+            <a:r>
+              <a:rPr lang="ru-RU" sz="2400" b="1" dirty="0"/>
+              <a:t>контейнер</a:t>
+            </a:r>
+            <a:r>
+              <a:rPr lang="ru-RU" sz="2400" dirty="0" smtClean="0"/>
+              <a:t>.</a:t>
+            </a:r>
+          </a:p>
+          <a:p>
+            <a:pPr marL="342900" indent="-342900">
+              <a:lnSpc>
+                <a:spcPct val="130000"/>
+              </a:lnSpc>
+              <a:buFont typeface="Arial" panose="020B0604020202020204" pitchFamily="34" charset="0"/>
+              <a:buChar char="•"/>
+            </a:pPr>
+            <a:r>
+              <a:rPr lang="ru-RU" sz="2400" b="1" dirty="0"/>
+              <a:t>Главная мысль:</a:t>
+            </a:r>
+            <a:r>
+              <a:rPr lang="ru-RU" sz="2400" dirty="0"/>
+              <a:t> «Если это запустилось в контейнере у вас — это гарантированно запустится на любом сервере в мире».</a:t>
+            </a:r>
+          </a:p>
+        </p:txBody>
+      </p:sp>
+    </p:spTree>
+    <p:extLst>
+      <p:ext uri="{BB962C8B-B14F-4D97-AF65-F5344CB8AC3E}">
+        <p14:creationId xmlns:p14="http://schemas.microsoft.com/office/powerpoint/2010/main" val="2920630759"/>
+      </p:ext>
+    </p:extLst>
+  </p:cSld>
+  <p:clrMapOvr>
+    <a:masterClrMapping/>
+  </p:clrMapOvr>
+  <p:timing>
+    <p:tnLst>
+      <p:par>
+        <p:cTn id="1" dur="indefinite" restart="never" nodeType="tmRoot"/>
+      </p:par>
+    </p:tnLst>
+  </p:timing>
+</p:sld>
+</file>
+
+<file path=ppt/slides/slide31.xml><?xml version="1.0" encoding="utf-8"?>
+<p:sld xmlns:a="http://schemas.openxmlformats.org/drawingml/2006/main" xmlns:r="http://schemas.openxmlformats.org/officeDocument/2006/relationships" xmlns:p="http://schemas.openxmlformats.org/presentationml/2006/main">
+  <p:cSld>
+    <p:spTree>
+      <p:nvGrpSpPr>
+        <p:cNvPr id="1" name=""/>
+        <p:cNvGrpSpPr/>
+        <p:nvPr/>
+      </p:nvGrpSpPr>
+      <p:grpSpPr>
+        <a:xfrm>
+          <a:off x="0" y="0"/>
+          <a:ext cx="0" cy="0"/>
+          <a:chOff x="0" y="0"/>
+          <a:chExt cx="0" cy="0"/>
+        </a:xfrm>
+      </p:grpSpPr>
+      <p:sp>
+        <p:nvSpPr>
+          <p:cNvPr id="7" name="Прямоугольник 6"/>
+          <p:cNvSpPr/>
+          <p:nvPr/>
+        </p:nvSpPr>
+        <p:spPr>
+          <a:xfrm>
+            <a:off x="0" y="0"/>
+            <a:ext cx="12192000" cy="5569666"/>
+          </a:xfrm>
+          <a:prstGeom prst="rect">
+            <a:avLst/>
+          </a:prstGeom>
+        </p:spPr>
+        <p:txBody>
+          <a:bodyPr wrap="square" lIns="360000" rIns="360000">
+            <a:spAutoFit/>
+          </a:bodyPr>
+          <a:lstStyle/>
+          <a:p>
+            <a:pPr>
+              <a:lnSpc>
+                <a:spcPct val="150000"/>
+              </a:lnSpc>
+            </a:pPr>
+            <a:r>
+              <a:rPr lang="ru-RU" sz="2400" b="1" dirty="0"/>
+              <a:t>Как устроен </a:t>
+            </a:r>
+            <a:r>
+              <a:rPr lang="ru-RU" sz="2400" b="1" dirty="0" err="1"/>
+              <a:t>Docker</a:t>
+            </a:r>
+            <a:r>
+              <a:rPr lang="ru-RU" sz="2400" b="1" dirty="0"/>
+              <a:t>?</a:t>
+            </a:r>
+          </a:p>
+          <a:p>
+            <a:pPr>
+              <a:lnSpc>
+                <a:spcPct val="150000"/>
+              </a:lnSpc>
+            </a:pPr>
+            <a:r>
+              <a:rPr lang="ru-RU" sz="2400" b="1" dirty="0" err="1"/>
+              <a:t>Docker</a:t>
+            </a:r>
+            <a:r>
+              <a:rPr lang="ru-RU" sz="2400" b="1" dirty="0"/>
+              <a:t> </a:t>
+            </a:r>
+            <a:r>
+              <a:rPr lang="ru-RU" sz="2400" b="1" dirty="0" err="1"/>
+              <a:t>Image</a:t>
+            </a:r>
+            <a:r>
+              <a:rPr lang="ru-RU" sz="2400" b="1" dirty="0"/>
+              <a:t> (Образ):</a:t>
+            </a:r>
+            <a:r>
+              <a:rPr lang="ru-RU" sz="2400" dirty="0"/>
+              <a:t> Это «чертеж» или «слепок» вашей системы. В нем записано: какая ОС нужна, какие </a:t>
+            </a:r>
+            <a:r>
+              <a:rPr lang="ru-RU" sz="2400" dirty="0" err="1"/>
+              <a:t>NuGet</a:t>
+            </a:r>
+            <a:r>
+              <a:rPr lang="ru-RU" sz="2400" dirty="0"/>
+              <a:t>-пакеты установить и куда положить ваш код.</a:t>
+            </a:r>
+          </a:p>
+          <a:p>
+            <a:pPr>
+              <a:lnSpc>
+                <a:spcPct val="150000"/>
+              </a:lnSpc>
+            </a:pPr>
+            <a:r>
+              <a:rPr lang="ru-RU" sz="2400" b="1" dirty="0" err="1"/>
+              <a:t>Docker</a:t>
+            </a:r>
+            <a:r>
+              <a:rPr lang="ru-RU" sz="2400" b="1" dirty="0"/>
+              <a:t> </a:t>
+            </a:r>
+            <a:r>
+              <a:rPr lang="ru-RU" sz="2400" b="1" dirty="0" err="1"/>
+              <a:t>Container</a:t>
+            </a:r>
+            <a:r>
+              <a:rPr lang="ru-RU" sz="2400" b="1" dirty="0"/>
+              <a:t> (Контейнер):</a:t>
+            </a:r>
+            <a:r>
+              <a:rPr lang="ru-RU" sz="2400" dirty="0"/>
+              <a:t> Это живой, работающий экземпляр образа. Вы можете запустить 10 одинаковых контейнеров из одного образа.</a:t>
+            </a:r>
+          </a:p>
+          <a:p>
+            <a:pPr>
+              <a:lnSpc>
+                <a:spcPct val="150000"/>
+              </a:lnSpc>
+            </a:pPr>
+            <a:r>
+              <a:rPr lang="ru-RU" sz="2400" b="1" dirty="0"/>
+              <a:t>Изоляция:</a:t>
+            </a:r>
+            <a:r>
+              <a:rPr lang="ru-RU" sz="2400" dirty="0"/>
+              <a:t> Приложение внутри контейнера думает, что оно одно в системе. Оно не может случайно испортить файлы на вашем реальном диске.</a:t>
+            </a:r>
+          </a:p>
+        </p:txBody>
+      </p:sp>
+    </p:spTree>
+    <p:extLst>
+      <p:ext uri="{BB962C8B-B14F-4D97-AF65-F5344CB8AC3E}">
+        <p14:creationId xmlns:p14="http://schemas.microsoft.com/office/powerpoint/2010/main" val="146661353"/>
+      </p:ext>
+    </p:extLst>
+  </p:cSld>
+  <p:clrMapOvr>
+    <a:masterClrMapping/>
+  </p:clrMapOvr>
+  <p:timing>
+    <p:tnLst>
+      <p:par>
+        <p:cTn id="1" dur="indefinite" restart="never" nodeType="tmRoot"/>
+      </p:par>
+    </p:tnLst>
+  </p:timing>
+</p:sld>
+</file>
+
+<file path=ppt/slides/slide32.xml><?xml version="1.0" encoding="utf-8"?>
+<p:sld xmlns:a="http://schemas.openxmlformats.org/drawingml/2006/main" xmlns:r="http://schemas.openxmlformats.org/officeDocument/2006/relationships" xmlns:p="http://schemas.openxmlformats.org/presentationml/2006/main">
+  <p:cSld>
+    <p:spTree>
+      <p:nvGrpSpPr>
+        <p:cNvPr id="1" name=""/>
+        <p:cNvGrpSpPr/>
+        <p:nvPr/>
+      </p:nvGrpSpPr>
+      <p:grpSpPr>
+        <a:xfrm>
+          <a:off x="0" y="0"/>
+          <a:ext cx="0" cy="0"/>
+          <a:chOff x="0" y="0"/>
+          <a:chExt cx="0" cy="0"/>
+        </a:xfrm>
+      </p:grpSpPr>
+      <p:sp>
+        <p:nvSpPr>
+          <p:cNvPr id="7" name="Прямоугольник 6"/>
+          <p:cNvSpPr/>
+          <p:nvPr/>
+        </p:nvSpPr>
+        <p:spPr>
+          <a:xfrm>
+            <a:off x="0" y="0"/>
+            <a:ext cx="12192000" cy="5015668"/>
+          </a:xfrm>
+          <a:prstGeom prst="rect">
+            <a:avLst/>
+          </a:prstGeom>
+        </p:spPr>
+        <p:txBody>
+          <a:bodyPr wrap="square" lIns="360000" rIns="360000">
+            <a:spAutoFit/>
+          </a:bodyPr>
+          <a:lstStyle/>
+          <a:p>
+            <a:pPr>
+              <a:lnSpc>
+                <a:spcPct val="150000"/>
+              </a:lnSpc>
+            </a:pPr>
+            <a:r>
+              <a:rPr lang="ru-RU" sz="2400" b="1" dirty="0" err="1"/>
+              <a:t>Docker</a:t>
+            </a:r>
+            <a:r>
+              <a:rPr lang="ru-RU" sz="2400" b="1" dirty="0"/>
+              <a:t> </a:t>
+            </a:r>
+            <a:r>
+              <a:rPr lang="ru-RU" sz="2400" b="1" dirty="0" err="1"/>
+              <a:t>Compose</a:t>
+            </a:r>
+            <a:r>
+              <a:rPr lang="ru-RU" sz="2400" b="1" dirty="0"/>
+              <a:t> — Дирижер вашей системы</a:t>
+            </a:r>
+          </a:p>
+          <a:p>
+            <a:pPr>
+              <a:lnSpc>
+                <a:spcPct val="150000"/>
+              </a:lnSpc>
+            </a:pPr>
+            <a:r>
+              <a:rPr lang="ru-RU" sz="2400" dirty="0"/>
+              <a:t>Профессиональное приложение — это не только один C#-код. Вам нужна база данных (</a:t>
+            </a:r>
+            <a:r>
+              <a:rPr lang="ru-RU" sz="2400" dirty="0" err="1"/>
+              <a:t>PostgreSQL</a:t>
+            </a:r>
+            <a:r>
+              <a:rPr lang="ru-RU" sz="2400" dirty="0"/>
+              <a:t>), кэш (</a:t>
+            </a:r>
+            <a:r>
+              <a:rPr lang="ru-RU" sz="2400" dirty="0" err="1"/>
+              <a:t>Redis</a:t>
+            </a:r>
+            <a:r>
+              <a:rPr lang="ru-RU" sz="2400" dirty="0"/>
+              <a:t>) и, возможно, </a:t>
+            </a:r>
+            <a:r>
+              <a:rPr lang="ru-RU" sz="2400" dirty="0" err="1"/>
+              <a:t>фронтенд</a:t>
+            </a:r>
+            <a:r>
+              <a:rPr lang="ru-RU" sz="2400" dirty="0"/>
+              <a:t> на </a:t>
+            </a:r>
+            <a:r>
+              <a:rPr lang="ru-RU" sz="2400" dirty="0" err="1"/>
+              <a:t>React</a:t>
+            </a:r>
+            <a:r>
+              <a:rPr lang="ru-RU" sz="2400" dirty="0"/>
+              <a:t>.</a:t>
+            </a:r>
+          </a:p>
+          <a:p>
+            <a:pPr>
+              <a:lnSpc>
+                <a:spcPct val="150000"/>
+              </a:lnSpc>
+            </a:pPr>
+            <a:r>
+              <a:rPr lang="ru-RU" sz="2400" b="1" dirty="0" err="1"/>
+              <a:t>Docker</a:t>
+            </a:r>
+            <a:r>
+              <a:rPr lang="ru-RU" sz="2400" b="1" dirty="0"/>
+              <a:t> </a:t>
+            </a:r>
+            <a:r>
+              <a:rPr lang="ru-RU" sz="2400" b="1" dirty="0" err="1"/>
+              <a:t>Compose</a:t>
+            </a:r>
+            <a:r>
+              <a:rPr lang="ru-RU" sz="2400" dirty="0"/>
+              <a:t> — это инструмент, который позволяет описать всю вашу инфраструктуру в одном текстовом файле (</a:t>
+            </a:r>
+            <a:r>
+              <a:rPr lang="ru-RU" sz="2400" dirty="0" err="1"/>
+              <a:t>docker-compose.yml</a:t>
+            </a:r>
+            <a:r>
+              <a:rPr lang="ru-RU" sz="2400" dirty="0"/>
+              <a:t>).</a:t>
+            </a:r>
+          </a:p>
+          <a:p>
+            <a:pPr>
+              <a:lnSpc>
+                <a:spcPct val="150000"/>
+              </a:lnSpc>
+            </a:pPr>
+            <a:r>
+              <a:rPr lang="ru-RU" sz="2400" b="1" dirty="0"/>
+              <a:t>Всего одна команда:</a:t>
+            </a:r>
+            <a:r>
+              <a:rPr lang="ru-RU" sz="2400" dirty="0"/>
+              <a:t> </a:t>
+            </a:r>
+            <a:r>
+              <a:rPr lang="ru-RU" sz="2400" dirty="0" err="1"/>
+              <a:t>docker-compose</a:t>
+            </a:r>
+            <a:r>
+              <a:rPr lang="ru-RU" sz="2400" dirty="0"/>
+              <a:t> </a:t>
+            </a:r>
+            <a:r>
+              <a:rPr lang="ru-RU" sz="2400" dirty="0" err="1"/>
+              <a:t>up</a:t>
+            </a:r>
+            <a:endParaRPr lang="ru-RU" sz="2400" dirty="0"/>
+          </a:p>
+          <a:p>
+            <a:pPr>
+              <a:lnSpc>
+                <a:spcPct val="150000"/>
+              </a:lnSpc>
+            </a:pPr>
+            <a:r>
+              <a:rPr lang="ru-RU" sz="2400" b="1" dirty="0"/>
+              <a:t>Результат:</a:t>
+            </a:r>
+            <a:r>
+              <a:rPr lang="ru-RU" sz="2400" dirty="0"/>
+              <a:t> </a:t>
+            </a:r>
+            <a:r>
+              <a:rPr lang="ru-RU" sz="2400" dirty="0" err="1"/>
+              <a:t>Docker</a:t>
+            </a:r>
+            <a:r>
+              <a:rPr lang="ru-RU" sz="2400" dirty="0"/>
+              <a:t> сам скачает базу данных, создаст для неё хранилище, соберет ваше приложение, соединит их в одну сеть и запустит всё одновременно.</a:t>
+            </a:r>
+          </a:p>
+        </p:txBody>
+      </p:sp>
+    </p:spTree>
+    <p:extLst>
+      <p:ext uri="{BB962C8B-B14F-4D97-AF65-F5344CB8AC3E}">
+        <p14:creationId xmlns:p14="http://schemas.microsoft.com/office/powerpoint/2010/main" val="3762417214"/>
+      </p:ext>
+    </p:extLst>
+  </p:cSld>
+  <p:clrMapOvr>
+    <a:masterClrMapping/>
+  </p:clrMapOvr>
+  <p:timing>
+    <p:tnLst>
+      <p:par>
+        <p:cTn id="1" dur="indefinite" restart="never" nodeType="tmRoot"/>
+      </p:par>
+    </p:tnLst>
+  </p:timing>
+</p:sld>
+</file>
+
+<file path=ppt/slides/slide33.xml><?xml version="1.0" encoding="utf-8"?>
+<p:sld xmlns:a="http://schemas.openxmlformats.org/drawingml/2006/main" xmlns:r="http://schemas.openxmlformats.org/officeDocument/2006/relationships" xmlns:p="http://schemas.openxmlformats.org/presentationml/2006/main">
+  <p:cSld>
+    <p:spTree>
+      <p:nvGrpSpPr>
+        <p:cNvPr id="1" name=""/>
+        <p:cNvGrpSpPr/>
+        <p:nvPr/>
+      </p:nvGrpSpPr>
+      <p:grpSpPr>
+        <a:xfrm>
+          <a:off x="0" y="0"/>
+          <a:ext cx="0" cy="0"/>
+          <a:chOff x="0" y="0"/>
+          <a:chExt cx="0" cy="0"/>
+        </a:xfrm>
+      </p:grpSpPr>
+      <p:sp>
+        <p:nvSpPr>
+          <p:cNvPr id="7" name="Прямоугольник 6"/>
+          <p:cNvSpPr/>
+          <p:nvPr/>
+        </p:nvSpPr>
+        <p:spPr>
+          <a:xfrm>
+            <a:off x="0" y="0"/>
+            <a:ext cx="12192000" cy="6786473"/>
+          </a:xfrm>
+          <a:prstGeom prst="rect">
+            <a:avLst/>
+          </a:prstGeom>
+        </p:spPr>
+        <p:txBody>
+          <a:bodyPr wrap="square" lIns="360000" rIns="360000">
+            <a:spAutoFit/>
+          </a:bodyPr>
+          <a:lstStyle/>
+          <a:p>
+            <a:pPr>
+              <a:lnSpc>
+                <a:spcPct val="150000"/>
+              </a:lnSpc>
+            </a:pPr>
+            <a:r>
+              <a:rPr lang="ru-RU" sz="2400" b="1" dirty="0"/>
+              <a:t>Разбор примера (</a:t>
+            </a:r>
+            <a:r>
+              <a:rPr lang="en-US" sz="2400" b="1" dirty="0"/>
+              <a:t>PostgreSQL </a:t>
+            </a:r>
+            <a:r>
+              <a:rPr lang="ru-RU" sz="2400" b="1" dirty="0"/>
+              <a:t>в </a:t>
+            </a:r>
+            <a:r>
+              <a:rPr lang="en-US" sz="2400" b="1" dirty="0"/>
+              <a:t>Docker)</a:t>
+            </a:r>
+          </a:p>
+          <a:p>
+            <a:pPr>
+              <a:lnSpc>
+                <a:spcPct val="150000"/>
+              </a:lnSpc>
+            </a:pPr>
+            <a:r>
+              <a:rPr lang="ru-RU" sz="2400" i="1" dirty="0"/>
+              <a:t>Файл </a:t>
+            </a:r>
+            <a:r>
+              <a:rPr lang="en-US" sz="2400" i="1" dirty="0" err="1"/>
+              <a:t>docker-compose.yml</a:t>
+            </a:r>
+            <a:r>
+              <a:rPr lang="en-US" sz="2400" i="1" dirty="0"/>
+              <a:t> — </a:t>
+            </a:r>
+            <a:r>
+              <a:rPr lang="ru-RU" sz="2400" i="1" dirty="0"/>
+              <a:t>это просто список инструкций</a:t>
+            </a:r>
+            <a:r>
+              <a:rPr lang="ru-RU" sz="2400" i="1" dirty="0" smtClean="0"/>
+              <a:t>:</a:t>
+            </a:r>
+          </a:p>
+          <a:p>
+            <a:pPr>
+              <a:lnSpc>
+                <a:spcPct val="150000"/>
+              </a:lnSpc>
+            </a:pPr>
+            <a:r>
+              <a:rPr lang="en-US" sz="2200" dirty="0"/>
+              <a:t>services:</a:t>
+            </a:r>
+          </a:p>
+          <a:p>
+            <a:pPr>
+              <a:lnSpc>
+                <a:spcPct val="150000"/>
+              </a:lnSpc>
+            </a:pPr>
+            <a:r>
+              <a:rPr lang="en-US" sz="2200" dirty="0"/>
+              <a:t>  </a:t>
+            </a:r>
+            <a:r>
+              <a:rPr lang="en-US" sz="2200" dirty="0" err="1"/>
+              <a:t>postgres</a:t>
+            </a:r>
+            <a:r>
+              <a:rPr lang="en-US" sz="2200" dirty="0"/>
+              <a:t>:</a:t>
+            </a:r>
+          </a:p>
+          <a:p>
+            <a:pPr>
+              <a:lnSpc>
+                <a:spcPct val="150000"/>
+              </a:lnSpc>
+            </a:pPr>
+            <a:r>
+              <a:rPr lang="en-US" sz="2200" dirty="0"/>
+              <a:t>    image: </a:t>
+            </a:r>
+            <a:r>
+              <a:rPr lang="en-US" sz="2200" dirty="0" err="1"/>
+              <a:t>postgres:latest</a:t>
+            </a:r>
+            <a:r>
+              <a:rPr lang="en-US" sz="2200" dirty="0"/>
+              <a:t>      # </a:t>
+            </a:r>
+            <a:r>
+              <a:rPr lang="ru-RU" sz="2200" dirty="0"/>
+              <a:t>Откуда взять готовую базу данных</a:t>
+            </a:r>
+          </a:p>
+          <a:p>
+            <a:pPr>
+              <a:lnSpc>
+                <a:spcPct val="150000"/>
+              </a:lnSpc>
+            </a:pPr>
+            <a:r>
+              <a:rPr lang="ru-RU" sz="2200" dirty="0"/>
+              <a:t>    </a:t>
+            </a:r>
+            <a:r>
+              <a:rPr lang="en-US" sz="2200" dirty="0" err="1"/>
+              <a:t>container_name</a:t>
+            </a:r>
+            <a:r>
+              <a:rPr lang="en-US" sz="2200" dirty="0"/>
+              <a:t>: </a:t>
+            </a:r>
+            <a:r>
+              <a:rPr lang="en-US" sz="2200" dirty="0" err="1"/>
+              <a:t>postgres</a:t>
+            </a:r>
+            <a:endParaRPr lang="en-US" sz="2200" dirty="0"/>
+          </a:p>
+          <a:p>
+            <a:pPr>
+              <a:lnSpc>
+                <a:spcPct val="150000"/>
+              </a:lnSpc>
+            </a:pPr>
+            <a:r>
+              <a:rPr lang="en-US" sz="2200" dirty="0"/>
+              <a:t>    environment:                # </a:t>
+            </a:r>
+            <a:r>
+              <a:rPr lang="ru-RU" sz="2200" dirty="0"/>
+              <a:t>Настройки (пароль, имя базы)</a:t>
+            </a:r>
+          </a:p>
+          <a:p>
+            <a:pPr>
+              <a:lnSpc>
+                <a:spcPct val="150000"/>
+              </a:lnSpc>
+            </a:pPr>
+            <a:r>
+              <a:rPr lang="ru-RU" sz="2200" dirty="0"/>
+              <a:t>      </a:t>
+            </a:r>
+            <a:r>
+              <a:rPr lang="en-US" sz="2200" dirty="0"/>
+              <a:t>POSTGRES_DB: </a:t>
+            </a:r>
+            <a:r>
+              <a:rPr lang="en-US" sz="2200" dirty="0" err="1"/>
+              <a:t>my_notes</a:t>
+            </a:r>
+            <a:endParaRPr lang="en-US" sz="2200" dirty="0"/>
+          </a:p>
+          <a:p>
+            <a:pPr>
+              <a:lnSpc>
+                <a:spcPct val="150000"/>
+              </a:lnSpc>
+            </a:pPr>
+            <a:r>
+              <a:rPr lang="en-US" sz="2200" dirty="0"/>
+              <a:t>      POSTGRES_PASSWORD: admin</a:t>
+            </a:r>
+          </a:p>
+          <a:p>
+            <a:pPr>
+              <a:lnSpc>
+                <a:spcPct val="150000"/>
+              </a:lnSpc>
+            </a:pPr>
+            <a:r>
+              <a:rPr lang="en-US" sz="2200" dirty="0"/>
+              <a:t>    ports:</a:t>
+            </a:r>
+          </a:p>
+          <a:p>
+            <a:pPr>
+              <a:lnSpc>
+                <a:spcPct val="150000"/>
+              </a:lnSpc>
+            </a:pPr>
+            <a:r>
+              <a:rPr lang="en-US" sz="2200" dirty="0"/>
+              <a:t>      - "5432:5432"             # </a:t>
+            </a:r>
+            <a:r>
+              <a:rPr lang="ru-RU" sz="2200" dirty="0"/>
+              <a:t>Пробрасываем порт из контейнера наружу</a:t>
+            </a:r>
+          </a:p>
+          <a:p>
+            <a:pPr>
+              <a:lnSpc>
+                <a:spcPct val="150000"/>
+              </a:lnSpc>
+            </a:pPr>
+            <a:r>
+              <a:rPr lang="ru-RU" sz="2200" dirty="0"/>
+              <a:t>    </a:t>
+            </a:r>
+            <a:r>
+              <a:rPr lang="en-US" sz="2200" dirty="0"/>
+              <a:t>volumes:</a:t>
+            </a:r>
+          </a:p>
+          <a:p>
+            <a:pPr>
+              <a:lnSpc>
+                <a:spcPct val="150000"/>
+              </a:lnSpc>
+            </a:pPr>
+            <a:r>
+              <a:rPr lang="en-US" sz="2200" dirty="0"/>
+              <a:t>      - </a:t>
+            </a:r>
+            <a:r>
+              <a:rPr lang="en-US" sz="2200" dirty="0" err="1"/>
+              <a:t>pgdata</a:t>
+            </a:r>
+            <a:r>
+              <a:rPr lang="en-US" sz="2200" dirty="0"/>
+              <a:t>:/</a:t>
+            </a:r>
+            <a:r>
+              <a:rPr lang="en-US" sz="2200" dirty="0" err="1"/>
+              <a:t>var</a:t>
+            </a:r>
+            <a:r>
+              <a:rPr lang="en-US" sz="2200" dirty="0"/>
+              <a:t>/lib/</a:t>
+            </a:r>
+            <a:r>
+              <a:rPr lang="en-US" sz="2200" dirty="0" err="1"/>
+              <a:t>postgresql</a:t>
+            </a:r>
+            <a:r>
+              <a:rPr lang="en-US" sz="2200" dirty="0"/>
+              <a:t>/data # </a:t>
+            </a:r>
+            <a:r>
+              <a:rPr lang="ru-RU" sz="2200" dirty="0"/>
+              <a:t>Данные не пропадут при перезагрузке</a:t>
+            </a:r>
+            <a:endParaRPr lang="ru-RU" sz="2200" dirty="0"/>
+          </a:p>
+        </p:txBody>
+      </p:sp>
+    </p:spTree>
+    <p:extLst>
+      <p:ext uri="{BB962C8B-B14F-4D97-AF65-F5344CB8AC3E}">
+        <p14:creationId xmlns:p14="http://schemas.microsoft.com/office/powerpoint/2010/main" val="1948394125"/>
+      </p:ext>
+    </p:extLst>
+  </p:cSld>
+  <p:clrMapOvr>
+    <a:masterClrMapping/>
+  </p:clrMapOvr>
+  <p:timing>
+    <p:tnLst>
+      <p:par>
+        <p:cTn id="1" dur="indefinite" restart="never" nodeType="tmRoot"/>
+      </p:par>
+    </p:tnLst>
+  </p:timing>
+</p:sld>
+</file>
+
+<file path=ppt/slides/slide34.xml><?xml version="1.0" encoding="utf-8"?>
+<p:sld xmlns:a="http://schemas.openxmlformats.org/drawingml/2006/main" xmlns:r="http://schemas.openxmlformats.org/officeDocument/2006/relationships" xmlns:p="http://schemas.openxmlformats.org/presentationml/2006/main">
+  <p:cSld>
+    <p:spTree>
+      <p:nvGrpSpPr>
+        <p:cNvPr id="1" name=""/>
+        <p:cNvGrpSpPr/>
+        <p:nvPr/>
+      </p:nvGrpSpPr>
+      <p:grpSpPr>
+        <a:xfrm>
+          <a:off x="0" y="0"/>
+          <a:ext cx="0" cy="0"/>
+          <a:chOff x="0" y="0"/>
+          <a:chExt cx="0" cy="0"/>
+        </a:xfrm>
+      </p:grpSpPr>
+      <p:pic>
+        <p:nvPicPr>
+          <p:cNvPr id="2" name="Рисунок 1"/>
+          <p:cNvPicPr>
+            <a:picLocks noChangeAspect="1"/>
+          </p:cNvPicPr>
+          <p:nvPr/>
+        </p:nvPicPr>
+        <p:blipFill>
+          <a:blip r:embed="rId3">
+            <a:extLst>
+              <a:ext uri="{28A0092B-C50C-407E-A947-70E740481C1C}">
+                <a14:useLocalDpi xmlns:a14="http://schemas.microsoft.com/office/drawing/2010/main" val="0"/>
+              </a:ext>
+            </a:extLst>
+          </a:blip>
+          <a:stretch>
+            <a:fillRect/>
+          </a:stretch>
+        </p:blipFill>
+        <p:spPr>
+          <a:xfrm>
+            <a:off x="1560513" y="0"/>
+            <a:ext cx="9143999" cy="6858000"/>
+          </a:xfrm>
+          <a:prstGeom prst="rect">
+            <a:avLst/>
+          </a:prstGeom>
+        </p:spPr>
+      </p:pic>
+    </p:spTree>
+    <p:extLst>
+      <p:ext uri="{BB962C8B-B14F-4D97-AF65-F5344CB8AC3E}">
+        <p14:creationId xmlns:p14="http://schemas.microsoft.com/office/powerpoint/2010/main" val="1337447750"/>
       </p:ext>
     </p:extLst>
   </p:cSld>
@@ -3981,15 +12957,6 @@
               </a:rPr>
               <a:t>Слои приложения</a:t>
             </a:r>
-            <a:endParaRPr lang="ru-RU" sz="2800" b="1" dirty="0">
-              <a:solidFill>
-                <a:schemeClr val="tx2">
-                  <a:lumMod val="50000"/>
-                </a:schemeClr>
-              </a:solidFill>
-              <a:latin typeface="Bookman Old Style" panose="02050604050505020204" pitchFamily="18" charset="0"/>
-              <a:cs typeface="Times New Roman" panose="02020603050405020304" pitchFamily="18" charset="0"/>
-            </a:endParaRPr>
           </a:p>
         </p:txBody>
       </p:sp>
@@ -4002,7 +12969,7 @@
         <p:spPr>
           <a:xfrm>
             <a:off x="0" y="654357"/>
-            <a:ext cx="12192000" cy="3416320"/>
+            <a:ext cx="12192000" cy="4524315"/>
           </a:xfrm>
           <a:prstGeom prst="rect">
             <a:avLst/>
@@ -4020,20 +12987,12 @@
               </a:lnSpc>
             </a:pPr>
             <a:r>
-              <a:rPr lang="ru-RU" sz="2400" b="1" dirty="0"/>
-              <a:t>Проблема:</a:t>
-            </a:r>
-            <a:r>
-              <a:rPr lang="ru-RU" sz="2400" dirty="0"/>
-              <a:t> В обычных проектах код «перепутан». Если вы меняете структуру таблицы в базе данных, у вас «ломается» кнопка на экране. Это называется </a:t>
-            </a:r>
-            <a:r>
-              <a:rPr lang="ru-RU" sz="2400" b="1" dirty="0"/>
-              <a:t>жесткой связанностью</a:t>
+              <a:rPr lang="ru-RU" sz="2400" dirty="0"/>
+              <a:t>В профессиональной разработке приложение разбивается на несколько независимых проектов. Это позволяет физически ограничить зависимости (вы не сможете случайно вызвать базу данных из Ядра</a:t>
             </a:r>
             <a:r>
               <a:rPr lang="ru-RU" sz="2400" dirty="0" smtClean="0"/>
-              <a:t>.</a:t>
+              <a:t>).</a:t>
             </a:r>
           </a:p>
           <a:p>
@@ -4051,38 +13010,87 @@
               </a:lnSpc>
             </a:pPr>
             <a:r>
-              <a:rPr lang="ru-RU" sz="2400" dirty="0">
-                <a:solidFill>
-                  <a:srgbClr val="161616"/>
-                </a:solidFill>
-                <a:latin typeface="Bookman Old Style" panose="02050604050505020204" pitchFamily="18" charset="0"/>
-              </a:rPr>
-              <a:t>"Если вы считаете, что хорошая архитектура дорого, попробуйте плохую архитектуру". - </a:t>
-            </a:r>
-            <a:r>
-              <a:rPr lang="ru-RU" sz="2400" i="1" dirty="0">
-                <a:solidFill>
-                  <a:srgbClr val="161616"/>
-                </a:solidFill>
-                <a:latin typeface="Bookman Old Style" panose="02050604050505020204" pitchFamily="18" charset="0"/>
-              </a:rPr>
-              <a:t>Брайан Колон и Джозеф </a:t>
-            </a:r>
-            <a:r>
-              <a:rPr lang="ru-RU" sz="2400" i="1" dirty="0" err="1" smtClean="0">
-                <a:solidFill>
-                  <a:srgbClr val="161616"/>
-                </a:solidFill>
-                <a:latin typeface="Bookman Old Style" panose="02050604050505020204" pitchFamily="18" charset="0"/>
-              </a:rPr>
-              <a:t>Yoder</a:t>
-            </a:r>
-            <a:endParaRPr lang="ru-RU" sz="2400" i="1" dirty="0">
-              <a:solidFill>
-                <a:srgbClr val="161616"/>
-              </a:solidFill>
-              <a:latin typeface="Bookman Old Style" panose="02050604050505020204" pitchFamily="18" charset="0"/>
-            </a:endParaRPr>
+              <a:rPr lang="ru-RU" sz="2400" b="1" dirty="0"/>
+              <a:t>Основные проекты:</a:t>
+            </a:r>
+            <a:endParaRPr lang="ru-RU" sz="2400" dirty="0"/>
+          </a:p>
+          <a:p>
+            <a:pPr>
+              <a:lnSpc>
+                <a:spcPct val="150000"/>
+              </a:lnSpc>
+            </a:pPr>
+            <a:r>
+              <a:rPr lang="ru-RU" sz="2400" b="1" dirty="0" err="1"/>
+              <a:t>Core</a:t>
+            </a:r>
+            <a:r>
+              <a:rPr lang="ru-RU" sz="2400" b="1" dirty="0"/>
+              <a:t> (Ядро):</a:t>
+            </a:r>
+            <a:r>
+              <a:rPr lang="ru-RU" sz="2400" dirty="0"/>
+              <a:t> содержит </a:t>
+            </a:r>
+            <a:r>
+              <a:rPr lang="ru-RU" sz="2400" b="1" dirty="0" err="1"/>
+              <a:t>Domain</a:t>
+            </a:r>
+            <a:r>
+              <a:rPr lang="ru-RU" sz="2400" dirty="0"/>
+              <a:t> и </a:t>
+            </a:r>
+            <a:r>
+              <a:rPr lang="ru-RU" sz="2400" b="1" dirty="0" err="1"/>
+              <a:t>Application</a:t>
+            </a:r>
+            <a:r>
+              <a:rPr lang="ru-RU" sz="2400" dirty="0"/>
+              <a:t>. Это сердце системы.</a:t>
+            </a:r>
+          </a:p>
+          <a:p>
+            <a:pPr>
+              <a:lnSpc>
+                <a:spcPct val="150000"/>
+              </a:lnSpc>
+            </a:pPr>
+            <a:r>
+              <a:rPr lang="ru-RU" sz="2400" b="1" dirty="0" err="1"/>
+              <a:t>Infrastructure</a:t>
+            </a:r>
+            <a:r>
+              <a:rPr lang="ru-RU" sz="2400" b="1" dirty="0"/>
+              <a:t>:</a:t>
+            </a:r>
+            <a:r>
+              <a:rPr lang="ru-RU" sz="2400" dirty="0"/>
+              <a:t> техническая реализация (БД, сторонние сервисы).</a:t>
+            </a:r>
+          </a:p>
+          <a:p>
+            <a:pPr>
+              <a:lnSpc>
+                <a:spcPct val="150000"/>
+              </a:lnSpc>
+            </a:pPr>
+            <a:r>
+              <a:rPr lang="ru-RU" sz="2400" b="1" dirty="0"/>
+              <a:t>API (</a:t>
+            </a:r>
+            <a:r>
+              <a:rPr lang="ru-RU" sz="2400" b="1" dirty="0" err="1"/>
+              <a:t>Web</a:t>
+            </a:r>
+            <a:r>
+              <a:rPr lang="ru-RU" sz="2400" b="1" dirty="0"/>
+              <a:t> API):</a:t>
+            </a:r>
+            <a:r>
+              <a:rPr lang="ru-RU" sz="2400" dirty="0"/>
+              <a:t> точка входа, которая принимает запросы из интернета.</a:t>
+            </a:r>
           </a:p>
         </p:txBody>
       </p:sp>
@@ -4123,40 +13131,171 @@
           <a:chExt cx="0" cy="0"/>
         </a:xfrm>
       </p:grpSpPr>
-      <p:pic>
-        <p:nvPicPr>
-          <p:cNvPr id="2" name="Рисунок 1"/>
-          <p:cNvPicPr>
-            <a:picLocks noChangeAspect="1"/>
-          </p:cNvPicPr>
+      <p:sp>
+        <p:nvSpPr>
+          <p:cNvPr id="7" name="Прямоугольник 6"/>
+          <p:cNvSpPr/>
           <p:nvPr/>
-        </p:nvPicPr>
-        <p:blipFill>
-          <a:blip r:embed="rId3">
-            <a:extLst>
-              <a:ext uri="{28A0092B-C50C-407E-A947-70E740481C1C}">
-                <a14:useLocalDpi xmlns:a14="http://schemas.microsoft.com/office/drawing/2010/main" val="0"/>
-              </a:ext>
-            </a:extLst>
-          </a:blip>
-          <a:stretch>
-            <a:fillRect/>
-          </a:stretch>
-        </p:blipFill>
+        </p:nvSpPr>
         <p:spPr>
           <a:xfrm>
-            <a:off x="1560513" y="0"/>
-            <a:ext cx="9143999" cy="6858000"/>
+            <a:off x="0" y="0"/>
+            <a:ext cx="12192000" cy="5632311"/>
           </a:xfrm>
           <a:prstGeom prst="rect">
             <a:avLst/>
           </a:prstGeom>
         </p:spPr>
-      </p:pic>
+        <p:txBody>
+          <a:bodyPr wrap="square" lIns="360000" rIns="360000">
+            <a:spAutoFit/>
+          </a:bodyPr>
+          <a:lstStyle/>
+          <a:p>
+            <a:pPr>
+              <a:lnSpc>
+                <a:spcPct val="150000"/>
+              </a:lnSpc>
+            </a:pPr>
+            <a:r>
+              <a:rPr lang="ru-RU" sz="2400" b="1" dirty="0"/>
+              <a:t>Слой </a:t>
+            </a:r>
+            <a:r>
+              <a:rPr lang="en-US" sz="2400" b="1" dirty="0"/>
+              <a:t>Domain — </a:t>
+            </a:r>
+            <a:r>
+              <a:rPr lang="ru-RU" sz="2400" b="1" dirty="0"/>
+              <a:t>Ядро бизнеса</a:t>
+            </a:r>
+          </a:p>
+          <a:p>
+            <a:pPr>
+              <a:lnSpc>
+                <a:spcPct val="150000"/>
+              </a:lnSpc>
+            </a:pPr>
+            <a:r>
+              <a:rPr lang="ru-RU" sz="2400" dirty="0" smtClean="0"/>
+              <a:t>Самый </a:t>
+            </a:r>
+            <a:r>
+              <a:rPr lang="ru-RU" sz="2400" dirty="0"/>
+              <a:t>важный и самый «чистый» слой. Он </a:t>
+            </a:r>
+            <a:r>
+              <a:rPr lang="ru-RU" sz="2400" b="1" dirty="0"/>
+              <a:t>ничего не знает</a:t>
+            </a:r>
+            <a:r>
+              <a:rPr lang="ru-RU" sz="2400" dirty="0"/>
+              <a:t> об остальном мире.</a:t>
+            </a:r>
+          </a:p>
+          <a:p>
+            <a:pPr>
+              <a:lnSpc>
+                <a:spcPct val="150000"/>
+              </a:lnSpc>
+            </a:pPr>
+            <a:r>
+              <a:rPr lang="ru-RU" sz="2400" b="1" dirty="0"/>
+              <a:t>Что внутри:</a:t>
+            </a:r>
+            <a:endParaRPr lang="ru-RU" sz="2400" dirty="0"/>
+          </a:p>
+          <a:p>
+            <a:pPr lvl="1">
+              <a:lnSpc>
+                <a:spcPct val="150000"/>
+              </a:lnSpc>
+            </a:pPr>
+            <a:r>
+              <a:rPr lang="ru-RU" sz="2400" b="1" dirty="0" err="1"/>
+              <a:t>Entities</a:t>
+            </a:r>
+            <a:r>
+              <a:rPr lang="ru-RU" sz="2400" b="1" dirty="0"/>
+              <a:t> (Сущности):</a:t>
+            </a:r>
+            <a:r>
+              <a:rPr lang="ru-RU" sz="2400" dirty="0"/>
+              <a:t> Классы с логикой (</a:t>
+            </a:r>
+            <a:r>
+              <a:rPr lang="ru-RU" sz="2400" dirty="0" err="1"/>
+              <a:t>Note</a:t>
+            </a:r>
+            <a:r>
+              <a:rPr lang="ru-RU" sz="2400" dirty="0"/>
+              <a:t>, </a:t>
+            </a:r>
+            <a:r>
+              <a:rPr lang="ru-RU" sz="2400" dirty="0" err="1"/>
+              <a:t>User</a:t>
+            </a:r>
+            <a:r>
+              <a:rPr lang="ru-RU" sz="2400" dirty="0"/>
+              <a:t>).</a:t>
+            </a:r>
+          </a:p>
+          <a:p>
+            <a:pPr lvl="1">
+              <a:lnSpc>
+                <a:spcPct val="150000"/>
+              </a:lnSpc>
+            </a:pPr>
+            <a:r>
+              <a:rPr lang="ru-RU" sz="2400" b="1" dirty="0" err="1"/>
+              <a:t>Abstractions</a:t>
+            </a:r>
+            <a:r>
+              <a:rPr lang="ru-RU" sz="2400" b="1" dirty="0"/>
+              <a:t> (Интерфейсы):</a:t>
+            </a:r>
+            <a:r>
+              <a:rPr lang="ru-RU" sz="2400" dirty="0"/>
+              <a:t> Контракты для </a:t>
+            </a:r>
+            <a:r>
+              <a:rPr lang="ru-RU" sz="2400" dirty="0" err="1"/>
+              <a:t>репозиториев</a:t>
+            </a:r>
+            <a:r>
+              <a:rPr lang="ru-RU" sz="2400" dirty="0"/>
+              <a:t> и сервисов.</a:t>
+            </a:r>
+          </a:p>
+          <a:p>
+            <a:pPr>
+              <a:lnSpc>
+                <a:spcPct val="150000"/>
+              </a:lnSpc>
+            </a:pPr>
+            <a:r>
+              <a:rPr lang="ru-RU" sz="2400" b="1" dirty="0"/>
+              <a:t>Главное правило:</a:t>
+            </a:r>
+            <a:r>
+              <a:rPr lang="ru-RU" sz="2400" dirty="0"/>
+              <a:t> Здесь нет зависимостей от других проектов. Если вы решите удалить всё приложение и оставить только </a:t>
+            </a:r>
+            <a:r>
+              <a:rPr lang="ru-RU" sz="2400" dirty="0" err="1"/>
+              <a:t>Domain</a:t>
+            </a:r>
+            <a:r>
+              <a:rPr lang="ru-RU" sz="2400" dirty="0"/>
+              <a:t> — он должен скомпилироваться и работать.</a:t>
+            </a:r>
+          </a:p>
+        </p:txBody>
+      </p:sp>
     </p:spTree>
     <p:extLst>
       <p:ext uri="{BB962C8B-B14F-4D97-AF65-F5344CB8AC3E}">
-        <p14:creationId xmlns:p14="http://schemas.microsoft.com/office/powerpoint/2010/main" val="1337447750"/>
+        <p14:creationId xmlns:p14="http://schemas.microsoft.com/office/powerpoint/2010/main" val="1950614818"/>
       </p:ext>
     </p:extLst>
   </p:cSld>
